--- a/resources/presentations/CMAPP2 .pptx
+++ b/resources/presentations/CMAPP2 .pptx
@@ -52,7 +52,7 @@
         <p:spPr>
           <a:xfrm>
             <a:off x="3291480" y="11003760"/>
-            <a:ext cx="37304280" cy="5496120"/>
+            <a:ext cx="37303920" cy="5495760"/>
           </a:xfrm>
           <a:prstGeom prst="rect">
             <a:avLst/>
@@ -153,7 +153,7 @@
         <p:txBody>
           <a:bodyPr/>
           <a:p>
-            <a:fld id="{9B9245B1-FF26-4BFE-BF37-3DF6FE0BAF16}" type="slidenum">
+            <a:fld id="{F2151ADC-F28F-497B-AB54-334E62B332B4}" type="slidenum">
               <a:t>&lt;#&gt;</a:t>
             </a:fld>
           </a:p>
@@ -236,7 +236,7 @@
         <p:txBody>
           <a:bodyPr/>
           <a:p>
-            <a:fld id="{6BF1F61C-89FD-49EA-B826-12C5FFCF920F}" type="slidenum">
+            <a:fld id="{C201A46F-62CA-4E2A-A616-356D46F337EB}" type="slidenum">
               <a:t>&lt;#&gt;</a:t>
             </a:fld>
           </a:p>
@@ -319,7 +319,7 @@
         <p:txBody>
           <a:bodyPr/>
           <a:p>
-            <a:fld id="{DA52C2ED-AFDE-469D-AB13-96B40C9FBAC8}" type="slidenum">
+            <a:fld id="{AF2EC9DC-B5BF-40F0-8938-6EBC974E343E}" type="slidenum">
               <a:t>&lt;#&gt;</a:t>
             </a:fld>
           </a:p>
@@ -402,7 +402,7 @@
         <p:txBody>
           <a:bodyPr/>
           <a:p>
-            <a:fld id="{B09B3E5D-6CAA-4500-B666-A8CF5A5F9B33}" type="slidenum">
+            <a:fld id="{2D3C559E-9461-4920-AF5F-589C345F177F}" type="slidenum">
               <a:t>&lt;#&gt;</a:t>
             </a:fld>
           </a:p>
@@ -485,7 +485,7 @@
         <p:txBody>
           <a:bodyPr/>
           <a:p>
-            <a:fld id="{93A6A70A-2CEE-4AFA-90CE-3FAC0286CEE1}" type="slidenum">
+            <a:fld id="{D9599A8D-F396-4329-BD72-CB20CFCDBF0B}" type="slidenum">
               <a:t>&lt;#&gt;</a:t>
             </a:fld>
           </a:p>
@@ -536,7 +536,7 @@
       </p:grpSpPr>
       <p:sp>
         <p:nvSpPr>
-          <p:cNvPr id="34" name="PlaceHolder 1"/>
+          <p:cNvPr id="38" name="PlaceHolder 1"/>
           <p:cNvSpPr>
             <a:spLocks noGrp="1"/>
           </p:cNvSpPr>
@@ -547,7 +547,7 @@
         <p:spPr>
           <a:xfrm>
             <a:off x="3291480" y="11003760"/>
-            <a:ext cx="37304280" cy="5496120"/>
+            <a:ext cx="37303920" cy="5495760"/>
           </a:xfrm>
           <a:prstGeom prst="rect">
             <a:avLst/>
@@ -576,7 +576,7 @@
       </p:sp>
       <p:sp>
         <p:nvSpPr>
-          <p:cNvPr id="35" name="PlaceHolder 2"/>
+          <p:cNvPr id="39" name="PlaceHolder 2"/>
           <p:cNvSpPr>
             <a:spLocks noGrp="1"/>
           </p:cNvSpPr>
@@ -651,7 +651,7 @@
         <p:txBody>
           <a:bodyPr/>
           <a:p>
-            <a:fld id="{20021683-DF7C-4481-9A7B-6A00E98C3F0C}" type="slidenum">
+            <a:fld id="{63D408D4-5654-4D57-A821-66BCD1B747B1}" type="slidenum">
               <a:t>&lt;#&gt;</a:t>
             </a:fld>
           </a:p>
@@ -734,7 +734,7 @@
         <p:txBody>
           <a:bodyPr/>
           <a:p>
-            <a:fld id="{5E01BBA5-D0BC-45D9-B70C-8B8CCDE63BCB}" type="slidenum">
+            <a:fld id="{B0801C16-4BBE-403F-B26B-2ACDDEA49D15}" type="slidenum">
               <a:t>&lt;#&gt;</a:t>
             </a:fld>
           </a:p>
@@ -785,7 +785,7 @@
       </p:grpSpPr>
       <p:sp>
         <p:nvSpPr>
-          <p:cNvPr id="53" name="PlaceHolder 1"/>
+          <p:cNvPr id="59" name="PlaceHolder 1"/>
           <p:cNvSpPr>
             <a:spLocks noGrp="1"/>
           </p:cNvSpPr>
@@ -796,7 +796,7 @@
         <p:spPr>
           <a:xfrm>
             <a:off x="3291480" y="11003760"/>
-            <a:ext cx="37304280" cy="5496120"/>
+            <a:ext cx="37303920" cy="5495760"/>
           </a:xfrm>
           <a:prstGeom prst="rect">
             <a:avLst/>
@@ -825,7 +825,7 @@
       </p:sp>
       <p:sp>
         <p:nvSpPr>
-          <p:cNvPr id="54" name="PlaceHolder 2"/>
+          <p:cNvPr id="60" name="PlaceHolder 2"/>
           <p:cNvSpPr>
             <a:spLocks noGrp="1"/>
           </p:cNvSpPr>
@@ -868,7 +868,7 @@
       </p:sp>
       <p:sp>
         <p:nvSpPr>
-          <p:cNvPr id="55" name="PlaceHolder 3"/>
+          <p:cNvPr id="61" name="PlaceHolder 3"/>
           <p:cNvSpPr>
             <a:spLocks noGrp="1"/>
           </p:cNvSpPr>
@@ -943,7 +943,7 @@
         <p:txBody>
           <a:bodyPr/>
           <a:p>
-            <a:fld id="{18CC7BF0-BB0C-4462-83C5-5034A936EC86}" type="slidenum">
+            <a:fld id="{EACE6346-8C7F-4CC3-8ACF-8D85E4A627C2}" type="slidenum">
               <a:t>&lt;#&gt;</a:t>
             </a:fld>
           </a:p>
@@ -1026,7 +1026,7 @@
         <p:txBody>
           <a:bodyPr/>
           <a:p>
-            <a:fld id="{AD4C656A-97B1-4C7D-B9A9-7941912C8FBF}" type="slidenum">
+            <a:fld id="{B157BEBF-AE4F-4F66-AC31-9D4F6DF18F22}" type="slidenum">
               <a:t>&lt;#&gt;</a:t>
             </a:fld>
           </a:p>
@@ -1077,7 +1077,7 @@
       </p:grpSpPr>
       <p:sp>
         <p:nvSpPr>
-          <p:cNvPr id="71" name="PlaceHolder 1"/>
+          <p:cNvPr id="80" name="PlaceHolder 1"/>
           <p:cNvSpPr>
             <a:spLocks noGrp="1"/>
           </p:cNvSpPr>
@@ -1088,7 +1088,7 @@
         <p:spPr>
           <a:xfrm>
             <a:off x="3291480" y="11003760"/>
-            <a:ext cx="37304280" cy="5496120"/>
+            <a:ext cx="37303920" cy="5495760"/>
           </a:xfrm>
           <a:prstGeom prst="rect">
             <a:avLst/>
@@ -1149,7 +1149,7 @@
         <p:txBody>
           <a:bodyPr/>
           <a:p>
-            <a:fld id="{473D393C-C0DE-4666-B103-D1C9A8EBA54C}" type="slidenum">
+            <a:fld id="{0627C4A1-C387-4349-AC73-17DCD99A223C}" type="slidenum">
               <a:t>&lt;#&gt;</a:t>
             </a:fld>
           </a:p>
@@ -1232,7 +1232,7 @@
         <p:txBody>
           <a:bodyPr/>
           <a:p>
-            <a:fld id="{BE4B89BA-A7DB-40B9-8578-122B151DF0C3}" type="slidenum">
+            <a:fld id="{866F3210-5C79-44E2-BB54-0F8B679548C2}" type="slidenum">
               <a:t>&lt;#&gt;</a:t>
             </a:fld>
           </a:p>
@@ -1300,8 +1300,8 @@
         </p:blipFill>
         <p:spPr>
           <a:xfrm rot="16200000">
-            <a:off x="-11070360" y="16463160"/>
-            <a:ext cx="14270760" cy="3933000"/>
+            <a:off x="-11070000" y="16463520"/>
+            <a:ext cx="14270400" cy="3932640"/>
           </a:xfrm>
           <a:prstGeom prst="rect">
             <a:avLst/>
@@ -1323,8 +1323,8 @@
         </p:blipFill>
         <p:spPr>
           <a:xfrm rot="5400000">
-            <a:off x="40694760" y="16459200"/>
-            <a:ext cx="14270760" cy="3933000"/>
+            <a:off x="40695120" y="16459200"/>
+            <a:ext cx="14270400" cy="3932640"/>
           </a:xfrm>
           <a:prstGeom prst="rect">
             <a:avLst/>
@@ -1347,7 +1347,7 @@
         <p:spPr>
           <a:xfrm>
             <a:off x="6946920" y="33426360"/>
-            <a:ext cx="29993400" cy="1443960"/>
+            <a:ext cx="29993040" cy="1443600"/>
           </a:xfrm>
           <a:prstGeom prst="rect">
             <a:avLst/>
@@ -1366,7 +1366,7 @@
         <p:spPr>
           <a:xfrm>
             <a:off x="6946920" y="33998040"/>
-            <a:ext cx="21941640" cy="1266120"/>
+            <a:ext cx="21941280" cy="1265760"/>
           </a:xfrm>
           <a:prstGeom prst="rect">
             <a:avLst/>
@@ -1432,7 +1432,7 @@
         <p:spPr>
           <a:xfrm>
             <a:off x="3291480" y="11003760"/>
-            <a:ext cx="37304280" cy="5496120"/>
+            <a:ext cx="37303920" cy="5495760"/>
           </a:xfrm>
           <a:prstGeom prst="rect">
             <a:avLst/>
@@ -1481,7 +1481,7 @@
         <p:spPr>
           <a:xfrm>
             <a:off x="14994360" y="29977560"/>
-            <a:ext cx="13898160" cy="2282040"/>
+            <a:ext cx="13897800" cy="2281680"/>
           </a:xfrm>
           <a:prstGeom prst="rect">
             <a:avLst/>
@@ -1553,7 +1553,7 @@
         <p:spPr>
           <a:xfrm>
             <a:off x="31453560" y="29977560"/>
-            <a:ext cx="10240560" cy="2282040"/>
+            <a:ext cx="10240200" cy="2281680"/>
           </a:xfrm>
           <a:prstGeom prst="rect">
             <a:avLst/>
@@ -1595,7 +1595,7 @@
                 <a:tab algn="l" pos="0"/>
               </a:tabLst>
             </a:pPr>
-            <a:fld id="{20DC07E3-EBCD-4E00-8CB1-1788C9D3A2E3}" type="slidenum">
+            <a:fld id="{D4A0A509-E88F-4C39-8BB8-64D53EA235AD}" type="slidenum">
               <a:rPr b="0" lang="en-US" sz="5030" spc="-1" strike="noStrike">
                 <a:solidFill>
                   <a:schemeClr val="dk1"/>
@@ -1627,7 +1627,7 @@
         <p:spPr>
           <a:xfrm>
             <a:off x="2192760" y="29977560"/>
-            <a:ext cx="10240560" cy="2282040"/>
+            <a:ext cx="10240200" cy="2281680"/>
           </a:xfrm>
           <a:prstGeom prst="rect">
             <a:avLst/>
@@ -1934,7 +1934,7 @@
       </p:grpSpPr>
       <p:pic>
         <p:nvPicPr>
-          <p:cNvPr id="79" name="New picture" descr=""/>
+          <p:cNvPr id="90" name="New picture" descr=""/>
           <p:cNvPicPr/>
           <p:nvPr/>
         </p:nvPicPr>
@@ -1944,8 +1944,8 @@
         </p:blipFill>
         <p:spPr>
           <a:xfrm rot="16200000">
-            <a:off x="-11070360" y="16463160"/>
-            <a:ext cx="14270760" cy="3933000"/>
+            <a:off x="-11070000" y="16463520"/>
+            <a:ext cx="14270400" cy="3932640"/>
           </a:xfrm>
           <a:prstGeom prst="rect">
             <a:avLst/>
@@ -1957,7 +1957,7 @@
       </p:pic>
       <p:pic>
         <p:nvPicPr>
-          <p:cNvPr id="80" name="New picture" descr=""/>
+          <p:cNvPr id="91" name="New picture" descr=""/>
           <p:cNvPicPr/>
           <p:nvPr/>
         </p:nvPicPr>
@@ -1967,8 +1967,8 @@
         </p:blipFill>
         <p:spPr>
           <a:xfrm rot="5400000">
-            <a:off x="40694760" y="16459200"/>
-            <a:ext cx="14270760" cy="3933000"/>
+            <a:off x="40695120" y="16459200"/>
+            <a:ext cx="14270400" cy="3932640"/>
           </a:xfrm>
           <a:prstGeom prst="rect">
             <a:avLst/>
@@ -1980,7 +1980,7 @@
       </p:pic>
       <p:pic>
         <p:nvPicPr>
-          <p:cNvPr id="81" name="New picture" descr=""/>
+          <p:cNvPr id="92" name="New picture" descr=""/>
           <p:cNvPicPr/>
           <p:nvPr/>
         </p:nvPicPr>
@@ -1991,7 +1991,7 @@
         <p:spPr>
           <a:xfrm>
             <a:off x="6946920" y="33426360"/>
-            <a:ext cx="29993400" cy="1443960"/>
+            <a:ext cx="29993040" cy="1443600"/>
           </a:xfrm>
           <a:prstGeom prst="rect">
             <a:avLst/>
@@ -2003,14 +2003,14 @@
       </p:pic>
       <p:sp>
         <p:nvSpPr>
-          <p:cNvPr id="82" name="New shape"/>
+          <p:cNvPr id="93" name="New shape"/>
           <p:cNvSpPr/>
           <p:nvPr/>
         </p:nvSpPr>
         <p:spPr>
           <a:xfrm>
             <a:off x="6946920" y="33998040"/>
-            <a:ext cx="21941640" cy="1266120"/>
+            <a:ext cx="21941280" cy="1265760"/>
           </a:xfrm>
           <a:prstGeom prst="rect">
             <a:avLst/>
@@ -2065,7 +2065,7 @@
       </p:sp>
       <p:sp>
         <p:nvSpPr>
-          <p:cNvPr id="83" name="PlaceHolder 1"/>
+          <p:cNvPr id="94" name="PlaceHolder 1"/>
           <p:cNvSpPr>
             <a:spLocks noGrp="1"/>
           </p:cNvSpPr>
@@ -2076,7 +2076,7 @@
         <p:spPr>
           <a:xfrm>
             <a:off x="14994360" y="29977560"/>
-            <a:ext cx="13898160" cy="2282040"/>
+            <a:ext cx="13897800" cy="2281680"/>
           </a:xfrm>
           <a:prstGeom prst="rect">
             <a:avLst/>
@@ -2137,7 +2137,7 @@
       </p:sp>
       <p:sp>
         <p:nvSpPr>
-          <p:cNvPr id="84" name="PlaceHolder 2"/>
+          <p:cNvPr id="95" name="PlaceHolder 2"/>
           <p:cNvSpPr>
             <a:spLocks noGrp="1"/>
           </p:cNvSpPr>
@@ -2148,7 +2148,7 @@
         <p:spPr>
           <a:xfrm>
             <a:off x="31453560" y="29977560"/>
-            <a:ext cx="10240560" cy="2282040"/>
+            <a:ext cx="10240200" cy="2281680"/>
           </a:xfrm>
           <a:prstGeom prst="rect">
             <a:avLst/>
@@ -2190,7 +2190,7 @@
                 <a:tab algn="l" pos="0"/>
               </a:tabLst>
             </a:pPr>
-            <a:fld id="{A1E6A5B8-868B-4EFB-A2F7-5ECA7EDC39E2}" type="slidenum">
+            <a:fld id="{3B0BEEF4-4467-416A-9BB6-9790AE9B16E1}" type="slidenum">
               <a:rPr b="0" lang="en-US" sz="5030" spc="-1" strike="noStrike">
                 <a:solidFill>
                   <a:schemeClr val="dk1"/>
@@ -2211,7 +2211,7 @@
       </p:sp>
       <p:sp>
         <p:nvSpPr>
-          <p:cNvPr id="85" name="PlaceHolder 3"/>
+          <p:cNvPr id="96" name="PlaceHolder 3"/>
           <p:cNvSpPr>
             <a:spLocks noGrp="1"/>
           </p:cNvSpPr>
@@ -2222,7 +2222,7 @@
         <p:spPr>
           <a:xfrm>
             <a:off x="2192760" y="29977560"/>
-            <a:ext cx="10240560" cy="2282040"/>
+            <a:ext cx="10240200" cy="2281680"/>
           </a:xfrm>
           <a:prstGeom prst="rect">
             <a:avLst/>
@@ -2265,6 +2265,280 @@
                 <a:srgbClr val="000000"/>
               </a:solidFill>
               <a:latin typeface="Times New Roman"/>
+            </a:endParaRPr>
+          </a:p>
+        </p:txBody>
+      </p:sp>
+      <p:sp>
+        <p:nvSpPr>
+          <p:cNvPr id="97" name="PlaceHolder 4"/>
+          <p:cNvSpPr>
+            <a:spLocks noGrp="1"/>
+          </p:cNvSpPr>
+          <p:nvPr>
+            <p:ph type="title"/>
+          </p:nvPr>
+        </p:nvSpPr>
+        <p:spPr>
+          <a:xfrm>
+            <a:off x="2194560" y="1313280"/>
+            <a:ext cx="39501720" cy="5496840"/>
+          </a:xfrm>
+          <a:prstGeom prst="rect">
+            <a:avLst/>
+          </a:prstGeom>
+          <a:noFill/>
+          <a:ln w="0">
+            <a:noFill/>
+          </a:ln>
+        </p:spPr>
+        <p:txBody>
+          <a:bodyPr lIns="0" rIns="0" tIns="0" bIns="0" anchor="ctr">
+            <a:noAutofit/>
+          </a:bodyPr>
+          <a:p>
+            <a:pPr indent="0" algn="ctr">
+              <a:buNone/>
+            </a:pPr>
+            <a:r>
+              <a:rPr b="0" lang="en-US" sz="4400" spc="-1" strike="noStrike">
+                <a:solidFill>
+                  <a:srgbClr val="000000"/>
+                </a:solidFill>
+                <a:latin typeface="Arial"/>
+              </a:rPr>
+              <a:t>Click to edit the title text format</a:t>
+            </a:r>
+            <a:endParaRPr b="0" lang="en-US" sz="4400" spc="-1" strike="noStrike">
+              <a:solidFill>
+                <a:srgbClr val="000000"/>
+              </a:solidFill>
+              <a:latin typeface="Arial"/>
+            </a:endParaRPr>
+          </a:p>
+        </p:txBody>
+      </p:sp>
+      <p:sp>
+        <p:nvSpPr>
+          <p:cNvPr id="98" name="PlaceHolder 5"/>
+          <p:cNvSpPr>
+            <a:spLocks noGrp="1"/>
+          </p:cNvSpPr>
+          <p:nvPr>
+            <p:ph type="body"/>
+          </p:nvPr>
+        </p:nvSpPr>
+        <p:spPr>
+          <a:xfrm>
+            <a:off x="2194560" y="7702560"/>
+            <a:ext cx="39501720" cy="19092240"/>
+          </a:xfrm>
+          <a:prstGeom prst="rect">
+            <a:avLst/>
+          </a:prstGeom>
+          <a:noFill/>
+          <a:ln w="0">
+            <a:noFill/>
+          </a:ln>
+        </p:spPr>
+        <p:txBody>
+          <a:bodyPr lIns="0" rIns="0" tIns="0" bIns="0" anchor="t">
+            <a:normAutofit/>
+          </a:bodyPr>
+          <a:p>
+            <a:pPr marL="432000" indent="-324000">
+              <a:spcBef>
+                <a:spcPts val="1417"/>
+              </a:spcBef>
+              <a:buClr>
+                <a:srgbClr val="000000"/>
+              </a:buClr>
+              <a:buSzPct val="45000"/>
+              <a:buFont typeface="Wingdings" charset="2"/>
+              <a:buChar char=""/>
+            </a:pPr>
+            <a:r>
+              <a:rPr b="0" lang="en-US" sz="3200" spc="-1" strike="noStrike">
+                <a:solidFill>
+                  <a:srgbClr val="000000"/>
+                </a:solidFill>
+                <a:latin typeface="Arial"/>
+              </a:rPr>
+              <a:t>Click to edit the outline text format</a:t>
+            </a:r>
+            <a:endParaRPr b="0" lang="en-US" sz="3200" spc="-1" strike="noStrike">
+              <a:solidFill>
+                <a:srgbClr val="000000"/>
+              </a:solidFill>
+              <a:latin typeface="Arial"/>
+            </a:endParaRPr>
+          </a:p>
+          <a:p>
+            <a:pPr lvl="1" marL="864000" indent="-324000">
+              <a:spcBef>
+                <a:spcPts val="1134"/>
+              </a:spcBef>
+              <a:buClr>
+                <a:srgbClr val="000000"/>
+              </a:buClr>
+              <a:buSzPct val="75000"/>
+              <a:buFont typeface="Symbol" charset="2"/>
+              <a:buChar char=""/>
+            </a:pPr>
+            <a:r>
+              <a:rPr b="0" lang="en-US" sz="2800" spc="-1" strike="noStrike">
+                <a:solidFill>
+                  <a:srgbClr val="000000"/>
+                </a:solidFill>
+                <a:latin typeface="Arial"/>
+              </a:rPr>
+              <a:t>Second Outline Level</a:t>
+            </a:r>
+            <a:endParaRPr b="0" lang="en-US" sz="2800" spc="-1" strike="noStrike">
+              <a:solidFill>
+                <a:srgbClr val="000000"/>
+              </a:solidFill>
+              <a:latin typeface="Arial"/>
+            </a:endParaRPr>
+          </a:p>
+          <a:p>
+            <a:pPr lvl="2" marL="1296000" indent="-288000">
+              <a:spcBef>
+                <a:spcPts val="850"/>
+              </a:spcBef>
+              <a:buClr>
+                <a:srgbClr val="000000"/>
+              </a:buClr>
+              <a:buSzPct val="45000"/>
+              <a:buFont typeface="Wingdings" charset="2"/>
+              <a:buChar char=""/>
+            </a:pPr>
+            <a:r>
+              <a:rPr b="0" lang="en-US" sz="2400" spc="-1" strike="noStrike">
+                <a:solidFill>
+                  <a:srgbClr val="000000"/>
+                </a:solidFill>
+                <a:latin typeface="Arial"/>
+              </a:rPr>
+              <a:t>Third Outline Level</a:t>
+            </a:r>
+            <a:endParaRPr b="0" lang="en-US" sz="2400" spc="-1" strike="noStrike">
+              <a:solidFill>
+                <a:srgbClr val="000000"/>
+              </a:solidFill>
+              <a:latin typeface="Arial"/>
+            </a:endParaRPr>
+          </a:p>
+          <a:p>
+            <a:pPr lvl="3" marL="1728000" indent="-216000">
+              <a:spcBef>
+                <a:spcPts val="567"/>
+              </a:spcBef>
+              <a:buClr>
+                <a:srgbClr val="000000"/>
+              </a:buClr>
+              <a:buSzPct val="75000"/>
+              <a:buFont typeface="Symbol" charset="2"/>
+              <a:buChar char=""/>
+            </a:pPr>
+            <a:r>
+              <a:rPr b="0" lang="en-US" sz="2000" spc="-1" strike="noStrike">
+                <a:solidFill>
+                  <a:srgbClr val="000000"/>
+                </a:solidFill>
+                <a:latin typeface="Arial"/>
+              </a:rPr>
+              <a:t>Fourth Outline Level</a:t>
+            </a:r>
+            <a:endParaRPr b="0" lang="en-US" sz="2000" spc="-1" strike="noStrike">
+              <a:solidFill>
+                <a:srgbClr val="000000"/>
+              </a:solidFill>
+              <a:latin typeface="Arial"/>
+            </a:endParaRPr>
+          </a:p>
+          <a:p>
+            <a:pPr lvl="4" marL="2160000" indent="-216000">
+              <a:spcBef>
+                <a:spcPts val="283"/>
+              </a:spcBef>
+              <a:buClr>
+                <a:srgbClr val="000000"/>
+              </a:buClr>
+              <a:buSzPct val="45000"/>
+              <a:buFont typeface="Wingdings" charset="2"/>
+              <a:buChar char=""/>
+            </a:pPr>
+            <a:r>
+              <a:rPr b="0" lang="en-US" sz="2000" spc="-1" strike="noStrike">
+                <a:solidFill>
+                  <a:srgbClr val="000000"/>
+                </a:solidFill>
+                <a:latin typeface="Arial"/>
+              </a:rPr>
+              <a:t>Fifth Outline Level</a:t>
+            </a:r>
+            <a:endParaRPr b="0" lang="en-US" sz="2000" spc="-1" strike="noStrike">
+              <a:solidFill>
+                <a:srgbClr val="000000"/>
+              </a:solidFill>
+              <a:latin typeface="Arial"/>
+            </a:endParaRPr>
+          </a:p>
+          <a:p>
+            <a:pPr lvl="5" marL="2592000" indent="-216000">
+              <a:spcBef>
+                <a:spcPts val="283"/>
+              </a:spcBef>
+              <a:buClr>
+                <a:srgbClr val="000000"/>
+              </a:buClr>
+              <a:buSzPct val="45000"/>
+              <a:buFont typeface="Wingdings" charset="2"/>
+              <a:buChar char=""/>
+            </a:pPr>
+            <a:r>
+              <a:rPr b="0" lang="en-US" sz="2000" spc="-1" strike="noStrike">
+                <a:solidFill>
+                  <a:srgbClr val="000000"/>
+                </a:solidFill>
+                <a:latin typeface="Arial"/>
+              </a:rPr>
+              <a:t>Sixth Outline Level</a:t>
+            </a:r>
+            <a:endParaRPr b="0" lang="en-US" sz="2000" spc="-1" strike="noStrike">
+              <a:solidFill>
+                <a:srgbClr val="000000"/>
+              </a:solidFill>
+              <a:latin typeface="Arial"/>
+            </a:endParaRPr>
+          </a:p>
+          <a:p>
+            <a:pPr lvl="6" marL="3024000" indent="-216000">
+              <a:spcBef>
+                <a:spcPts val="283"/>
+              </a:spcBef>
+              <a:buClr>
+                <a:srgbClr val="000000"/>
+              </a:buClr>
+              <a:buSzPct val="45000"/>
+              <a:buFont typeface="Wingdings" charset="2"/>
+              <a:buChar char=""/>
+            </a:pPr>
+            <a:r>
+              <a:rPr b="0" lang="en-US" sz="2000" spc="-1" strike="noStrike">
+                <a:solidFill>
+                  <a:srgbClr val="000000"/>
+                </a:solidFill>
+                <a:latin typeface="Arial"/>
+              </a:rPr>
+              <a:t>Seventh Outline Level</a:t>
+            </a:r>
+            <a:endParaRPr b="0" lang="en-US" sz="2000" spc="-1" strike="noStrike">
+              <a:solidFill>
+                <a:srgbClr val="000000"/>
+              </a:solidFill>
+              <a:latin typeface="Arial"/>
             </a:endParaRPr>
           </a:p>
         </p:txBody>
@@ -2304,7 +2578,7 @@
       </p:grpSpPr>
       <p:pic>
         <p:nvPicPr>
-          <p:cNvPr id="86" name="New picture" descr=""/>
+          <p:cNvPr id="99" name="New picture" descr=""/>
           <p:cNvPicPr/>
           <p:nvPr/>
         </p:nvPicPr>
@@ -2314,8 +2588,8 @@
         </p:blipFill>
         <p:spPr>
           <a:xfrm rot="16200000">
-            <a:off x="-11070360" y="16463160"/>
-            <a:ext cx="14270760" cy="3933000"/>
+            <a:off x="-11070000" y="16463520"/>
+            <a:ext cx="14270400" cy="3932640"/>
           </a:xfrm>
           <a:prstGeom prst="rect">
             <a:avLst/>
@@ -2327,7 +2601,7 @@
       </p:pic>
       <p:pic>
         <p:nvPicPr>
-          <p:cNvPr id="87" name="New picture" descr=""/>
+          <p:cNvPr id="100" name="New picture" descr=""/>
           <p:cNvPicPr/>
           <p:nvPr/>
         </p:nvPicPr>
@@ -2337,8 +2611,8 @@
         </p:blipFill>
         <p:spPr>
           <a:xfrm rot="5400000">
-            <a:off x="40694760" y="16459200"/>
-            <a:ext cx="14270760" cy="3933000"/>
+            <a:off x="40695120" y="16459200"/>
+            <a:ext cx="14270400" cy="3932640"/>
           </a:xfrm>
           <a:prstGeom prst="rect">
             <a:avLst/>
@@ -2350,7 +2624,7 @@
       </p:pic>
       <p:pic>
         <p:nvPicPr>
-          <p:cNvPr id="88" name="New picture" descr=""/>
+          <p:cNvPr id="101" name="New picture" descr=""/>
           <p:cNvPicPr/>
           <p:nvPr/>
         </p:nvPicPr>
@@ -2361,7 +2635,7 @@
         <p:spPr>
           <a:xfrm>
             <a:off x="6946920" y="33426360"/>
-            <a:ext cx="29993400" cy="1443960"/>
+            <a:ext cx="29993040" cy="1443600"/>
           </a:xfrm>
           <a:prstGeom prst="rect">
             <a:avLst/>
@@ -2373,14 +2647,14 @@
       </p:pic>
       <p:sp>
         <p:nvSpPr>
-          <p:cNvPr id="89" name="New shape"/>
+          <p:cNvPr id="102" name="New shape"/>
           <p:cNvSpPr/>
           <p:nvPr/>
         </p:nvSpPr>
         <p:spPr>
           <a:xfrm>
             <a:off x="6946920" y="33998040"/>
-            <a:ext cx="21941640" cy="1266120"/>
+            <a:ext cx="21941280" cy="1265760"/>
           </a:xfrm>
           <a:prstGeom prst="rect">
             <a:avLst/>
@@ -2435,7 +2709,7 @@
       </p:sp>
       <p:sp>
         <p:nvSpPr>
-          <p:cNvPr id="90" name="PlaceHolder 1"/>
+          <p:cNvPr id="103" name="PlaceHolder 1"/>
           <p:cNvSpPr>
             <a:spLocks noGrp="1"/>
           </p:cNvSpPr>
@@ -2446,7 +2720,7 @@
         <p:spPr>
           <a:xfrm>
             <a:off x="14994360" y="29977560"/>
-            <a:ext cx="13898160" cy="2282040"/>
+            <a:ext cx="13897800" cy="2281680"/>
           </a:xfrm>
           <a:prstGeom prst="rect">
             <a:avLst/>
@@ -2507,7 +2781,7 @@
       </p:sp>
       <p:sp>
         <p:nvSpPr>
-          <p:cNvPr id="91" name="PlaceHolder 2"/>
+          <p:cNvPr id="104" name="PlaceHolder 2"/>
           <p:cNvSpPr>
             <a:spLocks noGrp="1"/>
           </p:cNvSpPr>
@@ -2518,7 +2792,7 @@
         <p:spPr>
           <a:xfrm>
             <a:off x="31453560" y="29977560"/>
-            <a:ext cx="10240560" cy="2282040"/>
+            <a:ext cx="10240200" cy="2281680"/>
           </a:xfrm>
           <a:prstGeom prst="rect">
             <a:avLst/>
@@ -2560,7 +2834,7 @@
                 <a:tab algn="l" pos="0"/>
               </a:tabLst>
             </a:pPr>
-            <a:fld id="{E61E00FB-5F12-4113-B7F4-A6FE346FC57D}" type="slidenum">
+            <a:fld id="{17BB822D-AD65-4A87-A3FC-90131FFCBF0C}" type="slidenum">
               <a:rPr b="0" lang="en-US" sz="5030" spc="-1" strike="noStrike">
                 <a:solidFill>
                   <a:schemeClr val="dk1"/>
@@ -2581,7 +2855,7 @@
       </p:sp>
       <p:sp>
         <p:nvSpPr>
-          <p:cNvPr id="92" name="PlaceHolder 3"/>
+          <p:cNvPr id="105" name="PlaceHolder 3"/>
           <p:cNvSpPr>
             <a:spLocks noGrp="1"/>
           </p:cNvSpPr>
@@ -2592,7 +2866,7 @@
         <p:spPr>
           <a:xfrm>
             <a:off x="2192760" y="29977560"/>
-            <a:ext cx="10240560" cy="2282040"/>
+            <a:ext cx="10240200" cy="2281680"/>
           </a:xfrm>
           <a:prstGeom prst="rect">
             <a:avLst/>
@@ -2635,6 +2909,280 @@
                 <a:srgbClr val="000000"/>
               </a:solidFill>
               <a:latin typeface="Times New Roman"/>
+            </a:endParaRPr>
+          </a:p>
+        </p:txBody>
+      </p:sp>
+      <p:sp>
+        <p:nvSpPr>
+          <p:cNvPr id="106" name="PlaceHolder 4"/>
+          <p:cNvSpPr>
+            <a:spLocks noGrp="1"/>
+          </p:cNvSpPr>
+          <p:nvPr>
+            <p:ph type="title"/>
+          </p:nvPr>
+        </p:nvSpPr>
+        <p:spPr>
+          <a:xfrm>
+            <a:off x="2194560" y="1313280"/>
+            <a:ext cx="39501720" cy="5496840"/>
+          </a:xfrm>
+          <a:prstGeom prst="rect">
+            <a:avLst/>
+          </a:prstGeom>
+          <a:noFill/>
+          <a:ln w="0">
+            <a:noFill/>
+          </a:ln>
+        </p:spPr>
+        <p:txBody>
+          <a:bodyPr lIns="0" rIns="0" tIns="0" bIns="0" anchor="ctr">
+            <a:noAutofit/>
+          </a:bodyPr>
+          <a:p>
+            <a:pPr indent="0" algn="ctr">
+              <a:buNone/>
+            </a:pPr>
+            <a:r>
+              <a:rPr b="0" lang="en-US" sz="4400" spc="-1" strike="noStrike">
+                <a:solidFill>
+                  <a:srgbClr val="000000"/>
+                </a:solidFill>
+                <a:latin typeface="Arial"/>
+              </a:rPr>
+              <a:t>Click to edit the title text format</a:t>
+            </a:r>
+            <a:endParaRPr b="0" lang="en-US" sz="4400" spc="-1" strike="noStrike">
+              <a:solidFill>
+                <a:srgbClr val="000000"/>
+              </a:solidFill>
+              <a:latin typeface="Arial"/>
+            </a:endParaRPr>
+          </a:p>
+        </p:txBody>
+      </p:sp>
+      <p:sp>
+        <p:nvSpPr>
+          <p:cNvPr id="107" name="PlaceHolder 5"/>
+          <p:cNvSpPr>
+            <a:spLocks noGrp="1"/>
+          </p:cNvSpPr>
+          <p:nvPr>
+            <p:ph type="body"/>
+          </p:nvPr>
+        </p:nvSpPr>
+        <p:spPr>
+          <a:xfrm>
+            <a:off x="2194560" y="7702560"/>
+            <a:ext cx="39501720" cy="19092240"/>
+          </a:xfrm>
+          <a:prstGeom prst="rect">
+            <a:avLst/>
+          </a:prstGeom>
+          <a:noFill/>
+          <a:ln w="0">
+            <a:noFill/>
+          </a:ln>
+        </p:spPr>
+        <p:txBody>
+          <a:bodyPr lIns="0" rIns="0" tIns="0" bIns="0" anchor="t">
+            <a:normAutofit/>
+          </a:bodyPr>
+          <a:p>
+            <a:pPr marL="432000" indent="-324000">
+              <a:spcBef>
+                <a:spcPts val="1417"/>
+              </a:spcBef>
+              <a:buClr>
+                <a:srgbClr val="000000"/>
+              </a:buClr>
+              <a:buSzPct val="45000"/>
+              <a:buFont typeface="Wingdings" charset="2"/>
+              <a:buChar char=""/>
+            </a:pPr>
+            <a:r>
+              <a:rPr b="0" lang="en-US" sz="3200" spc="-1" strike="noStrike">
+                <a:solidFill>
+                  <a:srgbClr val="000000"/>
+                </a:solidFill>
+                <a:latin typeface="Arial"/>
+              </a:rPr>
+              <a:t>Click to edit the outline text format</a:t>
+            </a:r>
+            <a:endParaRPr b="0" lang="en-US" sz="3200" spc="-1" strike="noStrike">
+              <a:solidFill>
+                <a:srgbClr val="000000"/>
+              </a:solidFill>
+              <a:latin typeface="Arial"/>
+            </a:endParaRPr>
+          </a:p>
+          <a:p>
+            <a:pPr lvl="1" marL="864000" indent="-324000">
+              <a:spcBef>
+                <a:spcPts val="1134"/>
+              </a:spcBef>
+              <a:buClr>
+                <a:srgbClr val="000000"/>
+              </a:buClr>
+              <a:buSzPct val="75000"/>
+              <a:buFont typeface="Symbol" charset="2"/>
+              <a:buChar char=""/>
+            </a:pPr>
+            <a:r>
+              <a:rPr b="0" lang="en-US" sz="2800" spc="-1" strike="noStrike">
+                <a:solidFill>
+                  <a:srgbClr val="000000"/>
+                </a:solidFill>
+                <a:latin typeface="Arial"/>
+              </a:rPr>
+              <a:t>Second Outline Level</a:t>
+            </a:r>
+            <a:endParaRPr b="0" lang="en-US" sz="2800" spc="-1" strike="noStrike">
+              <a:solidFill>
+                <a:srgbClr val="000000"/>
+              </a:solidFill>
+              <a:latin typeface="Arial"/>
+            </a:endParaRPr>
+          </a:p>
+          <a:p>
+            <a:pPr lvl="2" marL="1296000" indent="-288000">
+              <a:spcBef>
+                <a:spcPts val="850"/>
+              </a:spcBef>
+              <a:buClr>
+                <a:srgbClr val="000000"/>
+              </a:buClr>
+              <a:buSzPct val="45000"/>
+              <a:buFont typeface="Wingdings" charset="2"/>
+              <a:buChar char=""/>
+            </a:pPr>
+            <a:r>
+              <a:rPr b="0" lang="en-US" sz="2400" spc="-1" strike="noStrike">
+                <a:solidFill>
+                  <a:srgbClr val="000000"/>
+                </a:solidFill>
+                <a:latin typeface="Arial"/>
+              </a:rPr>
+              <a:t>Third Outline Level</a:t>
+            </a:r>
+            <a:endParaRPr b="0" lang="en-US" sz="2400" spc="-1" strike="noStrike">
+              <a:solidFill>
+                <a:srgbClr val="000000"/>
+              </a:solidFill>
+              <a:latin typeface="Arial"/>
+            </a:endParaRPr>
+          </a:p>
+          <a:p>
+            <a:pPr lvl="3" marL="1728000" indent="-216000">
+              <a:spcBef>
+                <a:spcPts val="567"/>
+              </a:spcBef>
+              <a:buClr>
+                <a:srgbClr val="000000"/>
+              </a:buClr>
+              <a:buSzPct val="75000"/>
+              <a:buFont typeface="Symbol" charset="2"/>
+              <a:buChar char=""/>
+            </a:pPr>
+            <a:r>
+              <a:rPr b="0" lang="en-US" sz="2000" spc="-1" strike="noStrike">
+                <a:solidFill>
+                  <a:srgbClr val="000000"/>
+                </a:solidFill>
+                <a:latin typeface="Arial"/>
+              </a:rPr>
+              <a:t>Fourth Outline Level</a:t>
+            </a:r>
+            <a:endParaRPr b="0" lang="en-US" sz="2000" spc="-1" strike="noStrike">
+              <a:solidFill>
+                <a:srgbClr val="000000"/>
+              </a:solidFill>
+              <a:latin typeface="Arial"/>
+            </a:endParaRPr>
+          </a:p>
+          <a:p>
+            <a:pPr lvl="4" marL="2160000" indent="-216000">
+              <a:spcBef>
+                <a:spcPts val="283"/>
+              </a:spcBef>
+              <a:buClr>
+                <a:srgbClr val="000000"/>
+              </a:buClr>
+              <a:buSzPct val="45000"/>
+              <a:buFont typeface="Wingdings" charset="2"/>
+              <a:buChar char=""/>
+            </a:pPr>
+            <a:r>
+              <a:rPr b="0" lang="en-US" sz="2000" spc="-1" strike="noStrike">
+                <a:solidFill>
+                  <a:srgbClr val="000000"/>
+                </a:solidFill>
+                <a:latin typeface="Arial"/>
+              </a:rPr>
+              <a:t>Fifth Outline Level</a:t>
+            </a:r>
+            <a:endParaRPr b="0" lang="en-US" sz="2000" spc="-1" strike="noStrike">
+              <a:solidFill>
+                <a:srgbClr val="000000"/>
+              </a:solidFill>
+              <a:latin typeface="Arial"/>
+            </a:endParaRPr>
+          </a:p>
+          <a:p>
+            <a:pPr lvl="5" marL="2592000" indent="-216000">
+              <a:spcBef>
+                <a:spcPts val="283"/>
+              </a:spcBef>
+              <a:buClr>
+                <a:srgbClr val="000000"/>
+              </a:buClr>
+              <a:buSzPct val="45000"/>
+              <a:buFont typeface="Wingdings" charset="2"/>
+              <a:buChar char=""/>
+            </a:pPr>
+            <a:r>
+              <a:rPr b="0" lang="en-US" sz="2000" spc="-1" strike="noStrike">
+                <a:solidFill>
+                  <a:srgbClr val="000000"/>
+                </a:solidFill>
+                <a:latin typeface="Arial"/>
+              </a:rPr>
+              <a:t>Sixth Outline Level</a:t>
+            </a:r>
+            <a:endParaRPr b="0" lang="en-US" sz="2000" spc="-1" strike="noStrike">
+              <a:solidFill>
+                <a:srgbClr val="000000"/>
+              </a:solidFill>
+              <a:latin typeface="Arial"/>
+            </a:endParaRPr>
+          </a:p>
+          <a:p>
+            <a:pPr lvl="6" marL="3024000" indent="-216000">
+              <a:spcBef>
+                <a:spcPts val="283"/>
+              </a:spcBef>
+              <a:buClr>
+                <a:srgbClr val="000000"/>
+              </a:buClr>
+              <a:buSzPct val="45000"/>
+              <a:buFont typeface="Wingdings" charset="2"/>
+              <a:buChar char=""/>
+            </a:pPr>
+            <a:r>
+              <a:rPr b="0" lang="en-US" sz="2000" spc="-1" strike="noStrike">
+                <a:solidFill>
+                  <a:srgbClr val="000000"/>
+                </a:solidFill>
+                <a:latin typeface="Arial"/>
+              </a:rPr>
+              <a:t>Seventh Outline Level</a:t>
+            </a:r>
+            <a:endParaRPr b="0" lang="en-US" sz="2000" spc="-1" strike="noStrike">
+              <a:solidFill>
+                <a:srgbClr val="000000"/>
+              </a:solidFill>
+              <a:latin typeface="Arial"/>
             </a:endParaRPr>
           </a:p>
         </p:txBody>
@@ -2684,8 +3232,8 @@
         </p:blipFill>
         <p:spPr>
           <a:xfrm rot="16200000">
-            <a:off x="-11070360" y="16463160"/>
-            <a:ext cx="14270760" cy="3933000"/>
+            <a:off x="-11070000" y="16463520"/>
+            <a:ext cx="14270400" cy="3932640"/>
           </a:xfrm>
           <a:prstGeom prst="rect">
             <a:avLst/>
@@ -2707,8 +3255,8 @@
         </p:blipFill>
         <p:spPr>
           <a:xfrm rot="5400000">
-            <a:off x="40694760" y="16459200"/>
-            <a:ext cx="14270760" cy="3933000"/>
+            <a:off x="40695120" y="16459200"/>
+            <a:ext cx="14270400" cy="3932640"/>
           </a:xfrm>
           <a:prstGeom prst="rect">
             <a:avLst/>
@@ -2731,7 +3279,7 @@
         <p:spPr>
           <a:xfrm>
             <a:off x="6946920" y="33426360"/>
-            <a:ext cx="29993400" cy="1443960"/>
+            <a:ext cx="29993040" cy="1443600"/>
           </a:xfrm>
           <a:prstGeom prst="rect">
             <a:avLst/>
@@ -2750,7 +3298,7 @@
         <p:spPr>
           <a:xfrm>
             <a:off x="6946920" y="33998040"/>
-            <a:ext cx="21941640" cy="1266120"/>
+            <a:ext cx="21941280" cy="1265760"/>
           </a:xfrm>
           <a:prstGeom prst="rect">
             <a:avLst/>
@@ -2816,7 +3364,7 @@
         <p:spPr>
           <a:xfrm>
             <a:off x="14994360" y="29977560"/>
-            <a:ext cx="13898160" cy="2282040"/>
+            <a:ext cx="13897800" cy="2281680"/>
           </a:xfrm>
           <a:prstGeom prst="rect">
             <a:avLst/>
@@ -2888,7 +3436,7 @@
         <p:spPr>
           <a:xfrm>
             <a:off x="31453560" y="29977560"/>
-            <a:ext cx="10240560" cy="2282040"/>
+            <a:ext cx="10240200" cy="2281680"/>
           </a:xfrm>
           <a:prstGeom prst="rect">
             <a:avLst/>
@@ -2930,7 +3478,7 @@
                 <a:tab algn="l" pos="0"/>
               </a:tabLst>
             </a:pPr>
-            <a:fld id="{8179F07A-FEAF-4408-9990-6252AB7FCD29}" type="slidenum">
+            <a:fld id="{BE9C692A-DB51-43BF-AD8F-0DBA384B0AB3}" type="slidenum">
               <a:rPr b="0" lang="en-US" sz="5030" spc="-1" strike="noStrike">
                 <a:solidFill>
                   <a:schemeClr val="dk1"/>
@@ -2962,7 +3510,7 @@
         <p:spPr>
           <a:xfrm>
             <a:off x="2192760" y="29977560"/>
-            <a:ext cx="10240560" cy="2282040"/>
+            <a:ext cx="10240200" cy="2281680"/>
           </a:xfrm>
           <a:prstGeom prst="rect">
             <a:avLst/>
@@ -3005,6 +3553,289 @@
                 <a:srgbClr val="000000"/>
               </a:solidFill>
               <a:latin typeface="Times New Roman"/>
+            </a:endParaRPr>
+          </a:p>
+        </p:txBody>
+      </p:sp>
+      <p:sp>
+        <p:nvSpPr>
+          <p:cNvPr id="18" name="PlaceHolder 4"/>
+          <p:cNvSpPr>
+            <a:spLocks noGrp="1"/>
+          </p:cNvSpPr>
+          <p:nvPr>
+            <p:ph type="title"/>
+          </p:nvPr>
+        </p:nvSpPr>
+        <p:spPr>
+          <a:xfrm>
+            <a:off x="2194560" y="1313280"/>
+            <a:ext cx="39501720" cy="5496840"/>
+          </a:xfrm>
+          <a:prstGeom prst="rect">
+            <a:avLst/>
+          </a:prstGeom>
+          <a:noFill/>
+          <a:ln w="0">
+            <a:noFill/>
+          </a:ln>
+        </p:spPr>
+        <p:txBody>
+          <a:bodyPr lIns="0" rIns="0" tIns="0" bIns="0" anchor="ctr">
+            <a:noAutofit/>
+          </a:bodyPr>
+          <a:p>
+            <a:pPr indent="0" algn="ctr">
+              <a:buNone/>
+            </a:pPr>
+            <a:r>
+              <a:rPr b="0" lang="en-US" sz="4400" spc="-1" strike="noStrike">
+                <a:solidFill>
+                  <a:srgbClr val="000000"/>
+                </a:solidFill>
+                <a:latin typeface="Arial"/>
+              </a:rPr>
+              <a:t>Click to edit the </a:t>
+            </a:r>
+            <a:r>
+              <a:rPr b="0" lang="en-US" sz="4400" spc="-1" strike="noStrike">
+                <a:solidFill>
+                  <a:srgbClr val="000000"/>
+                </a:solidFill>
+                <a:latin typeface="Arial"/>
+              </a:rPr>
+              <a:t>title text format</a:t>
+            </a:r>
+            <a:endParaRPr b="0" lang="en-US" sz="4400" spc="-1" strike="noStrike">
+              <a:solidFill>
+                <a:srgbClr val="000000"/>
+              </a:solidFill>
+              <a:latin typeface="Arial"/>
+            </a:endParaRPr>
+          </a:p>
+        </p:txBody>
+      </p:sp>
+      <p:sp>
+        <p:nvSpPr>
+          <p:cNvPr id="19" name="PlaceHolder 5"/>
+          <p:cNvSpPr>
+            <a:spLocks noGrp="1"/>
+          </p:cNvSpPr>
+          <p:nvPr>
+            <p:ph type="body"/>
+          </p:nvPr>
+        </p:nvSpPr>
+        <p:spPr>
+          <a:xfrm>
+            <a:off x="2194560" y="7702560"/>
+            <a:ext cx="39501720" cy="19092240"/>
+          </a:xfrm>
+          <a:prstGeom prst="rect">
+            <a:avLst/>
+          </a:prstGeom>
+          <a:noFill/>
+          <a:ln w="0">
+            <a:noFill/>
+          </a:ln>
+        </p:spPr>
+        <p:txBody>
+          <a:bodyPr lIns="0" rIns="0" tIns="0" bIns="0" anchor="t">
+            <a:normAutofit/>
+          </a:bodyPr>
+          <a:p>
+            <a:pPr marL="432000" indent="-324000">
+              <a:spcBef>
+                <a:spcPts val="1417"/>
+              </a:spcBef>
+              <a:buClr>
+                <a:srgbClr val="000000"/>
+              </a:buClr>
+              <a:buSzPct val="45000"/>
+              <a:buFont typeface="Wingdings" charset="2"/>
+              <a:buChar char=""/>
+            </a:pPr>
+            <a:r>
+              <a:rPr b="0" lang="en-US" sz="3200" spc="-1" strike="noStrike">
+                <a:solidFill>
+                  <a:srgbClr val="000000"/>
+                </a:solidFill>
+                <a:latin typeface="Arial"/>
+              </a:rPr>
+              <a:t>Click to edit the outline text format</a:t>
+            </a:r>
+            <a:endParaRPr b="0" lang="en-US" sz="3200" spc="-1" strike="noStrike">
+              <a:solidFill>
+                <a:srgbClr val="000000"/>
+              </a:solidFill>
+              <a:latin typeface="Arial"/>
+            </a:endParaRPr>
+          </a:p>
+          <a:p>
+            <a:pPr lvl="1" marL="864000" indent="-324000">
+              <a:spcBef>
+                <a:spcPts val="1134"/>
+              </a:spcBef>
+              <a:buClr>
+                <a:srgbClr val="000000"/>
+              </a:buClr>
+              <a:buSzPct val="75000"/>
+              <a:buFont typeface="Symbol" charset="2"/>
+              <a:buChar char=""/>
+            </a:pPr>
+            <a:r>
+              <a:rPr b="0" lang="en-US" sz="2800" spc="-1" strike="noStrike">
+                <a:solidFill>
+                  <a:srgbClr val="000000"/>
+                </a:solidFill>
+                <a:latin typeface="Arial"/>
+              </a:rPr>
+              <a:t>Second Outline Level</a:t>
+            </a:r>
+            <a:endParaRPr b="0" lang="en-US" sz="2800" spc="-1" strike="noStrike">
+              <a:solidFill>
+                <a:srgbClr val="000000"/>
+              </a:solidFill>
+              <a:latin typeface="Arial"/>
+            </a:endParaRPr>
+          </a:p>
+          <a:p>
+            <a:pPr lvl="2" marL="1296000" indent="-288000">
+              <a:spcBef>
+                <a:spcPts val="850"/>
+              </a:spcBef>
+              <a:buClr>
+                <a:srgbClr val="000000"/>
+              </a:buClr>
+              <a:buSzPct val="45000"/>
+              <a:buFont typeface="Wingdings" charset="2"/>
+              <a:buChar char=""/>
+            </a:pPr>
+            <a:r>
+              <a:rPr b="0" lang="en-US" sz="2400" spc="-1" strike="noStrike">
+                <a:solidFill>
+                  <a:srgbClr val="000000"/>
+                </a:solidFill>
+                <a:latin typeface="Arial"/>
+              </a:rPr>
+              <a:t>Third Outline Level</a:t>
+            </a:r>
+            <a:endParaRPr b="0" lang="en-US" sz="2400" spc="-1" strike="noStrike">
+              <a:solidFill>
+                <a:srgbClr val="000000"/>
+              </a:solidFill>
+              <a:latin typeface="Arial"/>
+            </a:endParaRPr>
+          </a:p>
+          <a:p>
+            <a:pPr lvl="3" marL="1728000" indent="-216000">
+              <a:spcBef>
+                <a:spcPts val="567"/>
+              </a:spcBef>
+              <a:buClr>
+                <a:srgbClr val="000000"/>
+              </a:buClr>
+              <a:buSzPct val="75000"/>
+              <a:buFont typeface="Symbol" charset="2"/>
+              <a:buChar char=""/>
+            </a:pPr>
+            <a:r>
+              <a:rPr b="0" lang="en-US" sz="2000" spc="-1" strike="noStrike">
+                <a:solidFill>
+                  <a:srgbClr val="000000"/>
+                </a:solidFill>
+                <a:latin typeface="Arial"/>
+              </a:rPr>
+              <a:t>Fourth Outline Level</a:t>
+            </a:r>
+            <a:endParaRPr b="0" lang="en-US" sz="2000" spc="-1" strike="noStrike">
+              <a:solidFill>
+                <a:srgbClr val="000000"/>
+              </a:solidFill>
+              <a:latin typeface="Arial"/>
+            </a:endParaRPr>
+          </a:p>
+          <a:p>
+            <a:pPr lvl="4" marL="2160000" indent="-216000">
+              <a:spcBef>
+                <a:spcPts val="283"/>
+              </a:spcBef>
+              <a:buClr>
+                <a:srgbClr val="000000"/>
+              </a:buClr>
+              <a:buSzPct val="45000"/>
+              <a:buFont typeface="Wingdings" charset="2"/>
+              <a:buChar char=""/>
+            </a:pPr>
+            <a:r>
+              <a:rPr b="0" lang="en-US" sz="2000" spc="-1" strike="noStrike">
+                <a:solidFill>
+                  <a:srgbClr val="000000"/>
+                </a:solidFill>
+                <a:latin typeface="Arial"/>
+              </a:rPr>
+              <a:t>Fifth Outline Level</a:t>
+            </a:r>
+            <a:endParaRPr b="0" lang="en-US" sz="2000" spc="-1" strike="noStrike">
+              <a:solidFill>
+                <a:srgbClr val="000000"/>
+              </a:solidFill>
+              <a:latin typeface="Arial"/>
+            </a:endParaRPr>
+          </a:p>
+          <a:p>
+            <a:pPr lvl="5" marL="2592000" indent="-216000">
+              <a:spcBef>
+                <a:spcPts val="283"/>
+              </a:spcBef>
+              <a:buClr>
+                <a:srgbClr val="000000"/>
+              </a:buClr>
+              <a:buSzPct val="45000"/>
+              <a:buFont typeface="Wingdings" charset="2"/>
+              <a:buChar char=""/>
+            </a:pPr>
+            <a:r>
+              <a:rPr b="0" lang="en-US" sz="2000" spc="-1" strike="noStrike">
+                <a:solidFill>
+                  <a:srgbClr val="000000"/>
+                </a:solidFill>
+                <a:latin typeface="Arial"/>
+              </a:rPr>
+              <a:t>Sixth Outline Level</a:t>
+            </a:r>
+            <a:endParaRPr b="0" lang="en-US" sz="2000" spc="-1" strike="noStrike">
+              <a:solidFill>
+                <a:srgbClr val="000000"/>
+              </a:solidFill>
+              <a:latin typeface="Arial"/>
+            </a:endParaRPr>
+          </a:p>
+          <a:p>
+            <a:pPr lvl="6" marL="3024000" indent="-216000">
+              <a:spcBef>
+                <a:spcPts val="283"/>
+              </a:spcBef>
+              <a:buClr>
+                <a:srgbClr val="000000"/>
+              </a:buClr>
+              <a:buSzPct val="45000"/>
+              <a:buFont typeface="Wingdings" charset="2"/>
+              <a:buChar char=""/>
+            </a:pPr>
+            <a:r>
+              <a:rPr b="0" lang="en-US" sz="2000" spc="-1" strike="noStrike">
+                <a:solidFill>
+                  <a:srgbClr val="000000"/>
+                </a:solidFill>
+                <a:latin typeface="Arial"/>
+              </a:rPr>
+              <a:t>Seventh Outline Level</a:t>
+            </a:r>
+            <a:endParaRPr b="0" lang="en-US" sz="2000" spc="-1" strike="noStrike">
+              <a:solidFill>
+                <a:srgbClr val="000000"/>
+              </a:solidFill>
+              <a:latin typeface="Arial"/>
             </a:endParaRPr>
           </a:p>
         </p:txBody>
@@ -3044,7 +3875,7 @@
       </p:grpSpPr>
       <p:pic>
         <p:nvPicPr>
-          <p:cNvPr id="18" name="New picture" descr=""/>
+          <p:cNvPr id="20" name="New picture" descr=""/>
           <p:cNvPicPr/>
           <p:nvPr/>
         </p:nvPicPr>
@@ -3054,8 +3885,8 @@
         </p:blipFill>
         <p:spPr>
           <a:xfrm rot="16200000">
-            <a:off x="-11070360" y="16463160"/>
-            <a:ext cx="14270760" cy="3933000"/>
+            <a:off x="-11070000" y="16463520"/>
+            <a:ext cx="14270400" cy="3932640"/>
           </a:xfrm>
           <a:prstGeom prst="rect">
             <a:avLst/>
@@ -3067,7 +3898,7 @@
       </p:pic>
       <p:pic>
         <p:nvPicPr>
-          <p:cNvPr id="19" name="New picture" descr=""/>
+          <p:cNvPr id="21" name="New picture" descr=""/>
           <p:cNvPicPr/>
           <p:nvPr/>
         </p:nvPicPr>
@@ -3077,8 +3908,8 @@
         </p:blipFill>
         <p:spPr>
           <a:xfrm rot="5400000">
-            <a:off x="40694760" y="16459200"/>
-            <a:ext cx="14270760" cy="3933000"/>
+            <a:off x="40695120" y="16459200"/>
+            <a:ext cx="14270400" cy="3932640"/>
           </a:xfrm>
           <a:prstGeom prst="rect">
             <a:avLst/>
@@ -3090,7 +3921,7 @@
       </p:pic>
       <p:pic>
         <p:nvPicPr>
-          <p:cNvPr id="20" name="New picture" descr=""/>
+          <p:cNvPr id="22" name="New picture" descr=""/>
           <p:cNvPicPr/>
           <p:nvPr/>
         </p:nvPicPr>
@@ -3101,7 +3932,7 @@
         <p:spPr>
           <a:xfrm>
             <a:off x="6946920" y="33426360"/>
-            <a:ext cx="29993400" cy="1443960"/>
+            <a:ext cx="29993040" cy="1443600"/>
           </a:xfrm>
           <a:prstGeom prst="rect">
             <a:avLst/>
@@ -3113,14 +3944,14 @@
       </p:pic>
       <p:sp>
         <p:nvSpPr>
-          <p:cNvPr id="21" name="New shape"/>
+          <p:cNvPr id="23" name="New shape"/>
           <p:cNvSpPr/>
           <p:nvPr/>
         </p:nvSpPr>
         <p:spPr>
           <a:xfrm>
             <a:off x="6946920" y="33998040"/>
-            <a:ext cx="21941640" cy="1266120"/>
+            <a:ext cx="21941280" cy="1265760"/>
           </a:xfrm>
           <a:prstGeom prst="rect">
             <a:avLst/>
@@ -3175,7 +4006,7 @@
       </p:sp>
       <p:sp>
         <p:nvSpPr>
-          <p:cNvPr id="22" name="PlaceHolder 1"/>
+          <p:cNvPr id="24" name="PlaceHolder 1"/>
           <p:cNvSpPr>
             <a:spLocks noGrp="1"/>
           </p:cNvSpPr>
@@ -3186,7 +4017,7 @@
         <p:spPr>
           <a:xfrm>
             <a:off x="14994360" y="29977560"/>
-            <a:ext cx="13898160" cy="2282040"/>
+            <a:ext cx="13897800" cy="2281680"/>
           </a:xfrm>
           <a:prstGeom prst="rect">
             <a:avLst/>
@@ -3247,7 +4078,7 @@
       </p:sp>
       <p:sp>
         <p:nvSpPr>
-          <p:cNvPr id="23" name="PlaceHolder 2"/>
+          <p:cNvPr id="25" name="PlaceHolder 2"/>
           <p:cNvSpPr>
             <a:spLocks noGrp="1"/>
           </p:cNvSpPr>
@@ -3258,7 +4089,7 @@
         <p:spPr>
           <a:xfrm>
             <a:off x="31453560" y="29977560"/>
-            <a:ext cx="10240560" cy="2282040"/>
+            <a:ext cx="10240200" cy="2281680"/>
           </a:xfrm>
           <a:prstGeom prst="rect">
             <a:avLst/>
@@ -3300,7 +4131,7 @@
                 <a:tab algn="l" pos="0"/>
               </a:tabLst>
             </a:pPr>
-            <a:fld id="{B6E73E82-6E2E-4284-8AE5-21C82A8E78D5}" type="slidenum">
+            <a:fld id="{0A184745-A6B1-4D05-9825-581282737F2A}" type="slidenum">
               <a:rPr b="0" lang="en-US" sz="5030" spc="-1" strike="noStrike">
                 <a:solidFill>
                   <a:schemeClr val="dk1"/>
@@ -3321,7 +4152,7 @@
       </p:sp>
       <p:sp>
         <p:nvSpPr>
-          <p:cNvPr id="24" name="PlaceHolder 3"/>
+          <p:cNvPr id="26" name="PlaceHolder 3"/>
           <p:cNvSpPr>
             <a:spLocks noGrp="1"/>
           </p:cNvSpPr>
@@ -3332,7 +4163,7 @@
         <p:spPr>
           <a:xfrm>
             <a:off x="2192760" y="29977560"/>
-            <a:ext cx="10240560" cy="2282040"/>
+            <a:ext cx="10240200" cy="2281680"/>
           </a:xfrm>
           <a:prstGeom prst="rect">
             <a:avLst/>
@@ -3375,6 +4206,280 @@
                 <a:srgbClr val="000000"/>
               </a:solidFill>
               <a:latin typeface="Times New Roman"/>
+            </a:endParaRPr>
+          </a:p>
+        </p:txBody>
+      </p:sp>
+      <p:sp>
+        <p:nvSpPr>
+          <p:cNvPr id="27" name="PlaceHolder 4"/>
+          <p:cNvSpPr>
+            <a:spLocks noGrp="1"/>
+          </p:cNvSpPr>
+          <p:nvPr>
+            <p:ph type="title"/>
+          </p:nvPr>
+        </p:nvSpPr>
+        <p:spPr>
+          <a:xfrm>
+            <a:off x="2194560" y="1313280"/>
+            <a:ext cx="39501720" cy="5496840"/>
+          </a:xfrm>
+          <a:prstGeom prst="rect">
+            <a:avLst/>
+          </a:prstGeom>
+          <a:noFill/>
+          <a:ln w="0">
+            <a:noFill/>
+          </a:ln>
+        </p:spPr>
+        <p:txBody>
+          <a:bodyPr lIns="0" rIns="0" tIns="0" bIns="0" anchor="ctr">
+            <a:noAutofit/>
+          </a:bodyPr>
+          <a:p>
+            <a:pPr indent="0" algn="ctr">
+              <a:buNone/>
+            </a:pPr>
+            <a:r>
+              <a:rPr b="0" lang="en-US" sz="4400" spc="-1" strike="noStrike">
+                <a:solidFill>
+                  <a:srgbClr val="000000"/>
+                </a:solidFill>
+                <a:latin typeface="Arial"/>
+              </a:rPr>
+              <a:t>Click to edit the title text format</a:t>
+            </a:r>
+            <a:endParaRPr b="0" lang="en-US" sz="4400" spc="-1" strike="noStrike">
+              <a:solidFill>
+                <a:srgbClr val="000000"/>
+              </a:solidFill>
+              <a:latin typeface="Arial"/>
+            </a:endParaRPr>
+          </a:p>
+        </p:txBody>
+      </p:sp>
+      <p:sp>
+        <p:nvSpPr>
+          <p:cNvPr id="28" name="PlaceHolder 5"/>
+          <p:cNvSpPr>
+            <a:spLocks noGrp="1"/>
+          </p:cNvSpPr>
+          <p:nvPr>
+            <p:ph type="body"/>
+          </p:nvPr>
+        </p:nvSpPr>
+        <p:spPr>
+          <a:xfrm>
+            <a:off x="2194560" y="7702560"/>
+            <a:ext cx="39501720" cy="19092240"/>
+          </a:xfrm>
+          <a:prstGeom prst="rect">
+            <a:avLst/>
+          </a:prstGeom>
+          <a:noFill/>
+          <a:ln w="0">
+            <a:noFill/>
+          </a:ln>
+        </p:spPr>
+        <p:txBody>
+          <a:bodyPr lIns="0" rIns="0" tIns="0" bIns="0" anchor="t">
+            <a:normAutofit/>
+          </a:bodyPr>
+          <a:p>
+            <a:pPr marL="432000" indent="-324000">
+              <a:spcBef>
+                <a:spcPts val="1417"/>
+              </a:spcBef>
+              <a:buClr>
+                <a:srgbClr val="000000"/>
+              </a:buClr>
+              <a:buSzPct val="45000"/>
+              <a:buFont typeface="Wingdings" charset="2"/>
+              <a:buChar char=""/>
+            </a:pPr>
+            <a:r>
+              <a:rPr b="0" lang="en-US" sz="3200" spc="-1" strike="noStrike">
+                <a:solidFill>
+                  <a:srgbClr val="000000"/>
+                </a:solidFill>
+                <a:latin typeface="Arial"/>
+              </a:rPr>
+              <a:t>Click to edit the outline text format</a:t>
+            </a:r>
+            <a:endParaRPr b="0" lang="en-US" sz="3200" spc="-1" strike="noStrike">
+              <a:solidFill>
+                <a:srgbClr val="000000"/>
+              </a:solidFill>
+              <a:latin typeface="Arial"/>
+            </a:endParaRPr>
+          </a:p>
+          <a:p>
+            <a:pPr lvl="1" marL="864000" indent="-324000">
+              <a:spcBef>
+                <a:spcPts val="1134"/>
+              </a:spcBef>
+              <a:buClr>
+                <a:srgbClr val="000000"/>
+              </a:buClr>
+              <a:buSzPct val="75000"/>
+              <a:buFont typeface="Symbol" charset="2"/>
+              <a:buChar char=""/>
+            </a:pPr>
+            <a:r>
+              <a:rPr b="0" lang="en-US" sz="2800" spc="-1" strike="noStrike">
+                <a:solidFill>
+                  <a:srgbClr val="000000"/>
+                </a:solidFill>
+                <a:latin typeface="Arial"/>
+              </a:rPr>
+              <a:t>Second Outline Level</a:t>
+            </a:r>
+            <a:endParaRPr b="0" lang="en-US" sz="2800" spc="-1" strike="noStrike">
+              <a:solidFill>
+                <a:srgbClr val="000000"/>
+              </a:solidFill>
+              <a:latin typeface="Arial"/>
+            </a:endParaRPr>
+          </a:p>
+          <a:p>
+            <a:pPr lvl="2" marL="1296000" indent="-288000">
+              <a:spcBef>
+                <a:spcPts val="850"/>
+              </a:spcBef>
+              <a:buClr>
+                <a:srgbClr val="000000"/>
+              </a:buClr>
+              <a:buSzPct val="45000"/>
+              <a:buFont typeface="Wingdings" charset="2"/>
+              <a:buChar char=""/>
+            </a:pPr>
+            <a:r>
+              <a:rPr b="0" lang="en-US" sz="2400" spc="-1" strike="noStrike">
+                <a:solidFill>
+                  <a:srgbClr val="000000"/>
+                </a:solidFill>
+                <a:latin typeface="Arial"/>
+              </a:rPr>
+              <a:t>Third Outline Level</a:t>
+            </a:r>
+            <a:endParaRPr b="0" lang="en-US" sz="2400" spc="-1" strike="noStrike">
+              <a:solidFill>
+                <a:srgbClr val="000000"/>
+              </a:solidFill>
+              <a:latin typeface="Arial"/>
+            </a:endParaRPr>
+          </a:p>
+          <a:p>
+            <a:pPr lvl="3" marL="1728000" indent="-216000">
+              <a:spcBef>
+                <a:spcPts val="567"/>
+              </a:spcBef>
+              <a:buClr>
+                <a:srgbClr val="000000"/>
+              </a:buClr>
+              <a:buSzPct val="75000"/>
+              <a:buFont typeface="Symbol" charset="2"/>
+              <a:buChar char=""/>
+            </a:pPr>
+            <a:r>
+              <a:rPr b="0" lang="en-US" sz="2000" spc="-1" strike="noStrike">
+                <a:solidFill>
+                  <a:srgbClr val="000000"/>
+                </a:solidFill>
+                <a:latin typeface="Arial"/>
+              </a:rPr>
+              <a:t>Fourth Outline Level</a:t>
+            </a:r>
+            <a:endParaRPr b="0" lang="en-US" sz="2000" spc="-1" strike="noStrike">
+              <a:solidFill>
+                <a:srgbClr val="000000"/>
+              </a:solidFill>
+              <a:latin typeface="Arial"/>
+            </a:endParaRPr>
+          </a:p>
+          <a:p>
+            <a:pPr lvl="4" marL="2160000" indent="-216000">
+              <a:spcBef>
+                <a:spcPts val="283"/>
+              </a:spcBef>
+              <a:buClr>
+                <a:srgbClr val="000000"/>
+              </a:buClr>
+              <a:buSzPct val="45000"/>
+              <a:buFont typeface="Wingdings" charset="2"/>
+              <a:buChar char=""/>
+            </a:pPr>
+            <a:r>
+              <a:rPr b="0" lang="en-US" sz="2000" spc="-1" strike="noStrike">
+                <a:solidFill>
+                  <a:srgbClr val="000000"/>
+                </a:solidFill>
+                <a:latin typeface="Arial"/>
+              </a:rPr>
+              <a:t>Fifth Outline Level</a:t>
+            </a:r>
+            <a:endParaRPr b="0" lang="en-US" sz="2000" spc="-1" strike="noStrike">
+              <a:solidFill>
+                <a:srgbClr val="000000"/>
+              </a:solidFill>
+              <a:latin typeface="Arial"/>
+            </a:endParaRPr>
+          </a:p>
+          <a:p>
+            <a:pPr lvl="5" marL="2592000" indent="-216000">
+              <a:spcBef>
+                <a:spcPts val="283"/>
+              </a:spcBef>
+              <a:buClr>
+                <a:srgbClr val="000000"/>
+              </a:buClr>
+              <a:buSzPct val="45000"/>
+              <a:buFont typeface="Wingdings" charset="2"/>
+              <a:buChar char=""/>
+            </a:pPr>
+            <a:r>
+              <a:rPr b="0" lang="en-US" sz="2000" spc="-1" strike="noStrike">
+                <a:solidFill>
+                  <a:srgbClr val="000000"/>
+                </a:solidFill>
+                <a:latin typeface="Arial"/>
+              </a:rPr>
+              <a:t>Sixth Outline Level</a:t>
+            </a:r>
+            <a:endParaRPr b="0" lang="en-US" sz="2000" spc="-1" strike="noStrike">
+              <a:solidFill>
+                <a:srgbClr val="000000"/>
+              </a:solidFill>
+              <a:latin typeface="Arial"/>
+            </a:endParaRPr>
+          </a:p>
+          <a:p>
+            <a:pPr lvl="6" marL="3024000" indent="-216000">
+              <a:spcBef>
+                <a:spcPts val="283"/>
+              </a:spcBef>
+              <a:buClr>
+                <a:srgbClr val="000000"/>
+              </a:buClr>
+              <a:buSzPct val="45000"/>
+              <a:buFont typeface="Wingdings" charset="2"/>
+              <a:buChar char=""/>
+            </a:pPr>
+            <a:r>
+              <a:rPr b="0" lang="en-US" sz="2000" spc="-1" strike="noStrike">
+                <a:solidFill>
+                  <a:srgbClr val="000000"/>
+                </a:solidFill>
+                <a:latin typeface="Arial"/>
+              </a:rPr>
+              <a:t>Seventh Outline Level</a:t>
+            </a:r>
+            <a:endParaRPr b="0" lang="en-US" sz="2000" spc="-1" strike="noStrike">
+              <a:solidFill>
+                <a:srgbClr val="000000"/>
+              </a:solidFill>
+              <a:latin typeface="Arial"/>
             </a:endParaRPr>
           </a:p>
         </p:txBody>
@@ -3414,7 +4519,7 @@
       </p:grpSpPr>
       <p:pic>
         <p:nvPicPr>
-          <p:cNvPr id="25" name="New picture" descr=""/>
+          <p:cNvPr id="29" name="New picture" descr=""/>
           <p:cNvPicPr/>
           <p:nvPr/>
         </p:nvPicPr>
@@ -3424,8 +4529,8 @@
         </p:blipFill>
         <p:spPr>
           <a:xfrm rot="16200000">
-            <a:off x="-11070360" y="16463160"/>
-            <a:ext cx="14270760" cy="3933000"/>
+            <a:off x="-11070000" y="16463520"/>
+            <a:ext cx="14270400" cy="3932640"/>
           </a:xfrm>
           <a:prstGeom prst="rect">
             <a:avLst/>
@@ -3437,7 +4542,7 @@
       </p:pic>
       <p:pic>
         <p:nvPicPr>
-          <p:cNvPr id="26" name="New picture" descr=""/>
+          <p:cNvPr id="30" name="New picture" descr=""/>
           <p:cNvPicPr/>
           <p:nvPr/>
         </p:nvPicPr>
@@ -3447,8 +4552,8 @@
         </p:blipFill>
         <p:spPr>
           <a:xfrm rot="5400000">
-            <a:off x="40694760" y="16459200"/>
-            <a:ext cx="14270760" cy="3933000"/>
+            <a:off x="40695120" y="16459200"/>
+            <a:ext cx="14270400" cy="3932640"/>
           </a:xfrm>
           <a:prstGeom prst="rect">
             <a:avLst/>
@@ -3460,7 +4565,7 @@
       </p:pic>
       <p:pic>
         <p:nvPicPr>
-          <p:cNvPr id="27" name="New picture" descr=""/>
+          <p:cNvPr id="31" name="New picture" descr=""/>
           <p:cNvPicPr/>
           <p:nvPr/>
         </p:nvPicPr>
@@ -3471,7 +4576,7 @@
         <p:spPr>
           <a:xfrm>
             <a:off x="6946920" y="33426360"/>
-            <a:ext cx="29993400" cy="1443960"/>
+            <a:ext cx="29993040" cy="1443600"/>
           </a:xfrm>
           <a:prstGeom prst="rect">
             <a:avLst/>
@@ -3483,14 +4588,14 @@
       </p:pic>
       <p:sp>
         <p:nvSpPr>
-          <p:cNvPr id="28" name="New shape"/>
+          <p:cNvPr id="32" name="New shape"/>
           <p:cNvSpPr/>
           <p:nvPr/>
         </p:nvSpPr>
         <p:spPr>
           <a:xfrm>
             <a:off x="6946920" y="33998040"/>
-            <a:ext cx="21941640" cy="1266120"/>
+            <a:ext cx="21941280" cy="1265760"/>
           </a:xfrm>
           <a:prstGeom prst="rect">
             <a:avLst/>
@@ -3545,7 +4650,7 @@
       </p:sp>
       <p:sp>
         <p:nvSpPr>
-          <p:cNvPr id="29" name="PlaceHolder 1"/>
+          <p:cNvPr id="33" name="PlaceHolder 1"/>
           <p:cNvSpPr>
             <a:spLocks noGrp="1"/>
           </p:cNvSpPr>
@@ -3556,7 +4661,7 @@
         <p:spPr>
           <a:xfrm>
             <a:off x="3291480" y="11003760"/>
-            <a:ext cx="37304280" cy="5496120"/>
+            <a:ext cx="37303920" cy="5495760"/>
           </a:xfrm>
           <a:prstGeom prst="rect">
             <a:avLst/>
@@ -3594,7 +4699,7 @@
       </p:sp>
       <p:sp>
         <p:nvSpPr>
-          <p:cNvPr id="30" name="PlaceHolder 2"/>
+          <p:cNvPr id="34" name="PlaceHolder 2"/>
           <p:cNvSpPr>
             <a:spLocks noGrp="1"/>
           </p:cNvSpPr>
@@ -3819,7 +4924,7 @@
       </p:sp>
       <p:sp>
         <p:nvSpPr>
-          <p:cNvPr id="31" name="PlaceHolder 3"/>
+          <p:cNvPr id="35" name="PlaceHolder 3"/>
           <p:cNvSpPr>
             <a:spLocks noGrp="1"/>
           </p:cNvSpPr>
@@ -3830,7 +4935,7 @@
         <p:spPr>
           <a:xfrm>
             <a:off x="14994360" y="29977560"/>
-            <a:ext cx="13898160" cy="2282040"/>
+            <a:ext cx="13897800" cy="2281680"/>
           </a:xfrm>
           <a:prstGeom prst="rect">
             <a:avLst/>
@@ -3891,7 +4996,7 @@
       </p:sp>
       <p:sp>
         <p:nvSpPr>
-          <p:cNvPr id="32" name="PlaceHolder 4"/>
+          <p:cNvPr id="36" name="PlaceHolder 4"/>
           <p:cNvSpPr>
             <a:spLocks noGrp="1"/>
           </p:cNvSpPr>
@@ -3902,7 +5007,7 @@
         <p:spPr>
           <a:xfrm>
             <a:off x="31453560" y="29977560"/>
-            <a:ext cx="10240560" cy="2282040"/>
+            <a:ext cx="10240200" cy="2281680"/>
           </a:xfrm>
           <a:prstGeom prst="rect">
             <a:avLst/>
@@ -3944,7 +5049,7 @@
                 <a:tab algn="l" pos="0"/>
               </a:tabLst>
             </a:pPr>
-            <a:fld id="{B6967842-1D35-4E2D-B914-5E43DEC9735F}" type="slidenum">
+            <a:fld id="{1C25F128-94D2-4E38-9CBF-5026EE20C91F}" type="slidenum">
               <a:rPr b="0" lang="en-US" sz="5030" spc="-1" strike="noStrike">
                 <a:solidFill>
                   <a:schemeClr val="dk1"/>
@@ -3965,7 +5070,7 @@
       </p:sp>
       <p:sp>
         <p:nvSpPr>
-          <p:cNvPr id="33" name="PlaceHolder 5"/>
+          <p:cNvPr id="37" name="PlaceHolder 5"/>
           <p:cNvSpPr>
             <a:spLocks noGrp="1"/>
           </p:cNvSpPr>
@@ -3976,7 +5081,7 @@
         <p:spPr>
           <a:xfrm>
             <a:off x="2192760" y="29977560"/>
-            <a:ext cx="10240560" cy="2282040"/>
+            <a:ext cx="10240200" cy="2281680"/>
           </a:xfrm>
           <a:prstGeom prst="rect">
             <a:avLst/>
@@ -4058,7 +5163,7 @@
       </p:grpSpPr>
       <p:pic>
         <p:nvPicPr>
-          <p:cNvPr id="36" name="New picture" descr=""/>
+          <p:cNvPr id="40" name="New picture" descr=""/>
           <p:cNvPicPr/>
           <p:nvPr/>
         </p:nvPicPr>
@@ -4068,8 +5173,8 @@
         </p:blipFill>
         <p:spPr>
           <a:xfrm rot="16200000">
-            <a:off x="-11070360" y="16463160"/>
-            <a:ext cx="14270760" cy="3933000"/>
+            <a:off x="-11070000" y="16463520"/>
+            <a:ext cx="14270400" cy="3932640"/>
           </a:xfrm>
           <a:prstGeom prst="rect">
             <a:avLst/>
@@ -4081,7 +5186,7 @@
       </p:pic>
       <p:pic>
         <p:nvPicPr>
-          <p:cNvPr id="37" name="New picture" descr=""/>
+          <p:cNvPr id="41" name="New picture" descr=""/>
           <p:cNvPicPr/>
           <p:nvPr/>
         </p:nvPicPr>
@@ -4091,8 +5196,8 @@
         </p:blipFill>
         <p:spPr>
           <a:xfrm rot="5400000">
-            <a:off x="40694760" y="16459200"/>
-            <a:ext cx="14270760" cy="3933000"/>
+            <a:off x="40695120" y="16459200"/>
+            <a:ext cx="14270400" cy="3932640"/>
           </a:xfrm>
           <a:prstGeom prst="rect">
             <a:avLst/>
@@ -4104,7 +5209,7 @@
       </p:pic>
       <p:pic>
         <p:nvPicPr>
-          <p:cNvPr id="38" name="New picture" descr=""/>
+          <p:cNvPr id="42" name="New picture" descr=""/>
           <p:cNvPicPr/>
           <p:nvPr/>
         </p:nvPicPr>
@@ -4115,7 +5220,7 @@
         <p:spPr>
           <a:xfrm>
             <a:off x="6946920" y="33426360"/>
-            <a:ext cx="29993400" cy="1443960"/>
+            <a:ext cx="29993040" cy="1443600"/>
           </a:xfrm>
           <a:prstGeom prst="rect">
             <a:avLst/>
@@ -4127,14 +5232,14 @@
       </p:pic>
       <p:sp>
         <p:nvSpPr>
-          <p:cNvPr id="39" name="New shape"/>
+          <p:cNvPr id="43" name="New shape"/>
           <p:cNvSpPr/>
           <p:nvPr/>
         </p:nvSpPr>
         <p:spPr>
           <a:xfrm>
             <a:off x="6946920" y="33998040"/>
-            <a:ext cx="21941640" cy="1266120"/>
+            <a:ext cx="21941280" cy="1265760"/>
           </a:xfrm>
           <a:prstGeom prst="rect">
             <a:avLst/>
@@ -4189,7 +5294,7 @@
       </p:sp>
       <p:sp>
         <p:nvSpPr>
-          <p:cNvPr id="40" name="PlaceHolder 1"/>
+          <p:cNvPr id="44" name="PlaceHolder 1"/>
           <p:cNvSpPr>
             <a:spLocks noGrp="1"/>
           </p:cNvSpPr>
@@ -4200,7 +5305,7 @@
         <p:spPr>
           <a:xfrm>
             <a:off x="14994360" y="29977560"/>
-            <a:ext cx="13898160" cy="2282040"/>
+            <a:ext cx="13897800" cy="2281680"/>
           </a:xfrm>
           <a:prstGeom prst="rect">
             <a:avLst/>
@@ -4261,7 +5366,7 @@
       </p:sp>
       <p:sp>
         <p:nvSpPr>
-          <p:cNvPr id="41" name="PlaceHolder 2"/>
+          <p:cNvPr id="45" name="PlaceHolder 2"/>
           <p:cNvSpPr>
             <a:spLocks noGrp="1"/>
           </p:cNvSpPr>
@@ -4272,7 +5377,7 @@
         <p:spPr>
           <a:xfrm>
             <a:off x="31453560" y="29977560"/>
-            <a:ext cx="10240560" cy="2282040"/>
+            <a:ext cx="10240200" cy="2281680"/>
           </a:xfrm>
           <a:prstGeom prst="rect">
             <a:avLst/>
@@ -4314,7 +5419,7 @@
                 <a:tab algn="l" pos="0"/>
               </a:tabLst>
             </a:pPr>
-            <a:fld id="{6617869C-9D35-4196-B098-D0E7A482BF94}" type="slidenum">
+            <a:fld id="{AA764D63-C772-4905-96F2-A73105633163}" type="slidenum">
               <a:rPr b="0" lang="en-US" sz="5030" spc="-1" strike="noStrike">
                 <a:solidFill>
                   <a:schemeClr val="dk1"/>
@@ -4335,7 +5440,7 @@
       </p:sp>
       <p:sp>
         <p:nvSpPr>
-          <p:cNvPr id="42" name="PlaceHolder 3"/>
+          <p:cNvPr id="46" name="PlaceHolder 3"/>
           <p:cNvSpPr>
             <a:spLocks noGrp="1"/>
           </p:cNvSpPr>
@@ -4346,7 +5451,7 @@
         <p:spPr>
           <a:xfrm>
             <a:off x="2192760" y="29977560"/>
-            <a:ext cx="10240560" cy="2282040"/>
+            <a:ext cx="10240200" cy="2281680"/>
           </a:xfrm>
           <a:prstGeom prst="rect">
             <a:avLst/>
@@ -4389,6 +5494,280 @@
                 <a:srgbClr val="000000"/>
               </a:solidFill>
               <a:latin typeface="Times New Roman"/>
+            </a:endParaRPr>
+          </a:p>
+        </p:txBody>
+      </p:sp>
+      <p:sp>
+        <p:nvSpPr>
+          <p:cNvPr id="47" name="PlaceHolder 4"/>
+          <p:cNvSpPr>
+            <a:spLocks noGrp="1"/>
+          </p:cNvSpPr>
+          <p:nvPr>
+            <p:ph type="title"/>
+          </p:nvPr>
+        </p:nvSpPr>
+        <p:spPr>
+          <a:xfrm>
+            <a:off x="2194560" y="1313280"/>
+            <a:ext cx="39501720" cy="5496840"/>
+          </a:xfrm>
+          <a:prstGeom prst="rect">
+            <a:avLst/>
+          </a:prstGeom>
+          <a:noFill/>
+          <a:ln w="0">
+            <a:noFill/>
+          </a:ln>
+        </p:spPr>
+        <p:txBody>
+          <a:bodyPr lIns="0" rIns="0" tIns="0" bIns="0" anchor="ctr">
+            <a:noAutofit/>
+          </a:bodyPr>
+          <a:p>
+            <a:pPr indent="0" algn="ctr">
+              <a:buNone/>
+            </a:pPr>
+            <a:r>
+              <a:rPr b="0" lang="en-US" sz="4400" spc="-1" strike="noStrike">
+                <a:solidFill>
+                  <a:srgbClr val="000000"/>
+                </a:solidFill>
+                <a:latin typeface="Arial"/>
+              </a:rPr>
+              <a:t>Click to edit the title text format</a:t>
+            </a:r>
+            <a:endParaRPr b="0" lang="en-US" sz="4400" spc="-1" strike="noStrike">
+              <a:solidFill>
+                <a:srgbClr val="000000"/>
+              </a:solidFill>
+              <a:latin typeface="Arial"/>
+            </a:endParaRPr>
+          </a:p>
+        </p:txBody>
+      </p:sp>
+      <p:sp>
+        <p:nvSpPr>
+          <p:cNvPr id="48" name="PlaceHolder 5"/>
+          <p:cNvSpPr>
+            <a:spLocks noGrp="1"/>
+          </p:cNvSpPr>
+          <p:nvPr>
+            <p:ph type="body"/>
+          </p:nvPr>
+        </p:nvSpPr>
+        <p:spPr>
+          <a:xfrm>
+            <a:off x="2194560" y="7702560"/>
+            <a:ext cx="39501720" cy="19092240"/>
+          </a:xfrm>
+          <a:prstGeom prst="rect">
+            <a:avLst/>
+          </a:prstGeom>
+          <a:noFill/>
+          <a:ln w="0">
+            <a:noFill/>
+          </a:ln>
+        </p:spPr>
+        <p:txBody>
+          <a:bodyPr lIns="0" rIns="0" tIns="0" bIns="0" anchor="t">
+            <a:normAutofit/>
+          </a:bodyPr>
+          <a:p>
+            <a:pPr marL="432000" indent="-324000">
+              <a:spcBef>
+                <a:spcPts val="1417"/>
+              </a:spcBef>
+              <a:buClr>
+                <a:srgbClr val="000000"/>
+              </a:buClr>
+              <a:buSzPct val="45000"/>
+              <a:buFont typeface="Wingdings" charset="2"/>
+              <a:buChar char=""/>
+            </a:pPr>
+            <a:r>
+              <a:rPr b="0" lang="en-US" sz="3200" spc="-1" strike="noStrike">
+                <a:solidFill>
+                  <a:srgbClr val="000000"/>
+                </a:solidFill>
+                <a:latin typeface="Arial"/>
+              </a:rPr>
+              <a:t>Click to edit the outline text format</a:t>
+            </a:r>
+            <a:endParaRPr b="0" lang="en-US" sz="3200" spc="-1" strike="noStrike">
+              <a:solidFill>
+                <a:srgbClr val="000000"/>
+              </a:solidFill>
+              <a:latin typeface="Arial"/>
+            </a:endParaRPr>
+          </a:p>
+          <a:p>
+            <a:pPr lvl="1" marL="864000" indent="-324000">
+              <a:spcBef>
+                <a:spcPts val="1134"/>
+              </a:spcBef>
+              <a:buClr>
+                <a:srgbClr val="000000"/>
+              </a:buClr>
+              <a:buSzPct val="75000"/>
+              <a:buFont typeface="Symbol" charset="2"/>
+              <a:buChar char=""/>
+            </a:pPr>
+            <a:r>
+              <a:rPr b="0" lang="en-US" sz="2800" spc="-1" strike="noStrike">
+                <a:solidFill>
+                  <a:srgbClr val="000000"/>
+                </a:solidFill>
+                <a:latin typeface="Arial"/>
+              </a:rPr>
+              <a:t>Second Outline Level</a:t>
+            </a:r>
+            <a:endParaRPr b="0" lang="en-US" sz="2800" spc="-1" strike="noStrike">
+              <a:solidFill>
+                <a:srgbClr val="000000"/>
+              </a:solidFill>
+              <a:latin typeface="Arial"/>
+            </a:endParaRPr>
+          </a:p>
+          <a:p>
+            <a:pPr lvl="2" marL="1296000" indent="-288000">
+              <a:spcBef>
+                <a:spcPts val="850"/>
+              </a:spcBef>
+              <a:buClr>
+                <a:srgbClr val="000000"/>
+              </a:buClr>
+              <a:buSzPct val="45000"/>
+              <a:buFont typeface="Wingdings" charset="2"/>
+              <a:buChar char=""/>
+            </a:pPr>
+            <a:r>
+              <a:rPr b="0" lang="en-US" sz="2400" spc="-1" strike="noStrike">
+                <a:solidFill>
+                  <a:srgbClr val="000000"/>
+                </a:solidFill>
+                <a:latin typeface="Arial"/>
+              </a:rPr>
+              <a:t>Third Outline Level</a:t>
+            </a:r>
+            <a:endParaRPr b="0" lang="en-US" sz="2400" spc="-1" strike="noStrike">
+              <a:solidFill>
+                <a:srgbClr val="000000"/>
+              </a:solidFill>
+              <a:latin typeface="Arial"/>
+            </a:endParaRPr>
+          </a:p>
+          <a:p>
+            <a:pPr lvl="3" marL="1728000" indent="-216000">
+              <a:spcBef>
+                <a:spcPts val="567"/>
+              </a:spcBef>
+              <a:buClr>
+                <a:srgbClr val="000000"/>
+              </a:buClr>
+              <a:buSzPct val="75000"/>
+              <a:buFont typeface="Symbol" charset="2"/>
+              <a:buChar char=""/>
+            </a:pPr>
+            <a:r>
+              <a:rPr b="0" lang="en-US" sz="2000" spc="-1" strike="noStrike">
+                <a:solidFill>
+                  <a:srgbClr val="000000"/>
+                </a:solidFill>
+                <a:latin typeface="Arial"/>
+              </a:rPr>
+              <a:t>Fourth Outline Level</a:t>
+            </a:r>
+            <a:endParaRPr b="0" lang="en-US" sz="2000" spc="-1" strike="noStrike">
+              <a:solidFill>
+                <a:srgbClr val="000000"/>
+              </a:solidFill>
+              <a:latin typeface="Arial"/>
+            </a:endParaRPr>
+          </a:p>
+          <a:p>
+            <a:pPr lvl="4" marL="2160000" indent="-216000">
+              <a:spcBef>
+                <a:spcPts val="283"/>
+              </a:spcBef>
+              <a:buClr>
+                <a:srgbClr val="000000"/>
+              </a:buClr>
+              <a:buSzPct val="45000"/>
+              <a:buFont typeface="Wingdings" charset="2"/>
+              <a:buChar char=""/>
+            </a:pPr>
+            <a:r>
+              <a:rPr b="0" lang="en-US" sz="2000" spc="-1" strike="noStrike">
+                <a:solidFill>
+                  <a:srgbClr val="000000"/>
+                </a:solidFill>
+                <a:latin typeface="Arial"/>
+              </a:rPr>
+              <a:t>Fifth Outline Level</a:t>
+            </a:r>
+            <a:endParaRPr b="0" lang="en-US" sz="2000" spc="-1" strike="noStrike">
+              <a:solidFill>
+                <a:srgbClr val="000000"/>
+              </a:solidFill>
+              <a:latin typeface="Arial"/>
+            </a:endParaRPr>
+          </a:p>
+          <a:p>
+            <a:pPr lvl="5" marL="2592000" indent="-216000">
+              <a:spcBef>
+                <a:spcPts val="283"/>
+              </a:spcBef>
+              <a:buClr>
+                <a:srgbClr val="000000"/>
+              </a:buClr>
+              <a:buSzPct val="45000"/>
+              <a:buFont typeface="Wingdings" charset="2"/>
+              <a:buChar char=""/>
+            </a:pPr>
+            <a:r>
+              <a:rPr b="0" lang="en-US" sz="2000" spc="-1" strike="noStrike">
+                <a:solidFill>
+                  <a:srgbClr val="000000"/>
+                </a:solidFill>
+                <a:latin typeface="Arial"/>
+              </a:rPr>
+              <a:t>Sixth Outline Level</a:t>
+            </a:r>
+            <a:endParaRPr b="0" lang="en-US" sz="2000" spc="-1" strike="noStrike">
+              <a:solidFill>
+                <a:srgbClr val="000000"/>
+              </a:solidFill>
+              <a:latin typeface="Arial"/>
+            </a:endParaRPr>
+          </a:p>
+          <a:p>
+            <a:pPr lvl="6" marL="3024000" indent="-216000">
+              <a:spcBef>
+                <a:spcPts val="283"/>
+              </a:spcBef>
+              <a:buClr>
+                <a:srgbClr val="000000"/>
+              </a:buClr>
+              <a:buSzPct val="45000"/>
+              <a:buFont typeface="Wingdings" charset="2"/>
+              <a:buChar char=""/>
+            </a:pPr>
+            <a:r>
+              <a:rPr b="0" lang="en-US" sz="2000" spc="-1" strike="noStrike">
+                <a:solidFill>
+                  <a:srgbClr val="000000"/>
+                </a:solidFill>
+                <a:latin typeface="Arial"/>
+              </a:rPr>
+              <a:t>Seventh Outline Level</a:t>
+            </a:r>
+            <a:endParaRPr b="0" lang="en-US" sz="2000" spc="-1" strike="noStrike">
+              <a:solidFill>
+                <a:srgbClr val="000000"/>
+              </a:solidFill>
+              <a:latin typeface="Arial"/>
             </a:endParaRPr>
           </a:p>
         </p:txBody>
@@ -4428,7 +5807,7 @@
       </p:grpSpPr>
       <p:pic>
         <p:nvPicPr>
-          <p:cNvPr id="43" name="New picture" descr=""/>
+          <p:cNvPr id="49" name="New picture" descr=""/>
           <p:cNvPicPr/>
           <p:nvPr/>
         </p:nvPicPr>
@@ -4438,8 +5817,8 @@
         </p:blipFill>
         <p:spPr>
           <a:xfrm rot="16200000">
-            <a:off x="-11070360" y="16463160"/>
-            <a:ext cx="14270760" cy="3933000"/>
+            <a:off x="-11070000" y="16463520"/>
+            <a:ext cx="14270400" cy="3932640"/>
           </a:xfrm>
           <a:prstGeom prst="rect">
             <a:avLst/>
@@ -4451,7 +5830,7 @@
       </p:pic>
       <p:pic>
         <p:nvPicPr>
-          <p:cNvPr id="44" name="New picture" descr=""/>
+          <p:cNvPr id="50" name="New picture" descr=""/>
           <p:cNvPicPr/>
           <p:nvPr/>
         </p:nvPicPr>
@@ -4461,8 +5840,8 @@
         </p:blipFill>
         <p:spPr>
           <a:xfrm rot="5400000">
-            <a:off x="40694760" y="16459200"/>
-            <a:ext cx="14270760" cy="3933000"/>
+            <a:off x="40695120" y="16459200"/>
+            <a:ext cx="14270400" cy="3932640"/>
           </a:xfrm>
           <a:prstGeom prst="rect">
             <a:avLst/>
@@ -4474,7 +5853,7 @@
       </p:pic>
       <p:pic>
         <p:nvPicPr>
-          <p:cNvPr id="45" name="New picture" descr=""/>
+          <p:cNvPr id="51" name="New picture" descr=""/>
           <p:cNvPicPr/>
           <p:nvPr/>
         </p:nvPicPr>
@@ -4485,7 +5864,7 @@
         <p:spPr>
           <a:xfrm>
             <a:off x="6946920" y="33426360"/>
-            <a:ext cx="29993400" cy="1443960"/>
+            <a:ext cx="29993040" cy="1443600"/>
           </a:xfrm>
           <a:prstGeom prst="rect">
             <a:avLst/>
@@ -4497,14 +5876,14 @@
       </p:pic>
       <p:sp>
         <p:nvSpPr>
-          <p:cNvPr id="46" name="New shape"/>
+          <p:cNvPr id="52" name="New shape"/>
           <p:cNvSpPr/>
           <p:nvPr/>
         </p:nvSpPr>
         <p:spPr>
           <a:xfrm>
             <a:off x="6946920" y="33998040"/>
-            <a:ext cx="21941640" cy="1266120"/>
+            <a:ext cx="21941280" cy="1265760"/>
           </a:xfrm>
           <a:prstGeom prst="rect">
             <a:avLst/>
@@ -4559,7 +5938,7 @@
       </p:sp>
       <p:sp>
         <p:nvSpPr>
-          <p:cNvPr id="47" name="PlaceHolder 1"/>
+          <p:cNvPr id="53" name="PlaceHolder 1"/>
           <p:cNvSpPr>
             <a:spLocks noGrp="1"/>
           </p:cNvSpPr>
@@ -4570,7 +5949,7 @@
         <p:spPr>
           <a:xfrm>
             <a:off x="3291480" y="11003760"/>
-            <a:ext cx="37304280" cy="5496120"/>
+            <a:ext cx="37303920" cy="5495760"/>
           </a:xfrm>
           <a:prstGeom prst="rect">
             <a:avLst/>
@@ -4608,7 +5987,7 @@
       </p:sp>
       <p:sp>
         <p:nvSpPr>
-          <p:cNvPr id="48" name="PlaceHolder 2"/>
+          <p:cNvPr id="54" name="PlaceHolder 2"/>
           <p:cNvSpPr>
             <a:spLocks noGrp="1"/>
           </p:cNvSpPr>
@@ -4833,7 +6212,7 @@
       </p:sp>
       <p:sp>
         <p:nvSpPr>
-          <p:cNvPr id="49" name="PlaceHolder 3"/>
+          <p:cNvPr id="55" name="PlaceHolder 3"/>
           <p:cNvSpPr>
             <a:spLocks noGrp="1"/>
           </p:cNvSpPr>
@@ -5058,7 +6437,7 @@
       </p:sp>
       <p:sp>
         <p:nvSpPr>
-          <p:cNvPr id="50" name="PlaceHolder 4"/>
+          <p:cNvPr id="56" name="PlaceHolder 4"/>
           <p:cNvSpPr>
             <a:spLocks noGrp="1"/>
           </p:cNvSpPr>
@@ -5069,7 +6448,7 @@
         <p:spPr>
           <a:xfrm>
             <a:off x="14994360" y="29977560"/>
-            <a:ext cx="13898160" cy="2282040"/>
+            <a:ext cx="13897800" cy="2281680"/>
           </a:xfrm>
           <a:prstGeom prst="rect">
             <a:avLst/>
@@ -5130,7 +6509,7 @@
       </p:sp>
       <p:sp>
         <p:nvSpPr>
-          <p:cNvPr id="51" name="PlaceHolder 5"/>
+          <p:cNvPr id="57" name="PlaceHolder 5"/>
           <p:cNvSpPr>
             <a:spLocks noGrp="1"/>
           </p:cNvSpPr>
@@ -5141,7 +6520,7 @@
         <p:spPr>
           <a:xfrm>
             <a:off x="31453560" y="29977560"/>
-            <a:ext cx="10240560" cy="2282040"/>
+            <a:ext cx="10240200" cy="2281680"/>
           </a:xfrm>
           <a:prstGeom prst="rect">
             <a:avLst/>
@@ -5183,7 +6562,7 @@
                 <a:tab algn="l" pos="0"/>
               </a:tabLst>
             </a:pPr>
-            <a:fld id="{164A55CF-61B7-478D-BE14-BB90A68FA5D4}" type="slidenum">
+            <a:fld id="{95E79EE5-232E-4B76-BBA4-1511D6ACD079}" type="slidenum">
               <a:rPr b="0" lang="en-US" sz="5030" spc="-1" strike="noStrike">
                 <a:solidFill>
                   <a:schemeClr val="dk1"/>
@@ -5204,7 +6583,7 @@
       </p:sp>
       <p:sp>
         <p:nvSpPr>
-          <p:cNvPr id="52" name="PlaceHolder 6"/>
+          <p:cNvPr id="58" name="PlaceHolder 6"/>
           <p:cNvSpPr>
             <a:spLocks noGrp="1"/>
           </p:cNvSpPr>
@@ -5215,7 +6594,7 @@
         <p:spPr>
           <a:xfrm>
             <a:off x="2192760" y="29977560"/>
-            <a:ext cx="10240560" cy="2282040"/>
+            <a:ext cx="10240200" cy="2281680"/>
           </a:xfrm>
           <a:prstGeom prst="rect">
             <a:avLst/>
@@ -5297,7 +6676,7 @@
       </p:grpSpPr>
       <p:pic>
         <p:nvPicPr>
-          <p:cNvPr id="56" name="New picture" descr=""/>
+          <p:cNvPr id="62" name="New picture" descr=""/>
           <p:cNvPicPr/>
           <p:nvPr/>
         </p:nvPicPr>
@@ -5307,8 +6686,8 @@
         </p:blipFill>
         <p:spPr>
           <a:xfrm rot="16200000">
-            <a:off x="-11070360" y="16463160"/>
-            <a:ext cx="14270760" cy="3933000"/>
+            <a:off x="-11070000" y="16463520"/>
+            <a:ext cx="14270400" cy="3932640"/>
           </a:xfrm>
           <a:prstGeom prst="rect">
             <a:avLst/>
@@ -5320,7 +6699,7 @@
       </p:pic>
       <p:pic>
         <p:nvPicPr>
-          <p:cNvPr id="57" name="New picture" descr=""/>
+          <p:cNvPr id="63" name="New picture" descr=""/>
           <p:cNvPicPr/>
           <p:nvPr/>
         </p:nvPicPr>
@@ -5330,8 +6709,8 @@
         </p:blipFill>
         <p:spPr>
           <a:xfrm rot="5400000">
-            <a:off x="40694760" y="16459200"/>
-            <a:ext cx="14270760" cy="3933000"/>
+            <a:off x="40695120" y="16459200"/>
+            <a:ext cx="14270400" cy="3932640"/>
           </a:xfrm>
           <a:prstGeom prst="rect">
             <a:avLst/>
@@ -5343,7 +6722,7 @@
       </p:pic>
       <p:pic>
         <p:nvPicPr>
-          <p:cNvPr id="58" name="New picture" descr=""/>
+          <p:cNvPr id="64" name="New picture" descr=""/>
           <p:cNvPicPr/>
           <p:nvPr/>
         </p:nvPicPr>
@@ -5354,7 +6733,7 @@
         <p:spPr>
           <a:xfrm>
             <a:off x="6946920" y="33426360"/>
-            <a:ext cx="29993400" cy="1443960"/>
+            <a:ext cx="29993040" cy="1443600"/>
           </a:xfrm>
           <a:prstGeom prst="rect">
             <a:avLst/>
@@ -5366,14 +6745,14 @@
       </p:pic>
       <p:sp>
         <p:nvSpPr>
-          <p:cNvPr id="59" name="New shape"/>
+          <p:cNvPr id="65" name="New shape"/>
           <p:cNvSpPr/>
           <p:nvPr/>
         </p:nvSpPr>
         <p:spPr>
           <a:xfrm>
             <a:off x="6946920" y="33998040"/>
-            <a:ext cx="21941640" cy="1266120"/>
+            <a:ext cx="21941280" cy="1265760"/>
           </a:xfrm>
           <a:prstGeom prst="rect">
             <a:avLst/>
@@ -5428,7 +6807,7 @@
       </p:sp>
       <p:sp>
         <p:nvSpPr>
-          <p:cNvPr id="60" name="PlaceHolder 1"/>
+          <p:cNvPr id="66" name="PlaceHolder 1"/>
           <p:cNvSpPr>
             <a:spLocks noGrp="1"/>
           </p:cNvSpPr>
@@ -5439,7 +6818,7 @@
         <p:spPr>
           <a:xfrm>
             <a:off x="14994360" y="29977560"/>
-            <a:ext cx="13898160" cy="2282040"/>
+            <a:ext cx="13897800" cy="2281680"/>
           </a:xfrm>
           <a:prstGeom prst="rect">
             <a:avLst/>
@@ -5500,7 +6879,7 @@
       </p:sp>
       <p:sp>
         <p:nvSpPr>
-          <p:cNvPr id="61" name="PlaceHolder 2"/>
+          <p:cNvPr id="67" name="PlaceHolder 2"/>
           <p:cNvSpPr>
             <a:spLocks noGrp="1"/>
           </p:cNvSpPr>
@@ -5511,7 +6890,7 @@
         <p:spPr>
           <a:xfrm>
             <a:off x="31453560" y="29977560"/>
-            <a:ext cx="10240560" cy="2282040"/>
+            <a:ext cx="10240200" cy="2281680"/>
           </a:xfrm>
           <a:prstGeom prst="rect">
             <a:avLst/>
@@ -5553,7 +6932,7 @@
                 <a:tab algn="l" pos="0"/>
               </a:tabLst>
             </a:pPr>
-            <a:fld id="{5A054267-5D32-4518-A012-31F63AD9A6A4}" type="slidenum">
+            <a:fld id="{C59B17D6-192D-444B-9E54-BAE34BDE4E82}" type="slidenum">
               <a:rPr b="0" lang="en-US" sz="5030" spc="-1" strike="noStrike">
                 <a:solidFill>
                   <a:schemeClr val="dk1"/>
@@ -5574,7 +6953,7 @@
       </p:sp>
       <p:sp>
         <p:nvSpPr>
-          <p:cNvPr id="62" name="PlaceHolder 3"/>
+          <p:cNvPr id="68" name="PlaceHolder 3"/>
           <p:cNvSpPr>
             <a:spLocks noGrp="1"/>
           </p:cNvSpPr>
@@ -5585,7 +6964,7 @@
         <p:spPr>
           <a:xfrm>
             <a:off x="2192760" y="29977560"/>
-            <a:ext cx="10240560" cy="2282040"/>
+            <a:ext cx="10240200" cy="2281680"/>
           </a:xfrm>
           <a:prstGeom prst="rect">
             <a:avLst/>
@@ -5628,6 +7007,289 @@
                 <a:srgbClr val="000000"/>
               </a:solidFill>
               <a:latin typeface="Times New Roman"/>
+            </a:endParaRPr>
+          </a:p>
+        </p:txBody>
+      </p:sp>
+      <p:sp>
+        <p:nvSpPr>
+          <p:cNvPr id="69" name="PlaceHolder 4"/>
+          <p:cNvSpPr>
+            <a:spLocks noGrp="1"/>
+          </p:cNvSpPr>
+          <p:nvPr>
+            <p:ph type="title"/>
+          </p:nvPr>
+        </p:nvSpPr>
+        <p:spPr>
+          <a:xfrm>
+            <a:off x="2194560" y="1313280"/>
+            <a:ext cx="39501720" cy="5496840"/>
+          </a:xfrm>
+          <a:prstGeom prst="rect">
+            <a:avLst/>
+          </a:prstGeom>
+          <a:noFill/>
+          <a:ln w="0">
+            <a:noFill/>
+          </a:ln>
+        </p:spPr>
+        <p:txBody>
+          <a:bodyPr lIns="0" rIns="0" tIns="0" bIns="0" anchor="ctr">
+            <a:noAutofit/>
+          </a:bodyPr>
+          <a:p>
+            <a:pPr indent="0" algn="ctr">
+              <a:buNone/>
+            </a:pPr>
+            <a:r>
+              <a:rPr b="0" lang="en-US" sz="4400" spc="-1" strike="noStrike">
+                <a:solidFill>
+                  <a:srgbClr val="000000"/>
+                </a:solidFill>
+                <a:latin typeface="Arial"/>
+              </a:rPr>
+              <a:t>Click to edit the </a:t>
+            </a:r>
+            <a:r>
+              <a:rPr b="0" lang="en-US" sz="4400" spc="-1" strike="noStrike">
+                <a:solidFill>
+                  <a:srgbClr val="000000"/>
+                </a:solidFill>
+                <a:latin typeface="Arial"/>
+              </a:rPr>
+              <a:t>title text format</a:t>
+            </a:r>
+            <a:endParaRPr b="0" lang="en-US" sz="4400" spc="-1" strike="noStrike">
+              <a:solidFill>
+                <a:srgbClr val="000000"/>
+              </a:solidFill>
+              <a:latin typeface="Arial"/>
+            </a:endParaRPr>
+          </a:p>
+        </p:txBody>
+      </p:sp>
+      <p:sp>
+        <p:nvSpPr>
+          <p:cNvPr id="70" name="PlaceHolder 5"/>
+          <p:cNvSpPr>
+            <a:spLocks noGrp="1"/>
+          </p:cNvSpPr>
+          <p:nvPr>
+            <p:ph type="body"/>
+          </p:nvPr>
+        </p:nvSpPr>
+        <p:spPr>
+          <a:xfrm>
+            <a:off x="2194560" y="7702560"/>
+            <a:ext cx="39501720" cy="19092240"/>
+          </a:xfrm>
+          <a:prstGeom prst="rect">
+            <a:avLst/>
+          </a:prstGeom>
+          <a:noFill/>
+          <a:ln w="0">
+            <a:noFill/>
+          </a:ln>
+        </p:spPr>
+        <p:txBody>
+          <a:bodyPr lIns="0" rIns="0" tIns="0" bIns="0" anchor="t">
+            <a:normAutofit/>
+          </a:bodyPr>
+          <a:p>
+            <a:pPr marL="432000" indent="-324000">
+              <a:spcBef>
+                <a:spcPts val="1417"/>
+              </a:spcBef>
+              <a:buClr>
+                <a:srgbClr val="000000"/>
+              </a:buClr>
+              <a:buSzPct val="45000"/>
+              <a:buFont typeface="Wingdings" charset="2"/>
+              <a:buChar char=""/>
+            </a:pPr>
+            <a:r>
+              <a:rPr b="0" lang="en-US" sz="3200" spc="-1" strike="noStrike">
+                <a:solidFill>
+                  <a:srgbClr val="000000"/>
+                </a:solidFill>
+                <a:latin typeface="Arial"/>
+              </a:rPr>
+              <a:t>Click to edit the outline text format</a:t>
+            </a:r>
+            <a:endParaRPr b="0" lang="en-US" sz="3200" spc="-1" strike="noStrike">
+              <a:solidFill>
+                <a:srgbClr val="000000"/>
+              </a:solidFill>
+              <a:latin typeface="Arial"/>
+            </a:endParaRPr>
+          </a:p>
+          <a:p>
+            <a:pPr lvl="1" marL="864000" indent="-324000">
+              <a:spcBef>
+                <a:spcPts val="1134"/>
+              </a:spcBef>
+              <a:buClr>
+                <a:srgbClr val="000000"/>
+              </a:buClr>
+              <a:buSzPct val="75000"/>
+              <a:buFont typeface="Symbol" charset="2"/>
+              <a:buChar char=""/>
+            </a:pPr>
+            <a:r>
+              <a:rPr b="0" lang="en-US" sz="2800" spc="-1" strike="noStrike">
+                <a:solidFill>
+                  <a:srgbClr val="000000"/>
+                </a:solidFill>
+                <a:latin typeface="Arial"/>
+              </a:rPr>
+              <a:t>Second Outline Level</a:t>
+            </a:r>
+            <a:endParaRPr b="0" lang="en-US" sz="2800" spc="-1" strike="noStrike">
+              <a:solidFill>
+                <a:srgbClr val="000000"/>
+              </a:solidFill>
+              <a:latin typeface="Arial"/>
+            </a:endParaRPr>
+          </a:p>
+          <a:p>
+            <a:pPr lvl="2" marL="1296000" indent="-288000">
+              <a:spcBef>
+                <a:spcPts val="850"/>
+              </a:spcBef>
+              <a:buClr>
+                <a:srgbClr val="000000"/>
+              </a:buClr>
+              <a:buSzPct val="45000"/>
+              <a:buFont typeface="Wingdings" charset="2"/>
+              <a:buChar char=""/>
+            </a:pPr>
+            <a:r>
+              <a:rPr b="0" lang="en-US" sz="2400" spc="-1" strike="noStrike">
+                <a:solidFill>
+                  <a:srgbClr val="000000"/>
+                </a:solidFill>
+                <a:latin typeface="Arial"/>
+              </a:rPr>
+              <a:t>Third Outline Level</a:t>
+            </a:r>
+            <a:endParaRPr b="0" lang="en-US" sz="2400" spc="-1" strike="noStrike">
+              <a:solidFill>
+                <a:srgbClr val="000000"/>
+              </a:solidFill>
+              <a:latin typeface="Arial"/>
+            </a:endParaRPr>
+          </a:p>
+          <a:p>
+            <a:pPr lvl="3" marL="1728000" indent="-216000">
+              <a:spcBef>
+                <a:spcPts val="567"/>
+              </a:spcBef>
+              <a:buClr>
+                <a:srgbClr val="000000"/>
+              </a:buClr>
+              <a:buSzPct val="75000"/>
+              <a:buFont typeface="Symbol" charset="2"/>
+              <a:buChar char=""/>
+            </a:pPr>
+            <a:r>
+              <a:rPr b="0" lang="en-US" sz="2000" spc="-1" strike="noStrike">
+                <a:solidFill>
+                  <a:srgbClr val="000000"/>
+                </a:solidFill>
+                <a:latin typeface="Arial"/>
+              </a:rPr>
+              <a:t>Fourth Outline Level</a:t>
+            </a:r>
+            <a:endParaRPr b="0" lang="en-US" sz="2000" spc="-1" strike="noStrike">
+              <a:solidFill>
+                <a:srgbClr val="000000"/>
+              </a:solidFill>
+              <a:latin typeface="Arial"/>
+            </a:endParaRPr>
+          </a:p>
+          <a:p>
+            <a:pPr lvl="4" marL="2160000" indent="-216000">
+              <a:spcBef>
+                <a:spcPts val="283"/>
+              </a:spcBef>
+              <a:buClr>
+                <a:srgbClr val="000000"/>
+              </a:buClr>
+              <a:buSzPct val="45000"/>
+              <a:buFont typeface="Wingdings" charset="2"/>
+              <a:buChar char=""/>
+            </a:pPr>
+            <a:r>
+              <a:rPr b="0" lang="en-US" sz="2000" spc="-1" strike="noStrike">
+                <a:solidFill>
+                  <a:srgbClr val="000000"/>
+                </a:solidFill>
+                <a:latin typeface="Arial"/>
+              </a:rPr>
+              <a:t>Fifth Outline Level</a:t>
+            </a:r>
+            <a:endParaRPr b="0" lang="en-US" sz="2000" spc="-1" strike="noStrike">
+              <a:solidFill>
+                <a:srgbClr val="000000"/>
+              </a:solidFill>
+              <a:latin typeface="Arial"/>
+            </a:endParaRPr>
+          </a:p>
+          <a:p>
+            <a:pPr lvl="5" marL="2592000" indent="-216000">
+              <a:spcBef>
+                <a:spcPts val="283"/>
+              </a:spcBef>
+              <a:buClr>
+                <a:srgbClr val="000000"/>
+              </a:buClr>
+              <a:buSzPct val="45000"/>
+              <a:buFont typeface="Wingdings" charset="2"/>
+              <a:buChar char=""/>
+            </a:pPr>
+            <a:r>
+              <a:rPr b="0" lang="en-US" sz="2000" spc="-1" strike="noStrike">
+                <a:solidFill>
+                  <a:srgbClr val="000000"/>
+                </a:solidFill>
+                <a:latin typeface="Arial"/>
+              </a:rPr>
+              <a:t>Sixth Outline Level</a:t>
+            </a:r>
+            <a:endParaRPr b="0" lang="en-US" sz="2000" spc="-1" strike="noStrike">
+              <a:solidFill>
+                <a:srgbClr val="000000"/>
+              </a:solidFill>
+              <a:latin typeface="Arial"/>
+            </a:endParaRPr>
+          </a:p>
+          <a:p>
+            <a:pPr lvl="6" marL="3024000" indent="-216000">
+              <a:spcBef>
+                <a:spcPts val="283"/>
+              </a:spcBef>
+              <a:buClr>
+                <a:srgbClr val="000000"/>
+              </a:buClr>
+              <a:buSzPct val="45000"/>
+              <a:buFont typeface="Wingdings" charset="2"/>
+              <a:buChar char=""/>
+            </a:pPr>
+            <a:r>
+              <a:rPr b="0" lang="en-US" sz="2000" spc="-1" strike="noStrike">
+                <a:solidFill>
+                  <a:srgbClr val="000000"/>
+                </a:solidFill>
+                <a:latin typeface="Arial"/>
+              </a:rPr>
+              <a:t>Seventh Outline Level</a:t>
+            </a:r>
+            <a:endParaRPr b="0" lang="en-US" sz="2000" spc="-1" strike="noStrike">
+              <a:solidFill>
+                <a:srgbClr val="000000"/>
+              </a:solidFill>
+              <a:latin typeface="Arial"/>
             </a:endParaRPr>
           </a:p>
         </p:txBody>
@@ -5667,7 +7329,7 @@
       </p:grpSpPr>
       <p:pic>
         <p:nvPicPr>
-          <p:cNvPr id="63" name="New picture" descr=""/>
+          <p:cNvPr id="71" name="New picture" descr=""/>
           <p:cNvPicPr/>
           <p:nvPr/>
         </p:nvPicPr>
@@ -5677,8 +7339,8 @@
         </p:blipFill>
         <p:spPr>
           <a:xfrm rot="16200000">
-            <a:off x="-11070360" y="16463160"/>
-            <a:ext cx="14270760" cy="3933000"/>
+            <a:off x="-11070000" y="16463520"/>
+            <a:ext cx="14270400" cy="3932640"/>
           </a:xfrm>
           <a:prstGeom prst="rect">
             <a:avLst/>
@@ -5690,7 +7352,7 @@
       </p:pic>
       <p:pic>
         <p:nvPicPr>
-          <p:cNvPr id="64" name="New picture" descr=""/>
+          <p:cNvPr id="72" name="New picture" descr=""/>
           <p:cNvPicPr/>
           <p:nvPr/>
         </p:nvPicPr>
@@ -5700,8 +7362,8 @@
         </p:blipFill>
         <p:spPr>
           <a:xfrm rot="5400000">
-            <a:off x="40694760" y="16459200"/>
-            <a:ext cx="14270760" cy="3933000"/>
+            <a:off x="40695120" y="16459200"/>
+            <a:ext cx="14270400" cy="3932640"/>
           </a:xfrm>
           <a:prstGeom prst="rect">
             <a:avLst/>
@@ -5713,7 +7375,7 @@
       </p:pic>
       <p:pic>
         <p:nvPicPr>
-          <p:cNvPr id="65" name="New picture" descr=""/>
+          <p:cNvPr id="73" name="New picture" descr=""/>
           <p:cNvPicPr/>
           <p:nvPr/>
         </p:nvPicPr>
@@ -5724,7 +7386,7 @@
         <p:spPr>
           <a:xfrm>
             <a:off x="6946920" y="33426360"/>
-            <a:ext cx="29993400" cy="1443960"/>
+            <a:ext cx="29993040" cy="1443600"/>
           </a:xfrm>
           <a:prstGeom prst="rect">
             <a:avLst/>
@@ -5736,14 +7398,14 @@
       </p:pic>
       <p:sp>
         <p:nvSpPr>
-          <p:cNvPr id="66" name="New shape"/>
+          <p:cNvPr id="74" name="New shape"/>
           <p:cNvSpPr/>
           <p:nvPr/>
         </p:nvSpPr>
         <p:spPr>
           <a:xfrm>
             <a:off x="6946920" y="33998040"/>
-            <a:ext cx="21941640" cy="1266120"/>
+            <a:ext cx="21941280" cy="1265760"/>
           </a:xfrm>
           <a:prstGeom prst="rect">
             <a:avLst/>
@@ -5798,7 +7460,7 @@
       </p:sp>
       <p:sp>
         <p:nvSpPr>
-          <p:cNvPr id="67" name="PlaceHolder 1"/>
+          <p:cNvPr id="75" name="PlaceHolder 1"/>
           <p:cNvSpPr>
             <a:spLocks noGrp="1"/>
           </p:cNvSpPr>
@@ -5809,7 +7471,7 @@
         <p:spPr>
           <a:xfrm>
             <a:off x="3291480" y="11003760"/>
-            <a:ext cx="37304280" cy="5496120"/>
+            <a:ext cx="37303920" cy="5495760"/>
           </a:xfrm>
           <a:prstGeom prst="rect">
             <a:avLst/>
@@ -5847,7 +7509,7 @@
       </p:sp>
       <p:sp>
         <p:nvSpPr>
-          <p:cNvPr id="68" name="PlaceHolder 2"/>
+          <p:cNvPr id="76" name="PlaceHolder 2"/>
           <p:cNvSpPr>
             <a:spLocks noGrp="1"/>
           </p:cNvSpPr>
@@ -5858,7 +7520,7 @@
         <p:spPr>
           <a:xfrm>
             <a:off x="14994360" y="29977560"/>
-            <a:ext cx="13898160" cy="2282040"/>
+            <a:ext cx="13897800" cy="2281680"/>
           </a:xfrm>
           <a:prstGeom prst="rect">
             <a:avLst/>
@@ -5919,7 +7581,7 @@
       </p:sp>
       <p:sp>
         <p:nvSpPr>
-          <p:cNvPr id="69" name="PlaceHolder 3"/>
+          <p:cNvPr id="77" name="PlaceHolder 3"/>
           <p:cNvSpPr>
             <a:spLocks noGrp="1"/>
           </p:cNvSpPr>
@@ -5930,7 +7592,7 @@
         <p:spPr>
           <a:xfrm>
             <a:off x="31453560" y="29977560"/>
-            <a:ext cx="10240560" cy="2282040"/>
+            <a:ext cx="10240200" cy="2281680"/>
           </a:xfrm>
           <a:prstGeom prst="rect">
             <a:avLst/>
@@ -5972,7 +7634,7 @@
                 <a:tab algn="l" pos="0"/>
               </a:tabLst>
             </a:pPr>
-            <a:fld id="{B3631237-2D99-401B-8685-AAD786BC3D57}" type="slidenum">
+            <a:fld id="{1ED76ACF-A9D3-4148-B990-53E20E85EC70}" type="slidenum">
               <a:rPr b="0" lang="en-US" sz="5030" spc="-1" strike="noStrike">
                 <a:solidFill>
                   <a:schemeClr val="dk1"/>
@@ -5993,7 +7655,7 @@
       </p:sp>
       <p:sp>
         <p:nvSpPr>
-          <p:cNvPr id="70" name="PlaceHolder 4"/>
+          <p:cNvPr id="78" name="PlaceHolder 4"/>
           <p:cNvSpPr>
             <a:spLocks noGrp="1"/>
           </p:cNvSpPr>
@@ -6004,7 +7666,7 @@
         <p:spPr>
           <a:xfrm>
             <a:off x="2192760" y="29977560"/>
-            <a:ext cx="10240560" cy="2282040"/>
+            <a:ext cx="10240200" cy="2281680"/>
           </a:xfrm>
           <a:prstGeom prst="rect">
             <a:avLst/>
@@ -6047,6 +7709,231 @@
                 <a:srgbClr val="000000"/>
               </a:solidFill>
               <a:latin typeface="Times New Roman"/>
+            </a:endParaRPr>
+          </a:p>
+        </p:txBody>
+      </p:sp>
+      <p:sp>
+        <p:nvSpPr>
+          <p:cNvPr id="79" name="PlaceHolder 5"/>
+          <p:cNvSpPr>
+            <a:spLocks noGrp="1"/>
+          </p:cNvSpPr>
+          <p:nvPr>
+            <p:ph type="body"/>
+          </p:nvPr>
+        </p:nvSpPr>
+        <p:spPr>
+          <a:xfrm>
+            <a:off x="2194560" y="7702560"/>
+            <a:ext cx="39501720" cy="19092240"/>
+          </a:xfrm>
+          <a:prstGeom prst="rect">
+            <a:avLst/>
+          </a:prstGeom>
+          <a:noFill/>
+          <a:ln w="0">
+            <a:noFill/>
+          </a:ln>
+        </p:spPr>
+        <p:txBody>
+          <a:bodyPr lIns="0" rIns="0" tIns="0" bIns="0" anchor="t">
+            <a:normAutofit/>
+          </a:bodyPr>
+          <a:p>
+            <a:pPr marL="432000" indent="-324000">
+              <a:spcBef>
+                <a:spcPts val="1417"/>
+              </a:spcBef>
+              <a:buClr>
+                <a:srgbClr val="000000"/>
+              </a:buClr>
+              <a:buSzPct val="45000"/>
+              <a:buFont typeface="Wingdings" charset="2"/>
+              <a:buChar char=""/>
+            </a:pPr>
+            <a:r>
+              <a:rPr b="0" lang="en-US" sz="3200" spc="-1" strike="noStrike">
+                <a:solidFill>
+                  <a:srgbClr val="000000"/>
+                </a:solidFill>
+                <a:latin typeface="Arial"/>
+              </a:rPr>
+              <a:t>Click to edit the outline text format</a:t>
+            </a:r>
+            <a:endParaRPr b="0" lang="en-US" sz="3200" spc="-1" strike="noStrike">
+              <a:solidFill>
+                <a:srgbClr val="000000"/>
+              </a:solidFill>
+              <a:latin typeface="Arial"/>
+            </a:endParaRPr>
+          </a:p>
+          <a:p>
+            <a:pPr lvl="1" marL="864000" indent="-324000">
+              <a:spcBef>
+                <a:spcPts val="1134"/>
+              </a:spcBef>
+              <a:buClr>
+                <a:srgbClr val="000000"/>
+              </a:buClr>
+              <a:buSzPct val="75000"/>
+              <a:buFont typeface="Symbol" charset="2"/>
+              <a:buChar char=""/>
+            </a:pPr>
+            <a:r>
+              <a:rPr b="0" lang="en-US" sz="2800" spc="-1" strike="noStrike">
+                <a:solidFill>
+                  <a:srgbClr val="000000"/>
+                </a:solidFill>
+                <a:latin typeface="Arial"/>
+              </a:rPr>
+              <a:t>Second Outline Level</a:t>
+            </a:r>
+            <a:endParaRPr b="0" lang="en-US" sz="2800" spc="-1" strike="noStrike">
+              <a:solidFill>
+                <a:srgbClr val="000000"/>
+              </a:solidFill>
+              <a:latin typeface="Arial"/>
+            </a:endParaRPr>
+          </a:p>
+          <a:p>
+            <a:pPr lvl="2" marL="1296000" indent="-288000">
+              <a:spcBef>
+                <a:spcPts val="850"/>
+              </a:spcBef>
+              <a:buClr>
+                <a:srgbClr val="000000"/>
+              </a:buClr>
+              <a:buSzPct val="45000"/>
+              <a:buFont typeface="Wingdings" charset="2"/>
+              <a:buChar char=""/>
+            </a:pPr>
+            <a:r>
+              <a:rPr b="0" lang="en-US" sz="2400" spc="-1" strike="noStrike">
+                <a:solidFill>
+                  <a:srgbClr val="000000"/>
+                </a:solidFill>
+                <a:latin typeface="Arial"/>
+              </a:rPr>
+              <a:t>Third Outline Level</a:t>
+            </a:r>
+            <a:endParaRPr b="0" lang="en-US" sz="2400" spc="-1" strike="noStrike">
+              <a:solidFill>
+                <a:srgbClr val="000000"/>
+              </a:solidFill>
+              <a:latin typeface="Arial"/>
+            </a:endParaRPr>
+          </a:p>
+          <a:p>
+            <a:pPr lvl="3" marL="1728000" indent="-216000">
+              <a:spcBef>
+                <a:spcPts val="567"/>
+              </a:spcBef>
+              <a:buClr>
+                <a:srgbClr val="000000"/>
+              </a:buClr>
+              <a:buSzPct val="75000"/>
+              <a:buFont typeface="Symbol" charset="2"/>
+              <a:buChar char=""/>
+            </a:pPr>
+            <a:r>
+              <a:rPr b="0" lang="en-US" sz="2000" spc="-1" strike="noStrike">
+                <a:solidFill>
+                  <a:srgbClr val="000000"/>
+                </a:solidFill>
+                <a:latin typeface="Arial"/>
+              </a:rPr>
+              <a:t>Fourth Outline Level</a:t>
+            </a:r>
+            <a:endParaRPr b="0" lang="en-US" sz="2000" spc="-1" strike="noStrike">
+              <a:solidFill>
+                <a:srgbClr val="000000"/>
+              </a:solidFill>
+              <a:latin typeface="Arial"/>
+            </a:endParaRPr>
+          </a:p>
+          <a:p>
+            <a:pPr lvl="4" marL="2160000" indent="-216000">
+              <a:spcBef>
+                <a:spcPts val="283"/>
+              </a:spcBef>
+              <a:buClr>
+                <a:srgbClr val="000000"/>
+              </a:buClr>
+              <a:buSzPct val="45000"/>
+              <a:buFont typeface="Wingdings" charset="2"/>
+              <a:buChar char=""/>
+            </a:pPr>
+            <a:r>
+              <a:rPr b="0" lang="en-US" sz="2000" spc="-1" strike="noStrike">
+                <a:solidFill>
+                  <a:srgbClr val="000000"/>
+                </a:solidFill>
+                <a:latin typeface="Arial"/>
+              </a:rPr>
+              <a:t>Fifth Outline Level</a:t>
+            </a:r>
+            <a:endParaRPr b="0" lang="en-US" sz="2000" spc="-1" strike="noStrike">
+              <a:solidFill>
+                <a:srgbClr val="000000"/>
+              </a:solidFill>
+              <a:latin typeface="Arial"/>
+            </a:endParaRPr>
+          </a:p>
+          <a:p>
+            <a:pPr lvl="5" marL="2592000" indent="-216000">
+              <a:spcBef>
+                <a:spcPts val="283"/>
+              </a:spcBef>
+              <a:buClr>
+                <a:srgbClr val="000000"/>
+              </a:buClr>
+              <a:buSzPct val="45000"/>
+              <a:buFont typeface="Wingdings" charset="2"/>
+              <a:buChar char=""/>
+            </a:pPr>
+            <a:r>
+              <a:rPr b="0" lang="en-US" sz="2000" spc="-1" strike="noStrike">
+                <a:solidFill>
+                  <a:srgbClr val="000000"/>
+                </a:solidFill>
+                <a:latin typeface="Arial"/>
+              </a:rPr>
+              <a:t>Sixth Outline Level</a:t>
+            </a:r>
+            <a:endParaRPr b="0" lang="en-US" sz="2000" spc="-1" strike="noStrike">
+              <a:solidFill>
+                <a:srgbClr val="000000"/>
+              </a:solidFill>
+              <a:latin typeface="Arial"/>
+            </a:endParaRPr>
+          </a:p>
+          <a:p>
+            <a:pPr lvl="6" marL="3024000" indent="-216000">
+              <a:spcBef>
+                <a:spcPts val="283"/>
+              </a:spcBef>
+              <a:buClr>
+                <a:srgbClr val="000000"/>
+              </a:buClr>
+              <a:buSzPct val="45000"/>
+              <a:buFont typeface="Wingdings" charset="2"/>
+              <a:buChar char=""/>
+            </a:pPr>
+            <a:r>
+              <a:rPr b="0" lang="en-US" sz="2000" spc="-1" strike="noStrike">
+                <a:solidFill>
+                  <a:srgbClr val="000000"/>
+                </a:solidFill>
+                <a:latin typeface="Arial"/>
+              </a:rPr>
+              <a:t>Seventh Outline Level</a:t>
+            </a:r>
+            <a:endParaRPr b="0" lang="en-US" sz="2000" spc="-1" strike="noStrike">
+              <a:solidFill>
+                <a:srgbClr val="000000"/>
+              </a:solidFill>
+              <a:latin typeface="Arial"/>
             </a:endParaRPr>
           </a:p>
         </p:txBody>
@@ -6086,7 +7973,7 @@
       </p:grpSpPr>
       <p:pic>
         <p:nvPicPr>
-          <p:cNvPr id="72" name="New picture" descr=""/>
+          <p:cNvPr id="81" name="New picture" descr=""/>
           <p:cNvPicPr/>
           <p:nvPr/>
         </p:nvPicPr>
@@ -6096,8 +7983,8 @@
         </p:blipFill>
         <p:spPr>
           <a:xfrm rot="16200000">
-            <a:off x="-11070360" y="16463160"/>
-            <a:ext cx="14270760" cy="3933000"/>
+            <a:off x="-11070000" y="16463520"/>
+            <a:ext cx="14270400" cy="3932640"/>
           </a:xfrm>
           <a:prstGeom prst="rect">
             <a:avLst/>
@@ -6109,7 +7996,7 @@
       </p:pic>
       <p:pic>
         <p:nvPicPr>
-          <p:cNvPr id="73" name="New picture" descr=""/>
+          <p:cNvPr id="82" name="New picture" descr=""/>
           <p:cNvPicPr/>
           <p:nvPr/>
         </p:nvPicPr>
@@ -6119,8 +8006,8 @@
         </p:blipFill>
         <p:spPr>
           <a:xfrm rot="5400000">
-            <a:off x="40694760" y="16459200"/>
-            <a:ext cx="14270760" cy="3933000"/>
+            <a:off x="40695120" y="16459200"/>
+            <a:ext cx="14270400" cy="3932640"/>
           </a:xfrm>
           <a:prstGeom prst="rect">
             <a:avLst/>
@@ -6132,7 +8019,7 @@
       </p:pic>
       <p:pic>
         <p:nvPicPr>
-          <p:cNvPr id="74" name="New picture" descr=""/>
+          <p:cNvPr id="83" name="New picture" descr=""/>
           <p:cNvPicPr/>
           <p:nvPr/>
         </p:nvPicPr>
@@ -6143,7 +8030,7 @@
         <p:spPr>
           <a:xfrm>
             <a:off x="6946920" y="33426360"/>
-            <a:ext cx="29993400" cy="1443960"/>
+            <a:ext cx="29993040" cy="1443600"/>
           </a:xfrm>
           <a:prstGeom prst="rect">
             <a:avLst/>
@@ -6155,14 +8042,14 @@
       </p:pic>
       <p:sp>
         <p:nvSpPr>
-          <p:cNvPr id="75" name="New shape"/>
+          <p:cNvPr id="84" name="New shape"/>
           <p:cNvSpPr/>
           <p:nvPr/>
         </p:nvSpPr>
         <p:spPr>
           <a:xfrm>
             <a:off x="6946920" y="33998040"/>
-            <a:ext cx="21941640" cy="1266120"/>
+            <a:ext cx="21941280" cy="1265760"/>
           </a:xfrm>
           <a:prstGeom prst="rect">
             <a:avLst/>
@@ -6217,7 +8104,7 @@
       </p:sp>
       <p:sp>
         <p:nvSpPr>
-          <p:cNvPr id="76" name="PlaceHolder 1"/>
+          <p:cNvPr id="85" name="PlaceHolder 1"/>
           <p:cNvSpPr>
             <a:spLocks noGrp="1"/>
           </p:cNvSpPr>
@@ -6228,7 +8115,7 @@
         <p:spPr>
           <a:xfrm>
             <a:off x="14994360" y="29977560"/>
-            <a:ext cx="13898160" cy="2282040"/>
+            <a:ext cx="13897800" cy="2281680"/>
           </a:xfrm>
           <a:prstGeom prst="rect">
             <a:avLst/>
@@ -6289,7 +8176,7 @@
       </p:sp>
       <p:sp>
         <p:nvSpPr>
-          <p:cNvPr id="77" name="PlaceHolder 2"/>
+          <p:cNvPr id="86" name="PlaceHolder 2"/>
           <p:cNvSpPr>
             <a:spLocks noGrp="1"/>
           </p:cNvSpPr>
@@ -6300,7 +8187,7 @@
         <p:spPr>
           <a:xfrm>
             <a:off x="31453560" y="29977560"/>
-            <a:ext cx="10240560" cy="2282040"/>
+            <a:ext cx="10240200" cy="2281680"/>
           </a:xfrm>
           <a:prstGeom prst="rect">
             <a:avLst/>
@@ -6342,7 +8229,7 @@
                 <a:tab algn="l" pos="0"/>
               </a:tabLst>
             </a:pPr>
-            <a:fld id="{CB4C2D23-67C0-42F7-840D-8E7EABAF7445}" type="slidenum">
+            <a:fld id="{F405CBAE-A13B-44B5-A624-B2D381C0E190}" type="slidenum">
               <a:rPr b="0" lang="en-US" sz="5030" spc="-1" strike="noStrike">
                 <a:solidFill>
                   <a:schemeClr val="dk1"/>
@@ -6363,7 +8250,7 @@
       </p:sp>
       <p:sp>
         <p:nvSpPr>
-          <p:cNvPr id="78" name="PlaceHolder 3"/>
+          <p:cNvPr id="87" name="PlaceHolder 3"/>
           <p:cNvSpPr>
             <a:spLocks noGrp="1"/>
           </p:cNvSpPr>
@@ -6374,7 +8261,7 @@
         <p:spPr>
           <a:xfrm>
             <a:off x="2192760" y="29977560"/>
-            <a:ext cx="10240560" cy="2282040"/>
+            <a:ext cx="10240200" cy="2281680"/>
           </a:xfrm>
           <a:prstGeom prst="rect">
             <a:avLst/>
@@ -6417,6 +8304,280 @@
                 <a:srgbClr val="000000"/>
               </a:solidFill>
               <a:latin typeface="Times New Roman"/>
+            </a:endParaRPr>
+          </a:p>
+        </p:txBody>
+      </p:sp>
+      <p:sp>
+        <p:nvSpPr>
+          <p:cNvPr id="88" name="PlaceHolder 4"/>
+          <p:cNvSpPr>
+            <a:spLocks noGrp="1"/>
+          </p:cNvSpPr>
+          <p:nvPr>
+            <p:ph type="title"/>
+          </p:nvPr>
+        </p:nvSpPr>
+        <p:spPr>
+          <a:xfrm>
+            <a:off x="2194560" y="1313280"/>
+            <a:ext cx="39501720" cy="5496840"/>
+          </a:xfrm>
+          <a:prstGeom prst="rect">
+            <a:avLst/>
+          </a:prstGeom>
+          <a:noFill/>
+          <a:ln w="0">
+            <a:noFill/>
+          </a:ln>
+        </p:spPr>
+        <p:txBody>
+          <a:bodyPr lIns="0" rIns="0" tIns="0" bIns="0" anchor="ctr">
+            <a:noAutofit/>
+          </a:bodyPr>
+          <a:p>
+            <a:pPr indent="0" algn="ctr">
+              <a:buNone/>
+            </a:pPr>
+            <a:r>
+              <a:rPr b="0" lang="en-US" sz="4400" spc="-1" strike="noStrike">
+                <a:solidFill>
+                  <a:srgbClr val="000000"/>
+                </a:solidFill>
+                <a:latin typeface="Arial"/>
+              </a:rPr>
+              <a:t>Click to edit the title text format</a:t>
+            </a:r>
+            <a:endParaRPr b="0" lang="en-US" sz="4400" spc="-1" strike="noStrike">
+              <a:solidFill>
+                <a:srgbClr val="000000"/>
+              </a:solidFill>
+              <a:latin typeface="Arial"/>
+            </a:endParaRPr>
+          </a:p>
+        </p:txBody>
+      </p:sp>
+      <p:sp>
+        <p:nvSpPr>
+          <p:cNvPr id="89" name="PlaceHolder 5"/>
+          <p:cNvSpPr>
+            <a:spLocks noGrp="1"/>
+          </p:cNvSpPr>
+          <p:nvPr>
+            <p:ph type="body"/>
+          </p:nvPr>
+        </p:nvSpPr>
+        <p:spPr>
+          <a:xfrm>
+            <a:off x="2194560" y="7702560"/>
+            <a:ext cx="39501720" cy="19092240"/>
+          </a:xfrm>
+          <a:prstGeom prst="rect">
+            <a:avLst/>
+          </a:prstGeom>
+          <a:noFill/>
+          <a:ln w="0">
+            <a:noFill/>
+          </a:ln>
+        </p:spPr>
+        <p:txBody>
+          <a:bodyPr lIns="0" rIns="0" tIns="0" bIns="0" anchor="t">
+            <a:normAutofit/>
+          </a:bodyPr>
+          <a:p>
+            <a:pPr marL="432000" indent="-324000">
+              <a:spcBef>
+                <a:spcPts val="1417"/>
+              </a:spcBef>
+              <a:buClr>
+                <a:srgbClr val="000000"/>
+              </a:buClr>
+              <a:buSzPct val="45000"/>
+              <a:buFont typeface="Wingdings" charset="2"/>
+              <a:buChar char=""/>
+            </a:pPr>
+            <a:r>
+              <a:rPr b="0" lang="en-US" sz="3200" spc="-1" strike="noStrike">
+                <a:solidFill>
+                  <a:srgbClr val="000000"/>
+                </a:solidFill>
+                <a:latin typeface="Arial"/>
+              </a:rPr>
+              <a:t>Click to edit the outline text format</a:t>
+            </a:r>
+            <a:endParaRPr b="0" lang="en-US" sz="3200" spc="-1" strike="noStrike">
+              <a:solidFill>
+                <a:srgbClr val="000000"/>
+              </a:solidFill>
+              <a:latin typeface="Arial"/>
+            </a:endParaRPr>
+          </a:p>
+          <a:p>
+            <a:pPr lvl="1" marL="864000" indent="-324000">
+              <a:spcBef>
+                <a:spcPts val="1134"/>
+              </a:spcBef>
+              <a:buClr>
+                <a:srgbClr val="000000"/>
+              </a:buClr>
+              <a:buSzPct val="75000"/>
+              <a:buFont typeface="Symbol" charset="2"/>
+              <a:buChar char=""/>
+            </a:pPr>
+            <a:r>
+              <a:rPr b="0" lang="en-US" sz="2800" spc="-1" strike="noStrike">
+                <a:solidFill>
+                  <a:srgbClr val="000000"/>
+                </a:solidFill>
+                <a:latin typeface="Arial"/>
+              </a:rPr>
+              <a:t>Second Outline Level</a:t>
+            </a:r>
+            <a:endParaRPr b="0" lang="en-US" sz="2800" spc="-1" strike="noStrike">
+              <a:solidFill>
+                <a:srgbClr val="000000"/>
+              </a:solidFill>
+              <a:latin typeface="Arial"/>
+            </a:endParaRPr>
+          </a:p>
+          <a:p>
+            <a:pPr lvl="2" marL="1296000" indent="-288000">
+              <a:spcBef>
+                <a:spcPts val="850"/>
+              </a:spcBef>
+              <a:buClr>
+                <a:srgbClr val="000000"/>
+              </a:buClr>
+              <a:buSzPct val="45000"/>
+              <a:buFont typeface="Wingdings" charset="2"/>
+              <a:buChar char=""/>
+            </a:pPr>
+            <a:r>
+              <a:rPr b="0" lang="en-US" sz="2400" spc="-1" strike="noStrike">
+                <a:solidFill>
+                  <a:srgbClr val="000000"/>
+                </a:solidFill>
+                <a:latin typeface="Arial"/>
+              </a:rPr>
+              <a:t>Third Outline Level</a:t>
+            </a:r>
+            <a:endParaRPr b="0" lang="en-US" sz="2400" spc="-1" strike="noStrike">
+              <a:solidFill>
+                <a:srgbClr val="000000"/>
+              </a:solidFill>
+              <a:latin typeface="Arial"/>
+            </a:endParaRPr>
+          </a:p>
+          <a:p>
+            <a:pPr lvl="3" marL="1728000" indent="-216000">
+              <a:spcBef>
+                <a:spcPts val="567"/>
+              </a:spcBef>
+              <a:buClr>
+                <a:srgbClr val="000000"/>
+              </a:buClr>
+              <a:buSzPct val="75000"/>
+              <a:buFont typeface="Symbol" charset="2"/>
+              <a:buChar char=""/>
+            </a:pPr>
+            <a:r>
+              <a:rPr b="0" lang="en-US" sz="2000" spc="-1" strike="noStrike">
+                <a:solidFill>
+                  <a:srgbClr val="000000"/>
+                </a:solidFill>
+                <a:latin typeface="Arial"/>
+              </a:rPr>
+              <a:t>Fourth Outline Level</a:t>
+            </a:r>
+            <a:endParaRPr b="0" lang="en-US" sz="2000" spc="-1" strike="noStrike">
+              <a:solidFill>
+                <a:srgbClr val="000000"/>
+              </a:solidFill>
+              <a:latin typeface="Arial"/>
+            </a:endParaRPr>
+          </a:p>
+          <a:p>
+            <a:pPr lvl="4" marL="2160000" indent="-216000">
+              <a:spcBef>
+                <a:spcPts val="283"/>
+              </a:spcBef>
+              <a:buClr>
+                <a:srgbClr val="000000"/>
+              </a:buClr>
+              <a:buSzPct val="45000"/>
+              <a:buFont typeface="Wingdings" charset="2"/>
+              <a:buChar char=""/>
+            </a:pPr>
+            <a:r>
+              <a:rPr b="0" lang="en-US" sz="2000" spc="-1" strike="noStrike">
+                <a:solidFill>
+                  <a:srgbClr val="000000"/>
+                </a:solidFill>
+                <a:latin typeface="Arial"/>
+              </a:rPr>
+              <a:t>Fifth Outline Level</a:t>
+            </a:r>
+            <a:endParaRPr b="0" lang="en-US" sz="2000" spc="-1" strike="noStrike">
+              <a:solidFill>
+                <a:srgbClr val="000000"/>
+              </a:solidFill>
+              <a:latin typeface="Arial"/>
+            </a:endParaRPr>
+          </a:p>
+          <a:p>
+            <a:pPr lvl="5" marL="2592000" indent="-216000">
+              <a:spcBef>
+                <a:spcPts val="283"/>
+              </a:spcBef>
+              <a:buClr>
+                <a:srgbClr val="000000"/>
+              </a:buClr>
+              <a:buSzPct val="45000"/>
+              <a:buFont typeface="Wingdings" charset="2"/>
+              <a:buChar char=""/>
+            </a:pPr>
+            <a:r>
+              <a:rPr b="0" lang="en-US" sz="2000" spc="-1" strike="noStrike">
+                <a:solidFill>
+                  <a:srgbClr val="000000"/>
+                </a:solidFill>
+                <a:latin typeface="Arial"/>
+              </a:rPr>
+              <a:t>Sixth Outline Level</a:t>
+            </a:r>
+            <a:endParaRPr b="0" lang="en-US" sz="2000" spc="-1" strike="noStrike">
+              <a:solidFill>
+                <a:srgbClr val="000000"/>
+              </a:solidFill>
+              <a:latin typeface="Arial"/>
+            </a:endParaRPr>
+          </a:p>
+          <a:p>
+            <a:pPr lvl="6" marL="3024000" indent="-216000">
+              <a:spcBef>
+                <a:spcPts val="283"/>
+              </a:spcBef>
+              <a:buClr>
+                <a:srgbClr val="000000"/>
+              </a:buClr>
+              <a:buSzPct val="45000"/>
+              <a:buFont typeface="Wingdings" charset="2"/>
+              <a:buChar char=""/>
+            </a:pPr>
+            <a:r>
+              <a:rPr b="0" lang="en-US" sz="2000" spc="-1" strike="noStrike">
+                <a:solidFill>
+                  <a:srgbClr val="000000"/>
+                </a:solidFill>
+                <a:latin typeface="Arial"/>
+              </a:rPr>
+              <a:t>Seventh Outline Level</a:t>
+            </a:r>
+            <a:endParaRPr b="0" lang="en-US" sz="2000" spc="-1" strike="noStrike">
+              <a:solidFill>
+                <a:srgbClr val="000000"/>
+              </a:solidFill>
+              <a:latin typeface="Arial"/>
             </a:endParaRPr>
           </a:p>
         </p:txBody>
@@ -6433,6 +8594,13 @@
 <file path=ppt/slides/slide1.xml><?xml version="1.0" encoding="utf-8"?>
 <p:sld xmlns:a="http://schemas.openxmlformats.org/drawingml/2006/main" xmlns:p="http://schemas.openxmlformats.org/presentationml/2006/main" xmlns:r="http://schemas.openxmlformats.org/officeDocument/2006/relationships" xmlns:p14="http://schemas.microsoft.com/office/powerpoint/2010/main" xmlns:p15="http://schemas.microsoft.com/office/powerpoint/2012/main" xmlns:mc="http://schemas.openxmlformats.org/markup-compatibility/2006">
   <p:cSld>
+    <p:bg>
+      <p:bgPr>
+        <a:solidFill>
+          <a:schemeClr val="lt1"/>
+        </a:solidFill>
+      </p:bgPr>
+    </p:bg>
     <p:spTree>
       <p:nvGrpSpPr>
         <p:cNvPr id="1" name=""/>
@@ -6449,14 +8617,14 @@
       </p:grpSpPr>
       <p:sp>
         <p:nvSpPr>
-          <p:cNvPr id="93" name=""/>
+          <p:cNvPr id="108" name=""/>
           <p:cNvSpPr/>
           <p:nvPr/>
         </p:nvSpPr>
         <p:spPr>
           <a:xfrm>
             <a:off x="33147000" y="16651800"/>
-            <a:ext cx="10122480" cy="14895000"/>
+            <a:ext cx="10122120" cy="14182920"/>
           </a:xfrm>
           <a:prstGeom prst="rect">
             <a:avLst/>
@@ -6499,14 +8667,14 @@
       </p:sp>
       <p:sp>
         <p:nvSpPr>
-          <p:cNvPr id="94" name=""/>
+          <p:cNvPr id="109" name=""/>
           <p:cNvSpPr/>
           <p:nvPr/>
         </p:nvSpPr>
         <p:spPr>
           <a:xfrm>
             <a:off x="22174200" y="5558400"/>
-            <a:ext cx="10513080" cy="25985880"/>
+            <a:ext cx="10512720" cy="25302600"/>
           </a:xfrm>
           <a:prstGeom prst="rect">
             <a:avLst/>
@@ -6549,14 +8717,14 @@
       </p:sp>
       <p:sp>
         <p:nvSpPr>
-          <p:cNvPr id="95" name=""/>
+          <p:cNvPr id="110" name=""/>
           <p:cNvSpPr/>
           <p:nvPr/>
         </p:nvSpPr>
         <p:spPr>
           <a:xfrm>
             <a:off x="33147000" y="6413400"/>
-            <a:ext cx="10122480" cy="10199880"/>
+            <a:ext cx="10122120" cy="10199520"/>
           </a:xfrm>
           <a:prstGeom prst="rect">
             <a:avLst/>
@@ -6599,14 +8767,14 @@
       </p:sp>
       <p:sp>
         <p:nvSpPr>
-          <p:cNvPr id="96" name=""/>
+          <p:cNvPr id="111" name=""/>
           <p:cNvSpPr/>
           <p:nvPr/>
         </p:nvSpPr>
         <p:spPr>
           <a:xfrm>
             <a:off x="11201400" y="5558400"/>
-            <a:ext cx="10513080" cy="25985880"/>
+            <a:ext cx="10512720" cy="25302600"/>
           </a:xfrm>
           <a:prstGeom prst="rect">
             <a:avLst/>
@@ -6649,14 +8817,14 @@
       </p:sp>
       <p:sp>
         <p:nvSpPr>
-          <p:cNvPr id="97" name=""/>
+          <p:cNvPr id="112" name=""/>
           <p:cNvSpPr/>
           <p:nvPr/>
         </p:nvSpPr>
         <p:spPr>
           <a:xfrm>
             <a:off x="577800" y="5558400"/>
-            <a:ext cx="10163880" cy="11584080"/>
+            <a:ext cx="10163520" cy="11583720"/>
           </a:xfrm>
           <a:prstGeom prst="rect">
             <a:avLst/>
@@ -6699,14 +8867,14 @@
       </p:sp>
       <p:sp>
         <p:nvSpPr>
-          <p:cNvPr id="98" name="Rectangle 6"/>
+          <p:cNvPr id="113" name="Rectangle 6"/>
           <p:cNvSpPr/>
           <p:nvPr/>
         </p:nvSpPr>
         <p:spPr>
           <a:xfrm>
             <a:off x="0" y="3240"/>
-            <a:ext cx="43887240" cy="5250960"/>
+            <a:ext cx="43886880" cy="5250600"/>
           </a:xfrm>
           <a:prstGeom prst="rect">
             <a:avLst/>
@@ -6746,14 +8914,14 @@
       </p:sp>
       <p:sp>
         <p:nvSpPr>
-          <p:cNvPr id="99" name="TextBox 19"/>
+          <p:cNvPr id="114" name="TextBox 19"/>
           <p:cNvSpPr/>
           <p:nvPr/>
         </p:nvSpPr>
         <p:spPr>
           <a:xfrm>
             <a:off x="609480" y="6666480"/>
-            <a:ext cx="10132200" cy="10185120"/>
+            <a:ext cx="10131840" cy="10185120"/>
           </a:xfrm>
           <a:prstGeom prst="rect">
             <a:avLst/>
@@ -6938,7 +9106,7 @@
                 <a:latin typeface="Open Sans"/>
                 <a:ea typeface="Open Sans"/>
               </a:rPr>
-              <a:t>This work proposes the use of LLMs for quantum circuit generation in hopes to better utilize complex quantum modeling techniques.</a:t>
+              <a:t>This work proposes a framework for quantum circuit generation in hopes to better utilize complex quantum modeling techniques on real quantum hardware.</a:t>
             </a:r>
             <a:endParaRPr b="0" lang="en-US" sz="4000" spc="-1" strike="noStrike">
               <a:solidFill>
@@ -6951,14 +9119,14 @@
       </p:sp>
       <p:sp>
         <p:nvSpPr>
-          <p:cNvPr id="100" name="Text Placeholder 5"/>
+          <p:cNvPr id="115" name="Text Placeholder 5"/>
           <p:cNvSpPr/>
           <p:nvPr/>
         </p:nvSpPr>
         <p:spPr>
           <a:xfrm>
             <a:off x="7543800" y="410400"/>
-            <a:ext cx="28800000" cy="2933640"/>
+            <a:ext cx="28799640" cy="2933280"/>
           </a:xfrm>
           <a:prstGeom prst="rect">
             <a:avLst/>
@@ -7011,14 +9179,14 @@
       </p:sp>
       <p:sp>
         <p:nvSpPr>
-          <p:cNvPr id="101" name="Text Placeholder 5"/>
+          <p:cNvPr id="116" name="Text Placeholder 5"/>
           <p:cNvSpPr/>
           <p:nvPr/>
         </p:nvSpPr>
         <p:spPr>
           <a:xfrm>
             <a:off x="1175040" y="3321000"/>
-            <a:ext cx="36572040" cy="2600640"/>
+            <a:ext cx="36571680" cy="2600640"/>
           </a:xfrm>
           <a:prstGeom prst="rect">
             <a:avLst/>
@@ -7129,14 +9297,14 @@
       </p:sp>
       <p:sp>
         <p:nvSpPr>
-          <p:cNvPr id="102" name="TextBox 19"/>
+          <p:cNvPr id="117" name="TextBox 19"/>
           <p:cNvSpPr/>
           <p:nvPr/>
         </p:nvSpPr>
         <p:spPr>
           <a:xfrm>
             <a:off x="11417040" y="6666480"/>
-            <a:ext cx="10071360" cy="15173640"/>
+            <a:ext cx="10071000" cy="14571000"/>
           </a:xfrm>
           <a:prstGeom prst="rect">
             <a:avLst/>
@@ -7488,19 +9656,6 @@
                 <a:spcPct val="110000"/>
               </a:lnSpc>
             </a:pPr>
-            <a:endParaRPr b="0" lang="en-US" sz="3600" spc="-1" strike="noStrike">
-              <a:solidFill>
-                <a:srgbClr val="000000"/>
-              </a:solidFill>
-              <a:latin typeface="Arial"/>
-            </a:endParaRPr>
-          </a:p>
-          <a:p>
-            <a:pPr algn="just">
-              <a:lnSpc>
-                <a:spcPct val="110000"/>
-              </a:lnSpc>
-            </a:pPr>
             <a:r>
               <a:rPr b="0" lang="en-US" sz="3600" spc="-1" strike="noStrike">
                 <a:solidFill>
@@ -7522,14 +9677,14 @@
       </p:sp>
       <p:sp>
         <p:nvSpPr>
-          <p:cNvPr id="103" name="TextBox 19"/>
+          <p:cNvPr id="118" name="TextBox 19"/>
           <p:cNvSpPr/>
           <p:nvPr/>
         </p:nvSpPr>
         <p:spPr>
           <a:xfrm>
             <a:off x="22368960" y="6666480"/>
-            <a:ext cx="10128240" cy="22548600"/>
+            <a:ext cx="10127880" cy="23223960"/>
           </a:xfrm>
           <a:prstGeom prst="rect">
             <a:avLst/>
@@ -7916,7 +10071,7 @@
             </a:endParaRPr>
           </a:p>
           <a:p>
-            <a:pPr lvl="1" marL="432000" indent="-216000" algn="just">
+            <a:pPr algn="just">
               <a:lnSpc>
                 <a:spcPct val="110000"/>
               </a:lnSpc>
@@ -7926,12 +10081,6 @@
               <a:spcAft>
                 <a:spcPts val="283"/>
               </a:spcAft>
-              <a:buClr>
-                <a:srgbClr val="000000"/>
-              </a:buClr>
-              <a:buSzPct val="45000"/>
-              <a:buFont typeface="Wingdings" charset="2"/>
-              <a:buChar char=""/>
             </a:pPr>
             <a:endParaRPr b="0" lang="en-US" sz="3600" spc="-1" strike="noStrike">
               <a:solidFill>
@@ -7952,16 +10101,6 @@
                 <a:spcPts val="283"/>
               </a:spcAft>
             </a:pPr>
-            <a:r>
-              <a:rPr b="0" lang="en-US" sz="3600" spc="-1" strike="noStrike">
-                <a:solidFill>
-                  <a:schemeClr val="dk1"/>
-                </a:solidFill>
-                <a:latin typeface="Open Sans"/>
-                <a:ea typeface="Open Sans"/>
-              </a:rPr>
-              <a:t>Ideal for hybrid quantum-classical procesing and HPC applications.</a:t>
-            </a:r>
             <a:endParaRPr b="0" lang="en-US" sz="3600" spc="-1" strike="noStrike">
               <a:solidFill>
                 <a:srgbClr val="000000"/>
@@ -7981,6 +10120,16 @@
                 <a:spcPts val="283"/>
               </a:spcAft>
             </a:pPr>
+            <a:r>
+              <a:rPr b="0" lang="en-US" sz="3600" spc="-1" strike="noStrike">
+                <a:solidFill>
+                  <a:schemeClr val="dk1"/>
+                </a:solidFill>
+                <a:latin typeface="Open Sans"/>
+                <a:ea typeface="Open Sans"/>
+              </a:rPr>
+              <a:t>Ideal for hybrid quantum-classical processing and HPC applications.</a:t>
+            </a:r>
             <a:endParaRPr b="0" lang="en-US" sz="3600" spc="-1" strike="noStrike">
               <a:solidFill>
                 <a:srgbClr val="000000"/>
@@ -8190,6 +10339,25 @@
                 <a:spcPts val="283"/>
               </a:spcAft>
             </a:pPr>
+            <a:endParaRPr b="0" lang="en-US" sz="3600" spc="-1" strike="noStrike">
+              <a:solidFill>
+                <a:srgbClr val="000000"/>
+              </a:solidFill>
+              <a:latin typeface="Arial"/>
+            </a:endParaRPr>
+          </a:p>
+          <a:p>
+            <a:pPr algn="just">
+              <a:lnSpc>
+                <a:spcPct val="110000"/>
+              </a:lnSpc>
+              <a:spcBef>
+                <a:spcPts val="283"/>
+              </a:spcBef>
+              <a:spcAft>
+                <a:spcPts val="283"/>
+              </a:spcAft>
+            </a:pPr>
             <a:r>
               <a:rPr b="0" lang="en-US" sz="3600" spc="-1" strike="noStrike">
                 <a:solidFill>
@@ -8198,7 +10366,7 @@
                 <a:latin typeface="Open Sans"/>
                 <a:ea typeface="Open Sans"/>
               </a:rPr>
-              <a:t>By placing CUDA-Q at the center of this framework indicates the full utilization of hardware acceleration at every step.</a:t>
+              <a:t>Placing CUDA-Q at the center of this framework indicates the full utilization of hardware acceleration at every step.</a:t>
             </a:r>
             <a:endParaRPr b="0" lang="en-US" sz="3600" spc="-1" strike="noStrike">
               <a:solidFill>
@@ -8211,14 +10379,14 @@
       </p:sp>
       <p:sp>
         <p:nvSpPr>
-          <p:cNvPr id="104" name="TextBox 19"/>
+          <p:cNvPr id="119" name="TextBox 19"/>
           <p:cNvSpPr/>
           <p:nvPr/>
         </p:nvSpPr>
         <p:spPr>
           <a:xfrm>
             <a:off x="33256440" y="6746760"/>
-            <a:ext cx="9597240" cy="1187640"/>
+            <a:ext cx="9596880" cy="9571320"/>
           </a:xfrm>
           <a:prstGeom prst="rect">
             <a:avLst/>
@@ -8239,18 +10407,13 @@
             <a:spAutoFit/>
           </a:bodyPr>
           <a:p>
-            <a:pPr marL="216000" indent="-216000">
+            <a:pPr>
               <a:lnSpc>
                 <a:spcPct val="100000"/>
               </a:lnSpc>
               <a:spcBef>
                 <a:spcPts val="1417"/>
               </a:spcBef>
-              <a:buClr>
-                <a:srgbClr val="000000"/>
-              </a:buClr>
-              <a:buFont typeface="Symbol" charset="2"/>
-              <a:buChar char=""/>
               <a:tabLst>
                 <a:tab algn="l" pos="0"/>
               </a:tabLst>
@@ -8264,6 +10427,206 @@
                 <a:ea typeface="Open Sans"/>
               </a:rPr>
               <a:t>Quantum circuit generation with diffusion models resembles image generation.</a:t>
+            </a:r>
+            <a:endParaRPr b="0" lang="en-US" sz="3600" spc="-1" strike="noStrike">
+              <a:solidFill>
+                <a:srgbClr val="000000"/>
+              </a:solidFill>
+              <a:latin typeface="Arial"/>
+            </a:endParaRPr>
+          </a:p>
+          <a:p>
+            <a:pPr>
+              <a:lnSpc>
+                <a:spcPct val="100000"/>
+              </a:lnSpc>
+              <a:spcBef>
+                <a:spcPts val="1417"/>
+              </a:spcBef>
+              <a:tabLst>
+                <a:tab algn="l" pos="0"/>
+              </a:tabLst>
+            </a:pPr>
+            <a:endParaRPr b="0" lang="en-US" sz="3600" spc="-1" strike="noStrike">
+              <a:solidFill>
+                <a:srgbClr val="000000"/>
+              </a:solidFill>
+              <a:latin typeface="Arial"/>
+            </a:endParaRPr>
+          </a:p>
+          <a:p>
+            <a:pPr>
+              <a:lnSpc>
+                <a:spcPct val="100000"/>
+              </a:lnSpc>
+              <a:spcBef>
+                <a:spcPts val="1417"/>
+              </a:spcBef>
+              <a:tabLst>
+                <a:tab algn="l" pos="0"/>
+              </a:tabLst>
+            </a:pPr>
+            <a:endParaRPr b="0" lang="en-US" sz="3600" spc="-1" strike="noStrike">
+              <a:solidFill>
+                <a:srgbClr val="000000"/>
+              </a:solidFill>
+              <a:latin typeface="Arial"/>
+            </a:endParaRPr>
+          </a:p>
+          <a:p>
+            <a:pPr>
+              <a:lnSpc>
+                <a:spcPct val="100000"/>
+              </a:lnSpc>
+              <a:spcBef>
+                <a:spcPts val="1417"/>
+              </a:spcBef>
+              <a:tabLst>
+                <a:tab algn="l" pos="0"/>
+              </a:tabLst>
+            </a:pPr>
+            <a:endParaRPr b="0" lang="en-US" sz="3600" spc="-1" strike="noStrike">
+              <a:solidFill>
+                <a:srgbClr val="000000"/>
+              </a:solidFill>
+              <a:latin typeface="Arial"/>
+            </a:endParaRPr>
+          </a:p>
+          <a:p>
+            <a:pPr>
+              <a:lnSpc>
+                <a:spcPct val="100000"/>
+              </a:lnSpc>
+              <a:spcBef>
+                <a:spcPts val="1417"/>
+              </a:spcBef>
+              <a:tabLst>
+                <a:tab algn="l" pos="0"/>
+              </a:tabLst>
+            </a:pPr>
+            <a:endParaRPr b="0" lang="en-US" sz="3600" spc="-1" strike="noStrike">
+              <a:solidFill>
+                <a:srgbClr val="000000"/>
+              </a:solidFill>
+              <a:latin typeface="Arial"/>
+            </a:endParaRPr>
+          </a:p>
+          <a:p>
+            <a:pPr>
+              <a:lnSpc>
+                <a:spcPct val="100000"/>
+              </a:lnSpc>
+              <a:spcBef>
+                <a:spcPts val="1417"/>
+              </a:spcBef>
+              <a:tabLst>
+                <a:tab algn="l" pos="0"/>
+              </a:tabLst>
+            </a:pPr>
+            <a:endParaRPr b="0" lang="en-US" sz="3600" spc="-1" strike="noStrike">
+              <a:solidFill>
+                <a:srgbClr val="000000"/>
+              </a:solidFill>
+              <a:latin typeface="Arial"/>
+            </a:endParaRPr>
+          </a:p>
+          <a:p>
+            <a:pPr>
+              <a:lnSpc>
+                <a:spcPct val="100000"/>
+              </a:lnSpc>
+              <a:spcBef>
+                <a:spcPts val="1417"/>
+              </a:spcBef>
+              <a:tabLst>
+                <a:tab algn="l" pos="0"/>
+              </a:tabLst>
+            </a:pPr>
+            <a:endParaRPr b="0" lang="en-US" sz="3600" spc="-1" strike="noStrike">
+              <a:solidFill>
+                <a:srgbClr val="000000"/>
+              </a:solidFill>
+              <a:latin typeface="Arial"/>
+            </a:endParaRPr>
+          </a:p>
+          <a:p>
+            <a:pPr>
+              <a:lnSpc>
+                <a:spcPct val="100000"/>
+              </a:lnSpc>
+              <a:spcBef>
+                <a:spcPts val="1417"/>
+              </a:spcBef>
+              <a:tabLst>
+                <a:tab algn="l" pos="0"/>
+              </a:tabLst>
+            </a:pPr>
+            <a:endParaRPr b="0" lang="en-US" sz="3600" spc="-1" strike="noStrike">
+              <a:solidFill>
+                <a:srgbClr val="000000"/>
+              </a:solidFill>
+              <a:latin typeface="Arial"/>
+            </a:endParaRPr>
+          </a:p>
+          <a:p>
+            <a:pPr>
+              <a:lnSpc>
+                <a:spcPct val="100000"/>
+              </a:lnSpc>
+              <a:spcBef>
+                <a:spcPts val="1417"/>
+              </a:spcBef>
+              <a:tabLst>
+                <a:tab algn="l" pos="0"/>
+              </a:tabLst>
+            </a:pPr>
+            <a:endParaRPr b="0" lang="en-US" sz="3600" spc="-1" strike="noStrike">
+              <a:solidFill>
+                <a:srgbClr val="000000"/>
+              </a:solidFill>
+              <a:latin typeface="Arial"/>
+            </a:endParaRPr>
+          </a:p>
+          <a:p>
+            <a:pPr>
+              <a:lnSpc>
+                <a:spcPct val="100000"/>
+              </a:lnSpc>
+              <a:spcBef>
+                <a:spcPts val="1417"/>
+              </a:spcBef>
+              <a:tabLst>
+                <a:tab algn="l" pos="0"/>
+              </a:tabLst>
+            </a:pPr>
+            <a:endParaRPr b="0" lang="en-US" sz="3600" spc="-1" strike="noStrike">
+              <a:solidFill>
+                <a:srgbClr val="000000"/>
+              </a:solidFill>
+              <a:latin typeface="Arial"/>
+            </a:endParaRPr>
+          </a:p>
+          <a:p>
+            <a:pPr>
+              <a:lnSpc>
+                <a:spcPct val="100000"/>
+              </a:lnSpc>
+              <a:spcBef>
+                <a:spcPts val="1417"/>
+              </a:spcBef>
+              <a:tabLst>
+                <a:tab algn="l" pos="0"/>
+              </a:tabLst>
+            </a:pPr>
+            <a:r>
+              <a:rPr b="0" lang="en-US" sz="3600" spc="-1" strike="noStrike">
+                <a:solidFill>
+                  <a:schemeClr val="dk1"/>
+                </a:solidFill>
+                <a:latin typeface="Open Sans"/>
+                <a:ea typeface="Open Sans"/>
+              </a:rPr>
+              <a:t>We imagine quantum circuits as a flexible representation - enabling us to consider them as images, or a language.</a:t>
             </a:r>
             <a:endParaRPr b="0" lang="en-US" sz="3600" spc="-1" strike="noStrike">
               <a:solidFill>
@@ -8276,14 +10639,14 @@
       </p:sp>
       <p:sp>
         <p:nvSpPr>
-          <p:cNvPr id="105" name="TextBox 19"/>
+          <p:cNvPr id="120" name="TextBox 19"/>
           <p:cNvSpPr/>
           <p:nvPr/>
         </p:nvSpPr>
         <p:spPr>
           <a:xfrm>
             <a:off x="-4036320" y="9446400"/>
-            <a:ext cx="9597240" cy="6916320"/>
+            <a:ext cx="9596880" cy="6915960"/>
           </a:xfrm>
           <a:prstGeom prst="rect">
             <a:avLst/>
@@ -8324,14 +10687,14 @@
       </p:sp>
       <p:sp>
         <p:nvSpPr>
-          <p:cNvPr id="106" name="Rectangle 6"/>
+          <p:cNvPr id="121" name="Rectangle 6"/>
           <p:cNvSpPr/>
           <p:nvPr/>
         </p:nvSpPr>
         <p:spPr>
           <a:xfrm>
-            <a:off x="0" y="32004000"/>
-            <a:ext cx="43887240" cy="910440"/>
+            <a:off x="0" y="31318200"/>
+            <a:ext cx="43886880" cy="1595880"/>
           </a:xfrm>
           <a:prstGeom prst="rect">
             <a:avLst/>
@@ -8371,14 +10734,14 @@
       </p:sp>
       <p:sp>
         <p:nvSpPr>
-          <p:cNvPr id="107" name=""/>
+          <p:cNvPr id="122" name=""/>
           <p:cNvSpPr/>
           <p:nvPr/>
         </p:nvSpPr>
         <p:spPr>
           <a:xfrm>
             <a:off x="579960" y="5558400"/>
-            <a:ext cx="10131480" cy="839880"/>
+            <a:ext cx="10131120" cy="839520"/>
           </a:xfrm>
           <a:prstGeom prst="rect">
             <a:avLst/>
@@ -8429,14 +10792,14 @@
       </p:sp>
       <p:sp>
         <p:nvSpPr>
-          <p:cNvPr id="108" name=""/>
+          <p:cNvPr id="123" name=""/>
           <p:cNvSpPr/>
           <p:nvPr/>
         </p:nvSpPr>
         <p:spPr>
           <a:xfrm>
             <a:off x="11230920" y="5558400"/>
-            <a:ext cx="10483560" cy="839880"/>
+            <a:ext cx="10483200" cy="839520"/>
           </a:xfrm>
           <a:prstGeom prst="rect">
             <a:avLst/>
@@ -8487,14 +10850,14 @@
       </p:sp>
       <p:sp>
         <p:nvSpPr>
-          <p:cNvPr id="109" name=""/>
+          <p:cNvPr id="124" name=""/>
           <p:cNvSpPr/>
           <p:nvPr/>
         </p:nvSpPr>
         <p:spPr>
           <a:xfrm>
             <a:off x="33147000" y="5571000"/>
-            <a:ext cx="10125720" cy="839880"/>
+            <a:ext cx="10125360" cy="839520"/>
           </a:xfrm>
           <a:prstGeom prst="rect">
             <a:avLst/>
@@ -8545,14 +10908,14 @@
       </p:sp>
       <p:sp>
         <p:nvSpPr>
-          <p:cNvPr id="110" name=""/>
+          <p:cNvPr id="125" name=""/>
           <p:cNvSpPr/>
           <p:nvPr/>
         </p:nvSpPr>
         <p:spPr>
           <a:xfrm>
             <a:off x="22177440" y="5558400"/>
-            <a:ext cx="10515600" cy="839880"/>
+            <a:ext cx="10515240" cy="839520"/>
           </a:xfrm>
           <a:prstGeom prst="rect">
             <a:avLst/>
@@ -8603,14 +10966,14 @@
       </p:sp>
       <p:sp>
         <p:nvSpPr>
-          <p:cNvPr id="111" name=""/>
+          <p:cNvPr id="126" name=""/>
           <p:cNvSpPr/>
           <p:nvPr/>
         </p:nvSpPr>
         <p:spPr>
           <a:xfrm>
             <a:off x="33151320" y="16618320"/>
-            <a:ext cx="10122480" cy="834840"/>
+            <a:ext cx="10122120" cy="834480"/>
           </a:xfrm>
           <a:prstGeom prst="rect">
             <a:avLst/>
@@ -8659,39 +11022,16 @@
           </a:p>
         </p:txBody>
       </p:sp>
-      <p:pic>
-        <p:nvPicPr>
-          <p:cNvPr id="112" name="" descr=""/>
-          <p:cNvPicPr/>
-          <p:nvPr/>
-        </p:nvPicPr>
-        <p:blipFill>
-          <a:blip r:embed="rId1"/>
-          <a:stretch/>
-        </p:blipFill>
-        <p:spPr>
-          <a:xfrm>
-            <a:off x="196560" y="4114800"/>
-            <a:ext cx="6814800" cy="1170360"/>
-          </a:xfrm>
-          <a:prstGeom prst="rect">
-            <a:avLst/>
-          </a:prstGeom>
-          <a:ln w="0">
-            <a:noFill/>
-          </a:ln>
-        </p:spPr>
-      </p:pic>
       <p:sp>
         <p:nvSpPr>
-          <p:cNvPr id="113" name=""/>
+          <p:cNvPr id="127" name=""/>
           <p:cNvSpPr/>
           <p:nvPr/>
         </p:nvSpPr>
         <p:spPr>
           <a:xfrm>
             <a:off x="577800" y="17242200"/>
-            <a:ext cx="10163880" cy="14304240"/>
+            <a:ext cx="10163520" cy="13618800"/>
           </a:xfrm>
           <a:prstGeom prst="rect">
             <a:avLst/>
@@ -8765,7 +11105,7 @@
                 <a:latin typeface="Open Sans"/>
                 <a:ea typeface="Open Sans"/>
               </a:rPr>
-              <a:t>Quantum-inspired CFD Algorithms have shown to be atleast as efficient as classical Navier-Stokes simulations.</a:t>
+              <a:t>Quantum-inspired CFD Algorithms have shown to be at least as efficient as classical Navier-Stokes simulations.</a:t>
             </a:r>
             <a:endParaRPr b="0" lang="en-US" sz="3600" spc="-1" strike="noStrike">
               <a:solidFill>
@@ -8829,7 +11169,7 @@
                 <a:latin typeface="Open Sans"/>
                 <a:ea typeface="Open Sans"/>
               </a:rPr>
-              <a:t>An ML workflow with CUDA-Q at the center enables us to completely utilize the entire hardware stack for hybrid quantum-classical processing. </a:t>
+              <a:t>Quantum circuit generation mitigates the need for high-level algorithm expertise.</a:t>
             </a:r>
             <a:endParaRPr b="0" lang="en-US" sz="3600" spc="-1" strike="noStrike">
               <a:solidFill>
@@ -8861,8 +11201,30 @@
                 <a:latin typeface="Open Sans"/>
                 <a:ea typeface="Open Sans"/>
               </a:rPr>
-              <a:t>Quantum circuit generation mitigates the need for high-level algorithm expertise.</a:t>
-            </a:r>
+              <a:t>An ML workflow with CUDA-Q at the center enables us to completely utilize the entire hardware stack for hybrid quantum-classical processing. </a:t>
+            </a:r>
+            <a:endParaRPr b="0" lang="en-US" sz="3600" spc="-1" strike="noStrike">
+              <a:solidFill>
+                <a:srgbClr val="000000"/>
+              </a:solidFill>
+              <a:latin typeface="Arial"/>
+            </a:endParaRPr>
+          </a:p>
+          <a:p>
+            <a:pPr marL="216000" indent="-216000">
+              <a:lnSpc>
+                <a:spcPct val="100000"/>
+              </a:lnSpc>
+              <a:spcBef>
+                <a:spcPts val="1417"/>
+              </a:spcBef>
+              <a:buClr>
+                <a:srgbClr val="000000"/>
+              </a:buClr>
+              <a:buSzPct val="45000"/>
+              <a:buFont typeface="Wingdings" charset="2"/>
+              <a:buChar char=""/>
+            </a:pPr>
             <a:endParaRPr b="0" lang="en-US" sz="3600" spc="-1" strike="noStrike">
               <a:solidFill>
                 <a:srgbClr val="000000"/>
@@ -8874,14 +11236,14 @@
       </p:sp>
       <p:sp>
         <p:nvSpPr>
-          <p:cNvPr id="114" name=""/>
+          <p:cNvPr id="128" name=""/>
           <p:cNvSpPr/>
           <p:nvPr/>
         </p:nvSpPr>
         <p:spPr>
           <a:xfrm>
             <a:off x="579960" y="17087400"/>
-            <a:ext cx="10161720" cy="839880"/>
+            <a:ext cx="10168200" cy="839520"/>
           </a:xfrm>
           <a:prstGeom prst="rect">
             <a:avLst/>
@@ -8933,14 +11295,14 @@
       </p:sp>
       <p:sp>
         <p:nvSpPr>
-          <p:cNvPr id="115" name=""/>
+          <p:cNvPr id="129" name=""/>
           <p:cNvSpPr/>
           <p:nvPr/>
         </p:nvSpPr>
         <p:spPr>
           <a:xfrm>
-            <a:off x="615960" y="25367400"/>
-            <a:ext cx="10125720" cy="839880"/>
+            <a:off x="579960" y="25367400"/>
+            <a:ext cx="10158840" cy="839520"/>
           </a:xfrm>
           <a:prstGeom prst="rect">
             <a:avLst/>
@@ -8991,14 +11353,14 @@
       </p:sp>
       <p:sp>
         <p:nvSpPr>
-          <p:cNvPr id="116" name=""/>
+          <p:cNvPr id="130" name=""/>
           <p:cNvSpPr/>
           <p:nvPr/>
         </p:nvSpPr>
         <p:spPr>
           <a:xfrm>
             <a:off x="27781200" y="2971800"/>
-            <a:ext cx="4799520" cy="1827720"/>
+            <a:ext cx="4799160" cy="1827360"/>
           </a:xfrm>
           <a:prstGeom prst="rect">
             <a:avLst/>
@@ -9051,14 +11413,14 @@
       </p:sp>
       <p:sp>
         <p:nvSpPr>
-          <p:cNvPr id="117" name=""/>
+          <p:cNvPr id="131" name=""/>
           <p:cNvSpPr/>
           <p:nvPr/>
         </p:nvSpPr>
         <p:spPr>
           <a:xfrm>
             <a:off x="19905480" y="2971800"/>
-            <a:ext cx="4799520" cy="1827720"/>
+            <a:ext cx="4799160" cy="1827360"/>
           </a:xfrm>
           <a:prstGeom prst="rect">
             <a:avLst/>
@@ -9111,14 +11473,14 @@
       </p:sp>
       <p:sp>
         <p:nvSpPr>
-          <p:cNvPr id="118" name=""/>
+          <p:cNvPr id="132" name=""/>
           <p:cNvSpPr/>
           <p:nvPr/>
         </p:nvSpPr>
         <p:spPr>
           <a:xfrm>
             <a:off x="9781920" y="2971800"/>
-            <a:ext cx="4799520" cy="1827720"/>
+            <a:ext cx="4799160" cy="1827360"/>
           </a:xfrm>
           <a:prstGeom prst="rect">
             <a:avLst/>
@@ -9171,18 +11533,18 @@
       </p:sp>
       <p:pic>
         <p:nvPicPr>
-          <p:cNvPr id="119" name="" descr=""/>
+          <p:cNvPr id="133" name="" descr=""/>
           <p:cNvPicPr/>
           <p:nvPr/>
         </p:nvPicPr>
         <p:blipFill>
-          <a:blip r:embed="rId2"/>
+          <a:blip r:embed="rId1"/>
           <a:stretch/>
         </p:blipFill>
         <p:spPr>
           <a:xfrm>
-            <a:off x="38032200" y="3559320"/>
-            <a:ext cx="4951800" cy="1534320"/>
+            <a:off x="38176200" y="31318200"/>
+            <a:ext cx="4951440" cy="1533960"/>
           </a:xfrm>
           <a:prstGeom prst="rect">
             <a:avLst/>
@@ -9194,14 +11556,14 @@
       </p:pic>
       <p:sp>
         <p:nvSpPr>
-          <p:cNvPr id="120" name="TextBox 1"/>
+          <p:cNvPr id="134" name="TextBox 1"/>
           <p:cNvSpPr/>
           <p:nvPr/>
         </p:nvSpPr>
         <p:spPr>
           <a:xfrm>
             <a:off x="33256440" y="17618760"/>
-            <a:ext cx="9597240" cy="5974920"/>
+            <a:ext cx="9596880" cy="13215240"/>
           </a:xfrm>
           <a:prstGeom prst="rect">
             <a:avLst/>
@@ -9246,7 +11608,27 @@
                 <a:latin typeface="Open Sans"/>
                 <a:ea typeface="Open Sans"/>
               </a:rPr>
-              <a:t>The Evaluation metric can prune circuits with low fidelity, or inability to solve the target application.</a:t>
+              <a:t>The Evaluation metric can </a:t>
+            </a:r>
+            <a:r>
+              <a:rPr b="1" lang="en-US" sz="3600" spc="-1" strike="noStrike">
+                <a:solidFill>
+                  <a:schemeClr val="dk1"/>
+                </a:solidFill>
+                <a:latin typeface="Open Sans"/>
+                <a:ea typeface="Open Sans"/>
+              </a:rPr>
+              <a:t>prune</a:t>
+            </a:r>
+            <a:r>
+              <a:rPr b="0" lang="en-US" sz="3600" spc="-1" strike="noStrike">
+                <a:solidFill>
+                  <a:schemeClr val="dk1"/>
+                </a:solidFill>
+                <a:latin typeface="Open Sans"/>
+                <a:ea typeface="Open Sans"/>
+              </a:rPr>
+              <a:t> circuits with low fidelity, or inability to solve the target application.</a:t>
             </a:r>
             <a:endParaRPr b="0" lang="en-US" sz="3600" spc="-1" strike="noStrike">
               <a:solidFill>
@@ -9280,7 +11662,27 @@
                 <a:latin typeface="Open Sans"/>
                 <a:ea typeface="Open Sans"/>
               </a:rPr>
-              <a:t>Each major component of this paradigm is intended to be interchangeable, opening the door for a larger swath of applications.</a:t>
+              <a:t>Each major component of this paradigm is intended to be </a:t>
+            </a:r>
+            <a:r>
+              <a:rPr b="1" lang="en-US" sz="3600" spc="-1" strike="noStrike">
+                <a:solidFill>
+                  <a:schemeClr val="dk1"/>
+                </a:solidFill>
+                <a:latin typeface="Open Sans"/>
+                <a:ea typeface="Open Sans"/>
+              </a:rPr>
+              <a:t>interchangeable</a:t>
+            </a:r>
+            <a:r>
+              <a:rPr b="0" lang="en-US" sz="3600" spc="-1" strike="noStrike">
+                <a:solidFill>
+                  <a:schemeClr val="dk1"/>
+                </a:solidFill>
+                <a:latin typeface="Open Sans"/>
+                <a:ea typeface="Open Sans"/>
+              </a:rPr>
+              <a:t>, opening the door for a larger swath of applications.</a:t>
             </a:r>
             <a:endParaRPr b="0" lang="en-US" sz="3600" spc="-1" strike="noStrike">
               <a:solidFill>
@@ -9311,7 +11713,220 @@
                 <a:latin typeface="Open Sans"/>
                 <a:ea typeface="Open Sans"/>
               </a:rPr>
-              <a:t>Quantum computing provides speedups over classical solutions when algorithms can map to an algorithm that takes advantage of entanglement similarities.</a:t>
+              <a:t>Quantum computing provides speedups over classical solutions when algorithms can map to an algorithm that takes advantage of </a:t>
+            </a:r>
+            <a:r>
+              <a:rPr b="1" lang="en-US" sz="3600" spc="-1" strike="noStrike">
+                <a:solidFill>
+                  <a:schemeClr val="dk1"/>
+                </a:solidFill>
+                <a:latin typeface="Open Sans"/>
+                <a:ea typeface="Open Sans"/>
+              </a:rPr>
+              <a:t>entanglement similarities</a:t>
+            </a:r>
+            <a:r>
+              <a:rPr b="0" lang="en-US" sz="3600" spc="-1" strike="noStrike">
+                <a:solidFill>
+                  <a:schemeClr val="dk1"/>
+                </a:solidFill>
+                <a:latin typeface="Open Sans"/>
+                <a:ea typeface="Open Sans"/>
+              </a:rPr>
+              <a:t>.</a:t>
+            </a:r>
+            <a:endParaRPr b="0" lang="en-US" sz="3600" spc="-1" strike="noStrike">
+              <a:solidFill>
+                <a:srgbClr val="000000"/>
+              </a:solidFill>
+              <a:latin typeface="Arial"/>
+            </a:endParaRPr>
+          </a:p>
+          <a:p>
+            <a:pPr marL="216000" indent="-216000" algn="just">
+              <a:lnSpc>
+                <a:spcPct val="110000"/>
+              </a:lnSpc>
+              <a:buClr>
+                <a:srgbClr val="000000"/>
+              </a:buClr>
+              <a:buFont typeface="Symbol" charset="2"/>
+              <a:buChar char=""/>
+              <a:tabLst>
+                <a:tab algn="l" pos="0"/>
+              </a:tabLst>
+            </a:pPr>
+            <a:r>
+              <a:rPr b="0" lang="en-US" sz="3600" spc="-1" strike="noStrike">
+                <a:solidFill>
+                  <a:schemeClr val="dk1"/>
+                </a:solidFill>
+                <a:latin typeface="Open Sans"/>
+                <a:ea typeface="Open Sans"/>
+              </a:rPr>
+              <a:t>Quantum Architecture &amp; Compilation frameworks can </a:t>
+            </a:r>
+            <a:r>
+              <a:rPr b="1" lang="en-US" sz="3600" spc="-1" strike="noStrike">
+                <a:solidFill>
+                  <a:schemeClr val="dk1"/>
+                </a:solidFill>
+                <a:latin typeface="Open Sans"/>
+                <a:ea typeface="Open Sans"/>
+              </a:rPr>
+              <a:t>target heterogeneous</a:t>
+            </a:r>
+            <a:r>
+              <a:rPr b="0" lang="en-US" sz="3600" spc="-1" strike="noStrike">
+                <a:solidFill>
+                  <a:schemeClr val="dk1"/>
+                </a:solidFill>
+                <a:latin typeface="Open Sans"/>
+                <a:ea typeface="Open Sans"/>
+              </a:rPr>
+              <a:t> distributed systems.</a:t>
+            </a:r>
+            <a:endParaRPr b="0" lang="en-US" sz="3600" spc="-1" strike="noStrike">
+              <a:solidFill>
+                <a:srgbClr val="000000"/>
+              </a:solidFill>
+              <a:latin typeface="Arial"/>
+            </a:endParaRPr>
+          </a:p>
+          <a:p>
+            <a:pPr algn="just">
+              <a:lnSpc>
+                <a:spcPct val="110000"/>
+              </a:lnSpc>
+              <a:tabLst>
+                <a:tab algn="l" pos="0"/>
+              </a:tabLst>
+            </a:pPr>
+            <a:endParaRPr b="0" lang="en-US" sz="3600" spc="-1" strike="noStrike">
+              <a:solidFill>
+                <a:srgbClr val="000000"/>
+              </a:solidFill>
+              <a:latin typeface="Arial"/>
+            </a:endParaRPr>
+          </a:p>
+          <a:p>
+            <a:pPr algn="just">
+              <a:lnSpc>
+                <a:spcPct val="110000"/>
+              </a:lnSpc>
+              <a:tabLst>
+                <a:tab algn="l" pos="0"/>
+              </a:tabLst>
+            </a:pPr>
+            <a:r>
+              <a:rPr b="0" lang="en-US" sz="3600" spc="-1" strike="noStrike">
+                <a:solidFill>
+                  <a:schemeClr val="dk1"/>
+                </a:solidFill>
+                <a:latin typeface="Open Sans"/>
+                <a:ea typeface="Open Sans"/>
+              </a:rPr>
+              <a:t>If we intend to make use of complex quantum algorithms, we need either:</a:t>
+            </a:r>
+            <a:endParaRPr b="0" lang="en-US" sz="3600" spc="-1" strike="noStrike">
+              <a:solidFill>
+                <a:srgbClr val="000000"/>
+              </a:solidFill>
+              <a:latin typeface="Arial"/>
+            </a:endParaRPr>
+          </a:p>
+          <a:p>
+            <a:pPr lvl="1" marL="432000" indent="-216000" algn="just">
+              <a:lnSpc>
+                <a:spcPct val="110000"/>
+              </a:lnSpc>
+              <a:buClr>
+                <a:srgbClr val="000000"/>
+              </a:buClr>
+              <a:buSzPct val="45000"/>
+              <a:buFont typeface="Wingdings" charset="2"/>
+              <a:buChar char=""/>
+              <a:tabLst>
+                <a:tab algn="l" pos="0"/>
+              </a:tabLst>
+            </a:pPr>
+            <a:r>
+              <a:rPr b="0" lang="en-US" sz="3600" spc="-1" strike="noStrike">
+                <a:solidFill>
+                  <a:schemeClr val="dk1"/>
+                </a:solidFill>
+                <a:latin typeface="Open Sans"/>
+                <a:ea typeface="Open Sans"/>
+              </a:rPr>
+              <a:t>Scalable, reliable quantum hardware.</a:t>
+            </a:r>
+            <a:endParaRPr b="0" lang="en-US" sz="3600" spc="-1" strike="noStrike">
+              <a:solidFill>
+                <a:srgbClr val="000000"/>
+              </a:solidFill>
+              <a:latin typeface="Arial"/>
+            </a:endParaRPr>
+          </a:p>
+          <a:p>
+            <a:pPr algn="just">
+              <a:lnSpc>
+                <a:spcPct val="110000"/>
+              </a:lnSpc>
+              <a:tabLst>
+                <a:tab algn="l" pos="0"/>
+              </a:tabLst>
+            </a:pPr>
+            <a:r>
+              <a:rPr b="0" lang="en-US" sz="3600" spc="-1" strike="noStrike">
+                <a:solidFill>
+                  <a:schemeClr val="dk1"/>
+                </a:solidFill>
+                <a:latin typeface="Open Sans"/>
+                <a:ea typeface="Open Sans"/>
+              </a:rPr>
+              <a:t>	</a:t>
+            </a:r>
+            <a:r>
+              <a:rPr b="0" lang="en-US" sz="3600" spc="-1" strike="noStrike">
+                <a:solidFill>
+                  <a:schemeClr val="dk1"/>
+                </a:solidFill>
+                <a:latin typeface="Open Sans"/>
+                <a:ea typeface="Open Sans"/>
+              </a:rPr>
+              <a:t>or</a:t>
+            </a:r>
+            <a:endParaRPr b="0" lang="en-US" sz="3600" spc="-1" strike="noStrike">
+              <a:solidFill>
+                <a:srgbClr val="000000"/>
+              </a:solidFill>
+              <a:latin typeface="Arial"/>
+            </a:endParaRPr>
+          </a:p>
+          <a:p>
+            <a:pPr lvl="1" marL="432000" indent="-216000" algn="just">
+              <a:lnSpc>
+                <a:spcPct val="110000"/>
+              </a:lnSpc>
+              <a:buClr>
+                <a:srgbClr val="000000"/>
+              </a:buClr>
+              <a:buSzPct val="45000"/>
+              <a:buFont typeface="Wingdings" charset="2"/>
+              <a:buChar char=""/>
+              <a:tabLst>
+                <a:tab algn="l" pos="0"/>
+              </a:tabLst>
+            </a:pPr>
+            <a:r>
+              <a:rPr b="0" lang="en-US" sz="3600" spc="-1" strike="noStrike">
+                <a:solidFill>
+                  <a:schemeClr val="dk1"/>
+                </a:solidFill>
+                <a:latin typeface="Open Sans"/>
+                <a:ea typeface="Open Sans"/>
+              </a:rPr>
+              <a:t>Sophisticated algorithm, architecture &amp; compilation frameworks that enable execution on heterogeneous, distributed systems.</a:t>
             </a:r>
             <a:endParaRPr b="0" lang="en-US" sz="3600" spc="-1" strike="noStrike">
               <a:solidFill>
@@ -9324,7 +11939,211 @@
       </p:sp>
       <p:pic>
         <p:nvPicPr>
-          <p:cNvPr id="121" name="" descr=""/>
+          <p:cNvPr id="135" name="" descr=""/>
+          <p:cNvPicPr/>
+          <p:nvPr/>
+        </p:nvPicPr>
+        <p:blipFill>
+          <a:blip r:embed="rId2"/>
+          <a:stretch/>
+        </p:blipFill>
+        <p:spPr>
+          <a:xfrm>
+            <a:off x="990000" y="11163600"/>
+            <a:ext cx="9459720" cy="2057040"/>
+          </a:xfrm>
+          <a:prstGeom prst="rect">
+            <a:avLst/>
+          </a:prstGeom>
+          <a:ln w="0">
+            <a:noFill/>
+          </a:ln>
+        </p:spPr>
+      </p:pic>
+      <p:sp>
+        <p:nvSpPr>
+          <p:cNvPr id="136" name=""/>
+          <p:cNvSpPr/>
+          <p:nvPr/>
+        </p:nvSpPr>
+        <p:spPr>
+          <a:xfrm>
+            <a:off x="577800" y="26289000"/>
+            <a:ext cx="10163520" cy="5257080"/>
+          </a:xfrm>
+          <a:prstGeom prst="rect">
+            <a:avLst/>
+          </a:prstGeom>
+          <a:noFill/>
+          <a:ln w="0">
+            <a:noFill/>
+          </a:ln>
+        </p:spPr>
+        <p:style>
+          <a:lnRef idx="0"/>
+          <a:fillRef idx="0"/>
+          <a:effectRef idx="0"/>
+          <a:fontRef idx="minor"/>
+        </p:style>
+        <p:txBody>
+          <a:bodyPr lIns="90000" rIns="90000" tIns="45000" bIns="45000" anchor="t">
+            <a:noAutofit/>
+          </a:bodyPr>
+          <a:p>
+            <a:pPr marL="216000" indent="-216000">
+              <a:lnSpc>
+                <a:spcPct val="100000"/>
+              </a:lnSpc>
+              <a:spcBef>
+                <a:spcPts val="1417"/>
+              </a:spcBef>
+              <a:buClr>
+                <a:srgbClr val="000000"/>
+              </a:buClr>
+              <a:buSzPct val="45000"/>
+              <a:buFont typeface="Wingdings" charset="2"/>
+              <a:buChar char=""/>
+            </a:pPr>
+            <a:r>
+              <a:rPr b="0" lang="en-US" sz="3600" spc="-1" strike="noStrike">
+                <a:solidFill>
+                  <a:schemeClr val="dk1"/>
+                </a:solidFill>
+                <a:latin typeface="Open Sans"/>
+                <a:ea typeface="Open Sans"/>
+              </a:rPr>
+              <a:t>Quantum Hardware is noisy &amp; unreliable.</a:t>
+            </a:r>
+            <a:endParaRPr b="0" lang="en-US" sz="3600" spc="-1" strike="noStrike">
+              <a:solidFill>
+                <a:srgbClr val="000000"/>
+              </a:solidFill>
+              <a:latin typeface="Arial"/>
+            </a:endParaRPr>
+          </a:p>
+          <a:p>
+            <a:pPr marL="216000" indent="-216000">
+              <a:lnSpc>
+                <a:spcPct val="100000"/>
+              </a:lnSpc>
+              <a:spcBef>
+                <a:spcPts val="1417"/>
+              </a:spcBef>
+              <a:buClr>
+                <a:srgbClr val="000000"/>
+              </a:buClr>
+              <a:buSzPct val="45000"/>
+              <a:buFont typeface="Wingdings" charset="2"/>
+              <a:buChar char=""/>
+            </a:pPr>
+            <a:r>
+              <a:rPr b="0" lang="en-US" sz="3600" spc="-1" strike="noStrike">
+                <a:solidFill>
+                  <a:schemeClr val="dk1"/>
+                </a:solidFill>
+                <a:latin typeface="Open Sans"/>
+                <a:ea typeface="Open Sans"/>
+              </a:rPr>
+              <a:t>Qubit technologies are non-homogeneous.</a:t>
+            </a:r>
+            <a:endParaRPr b="0" lang="en-US" sz="3600" spc="-1" strike="noStrike">
+              <a:solidFill>
+                <a:srgbClr val="000000"/>
+              </a:solidFill>
+              <a:latin typeface="Arial"/>
+            </a:endParaRPr>
+          </a:p>
+          <a:p>
+            <a:pPr marL="216000" indent="-216000">
+              <a:lnSpc>
+                <a:spcPct val="100000"/>
+              </a:lnSpc>
+              <a:spcBef>
+                <a:spcPts val="1417"/>
+              </a:spcBef>
+              <a:buClr>
+                <a:srgbClr val="000000"/>
+              </a:buClr>
+              <a:buSzPct val="45000"/>
+              <a:buFont typeface="Wingdings" charset="2"/>
+              <a:buChar char=""/>
+            </a:pPr>
+            <a:r>
+              <a:rPr b="0" lang="en-US" sz="3600" spc="-1" strike="noStrike">
+                <a:solidFill>
+                  <a:schemeClr val="dk1"/>
+                </a:solidFill>
+                <a:latin typeface="Open Sans"/>
+                <a:ea typeface="Open Sans"/>
+              </a:rPr>
+              <a:t>Classical models experience exponential blowup when scaling to real-world systems.</a:t>
+            </a:r>
+            <a:endParaRPr b="0" lang="en-US" sz="3600" spc="-1" strike="noStrike">
+              <a:solidFill>
+                <a:srgbClr val="000000"/>
+              </a:solidFill>
+              <a:latin typeface="Arial"/>
+            </a:endParaRPr>
+          </a:p>
+          <a:p>
+            <a:pPr marL="216000" indent="-216000">
+              <a:lnSpc>
+                <a:spcPct val="100000"/>
+              </a:lnSpc>
+              <a:spcBef>
+                <a:spcPts val="1417"/>
+              </a:spcBef>
+              <a:buClr>
+                <a:srgbClr val="000000"/>
+              </a:buClr>
+              <a:buSzPct val="45000"/>
+              <a:buFont typeface="Wingdings" charset="2"/>
+              <a:buChar char=""/>
+            </a:pPr>
+            <a:r>
+              <a:rPr b="0" lang="en-US" sz="3600" spc="-1" strike="noStrike">
+                <a:solidFill>
+                  <a:schemeClr val="dk1"/>
+                </a:solidFill>
+                <a:latin typeface="Open Sans"/>
+                <a:ea typeface="Open Sans"/>
+              </a:rPr>
+              <a:t>Algorithm design is non-trivial &amp; often requires additional techniques to improve circuit fidelity on NISQ hardware.</a:t>
+            </a:r>
+            <a:endParaRPr b="0" lang="en-US" sz="3600" spc="-1" strike="noStrike">
+              <a:solidFill>
+                <a:srgbClr val="000000"/>
+              </a:solidFill>
+              <a:latin typeface="Arial"/>
+            </a:endParaRPr>
+          </a:p>
+          <a:p>
+            <a:pPr marL="216000" indent="-216000">
+              <a:lnSpc>
+                <a:spcPct val="100000"/>
+              </a:lnSpc>
+              <a:spcBef>
+                <a:spcPts val="1417"/>
+              </a:spcBef>
+              <a:buClr>
+                <a:srgbClr val="000000"/>
+              </a:buClr>
+              <a:buSzPct val="45000"/>
+              <a:buFont typeface="Wingdings" charset="2"/>
+              <a:buChar char=""/>
+            </a:pPr>
+            <a:endParaRPr b="0" lang="en-US" sz="3600" spc="-1" strike="noStrike">
+              <a:solidFill>
+                <a:srgbClr val="000000"/>
+              </a:solidFill>
+              <a:latin typeface="Arial"/>
+            </a:endParaRPr>
+          </a:p>
+        </p:txBody>
+      </p:sp>
+      <p:pic>
+        <p:nvPicPr>
+          <p:cNvPr id="137" name="" descr=""/>
           <p:cNvPicPr/>
           <p:nvPr/>
         </p:nvPicPr>
@@ -9334,8 +12153,8 @@
         </p:blipFill>
         <p:spPr>
           <a:xfrm>
-            <a:off x="990000" y="11163600"/>
-            <a:ext cx="9460080" cy="2057400"/>
+            <a:off x="11671560" y="21721320"/>
+            <a:ext cx="9695880" cy="8640000"/>
           </a:xfrm>
           <a:prstGeom prst="rect">
             <a:avLst/>
@@ -9347,18 +12166,19 @@
       </p:pic>
       <p:pic>
         <p:nvPicPr>
-          <p:cNvPr id="122" name="" descr=""/>
+          <p:cNvPr id="138" name="" descr=""/>
           <p:cNvPicPr/>
           <p:nvPr/>
         </p:nvPicPr>
         <p:blipFill>
           <a:blip r:embed="rId4"/>
+          <a:srcRect l="0" t="18239" r="7" b="0"/>
           <a:stretch/>
         </p:blipFill>
         <p:spPr>
           <a:xfrm>
-            <a:off x="22366800" y="21355560"/>
-            <a:ext cx="10287000" cy="4895640"/>
+            <a:off x="11995200" y="13043160"/>
+            <a:ext cx="5257440" cy="2941560"/>
           </a:xfrm>
           <a:prstGeom prst="rect">
             <a:avLst/>
@@ -9368,130 +12188,9 @@
           </a:ln>
         </p:spPr>
       </p:pic>
-      <p:sp>
-        <p:nvSpPr>
-          <p:cNvPr id="123" name=""/>
-          <p:cNvSpPr txBox="1"/>
-          <p:nvPr/>
-        </p:nvSpPr>
-        <p:spPr>
-          <a:xfrm>
-            <a:off x="577800" y="26289000"/>
-            <a:ext cx="10163880" cy="5257440"/>
-          </a:xfrm>
-          <a:prstGeom prst="rect">
-            <a:avLst/>
-          </a:prstGeom>
-          <a:noFill/>
-          <a:ln w="0">
-            <a:noFill/>
-          </a:ln>
-        </p:spPr>
-        <p:txBody>
-          <a:bodyPr lIns="90000" rIns="90000" tIns="45000" bIns="45000" anchor="t">
-            <a:noAutofit/>
-          </a:bodyPr>
-          <a:p>
-            <a:pPr marL="216000" indent="-216000">
-              <a:lnSpc>
-                <a:spcPct val="100000"/>
-              </a:lnSpc>
-              <a:spcBef>
-                <a:spcPts val="1417"/>
-              </a:spcBef>
-              <a:buClr>
-                <a:srgbClr val="000000"/>
-              </a:buClr>
-              <a:buSzPct val="45000"/>
-              <a:buFont typeface="Wingdings" charset="2"/>
-              <a:buChar char=""/>
-            </a:pPr>
-            <a:r>
-              <a:rPr b="0" lang="en-US" sz="3600" spc="-1" strike="noStrike">
-                <a:solidFill>
-                  <a:schemeClr val="dk1"/>
-                </a:solidFill>
-                <a:latin typeface="Open Sans"/>
-                <a:ea typeface="Open Sans"/>
-              </a:rPr>
-              <a:t>Quantum Hardware is noisy &amp; reliable algorithm design is non-trivial.</a:t>
-            </a:r>
-            <a:endParaRPr b="0" lang="en-US" sz="3600" spc="-1" strike="noStrike">
-              <a:solidFill>
-                <a:srgbClr val="000000"/>
-              </a:solidFill>
-              <a:latin typeface="Arial"/>
-            </a:endParaRPr>
-          </a:p>
-          <a:p>
-            <a:pPr marL="216000" indent="-216000">
-              <a:lnSpc>
-                <a:spcPct val="100000"/>
-              </a:lnSpc>
-              <a:spcBef>
-                <a:spcPts val="1417"/>
-              </a:spcBef>
-              <a:buClr>
-                <a:srgbClr val="000000"/>
-              </a:buClr>
-              <a:buSzPct val="45000"/>
-              <a:buFont typeface="Wingdings" charset="2"/>
-              <a:buChar char=""/>
-            </a:pPr>
-            <a:r>
-              <a:rPr b="0" lang="en-US" sz="3600" spc="-1" strike="noStrike">
-                <a:solidFill>
-                  <a:schemeClr val="dk1"/>
-                </a:solidFill>
-                <a:latin typeface="Open Sans"/>
-                <a:ea typeface="Open Sans"/>
-              </a:rPr>
-              <a:t>Classical models experience exponential blowup when scaling to real-world systems.</a:t>
-            </a:r>
-            <a:endParaRPr b="0" lang="en-US" sz="3600" spc="-1" strike="noStrike">
-              <a:solidFill>
-                <a:srgbClr val="000000"/>
-              </a:solidFill>
-              <a:latin typeface="Arial"/>
-            </a:endParaRPr>
-          </a:p>
-          <a:p>
-            <a:pPr marL="216000" indent="-216000">
-              <a:lnSpc>
-                <a:spcPct val="100000"/>
-              </a:lnSpc>
-              <a:spcBef>
-                <a:spcPts val="1417"/>
-              </a:spcBef>
-              <a:buClr>
-                <a:srgbClr val="000000"/>
-              </a:buClr>
-              <a:buSzPct val="45000"/>
-              <a:buFont typeface="Wingdings" charset="2"/>
-              <a:buChar char=""/>
-            </a:pPr>
-            <a:r>
-              <a:rPr b="0" lang="en-US" sz="3600" spc="-1" strike="noStrike">
-                <a:solidFill>
-                  <a:schemeClr val="dk1"/>
-                </a:solidFill>
-                <a:latin typeface="Open Sans"/>
-                <a:ea typeface="Open Sans"/>
-              </a:rPr>
-              <a:t>Each component is intended to be an interchangeable piece to target a large swath of applications</a:t>
-            </a:r>
-            <a:endParaRPr b="0" lang="en-US" sz="3600" spc="-1" strike="noStrike">
-              <a:solidFill>
-                <a:srgbClr val="000000"/>
-              </a:solidFill>
-              <a:latin typeface="Arial"/>
-            </a:endParaRPr>
-          </a:p>
-        </p:txBody>
-      </p:sp>
       <p:pic>
         <p:nvPicPr>
-          <p:cNvPr id="124" name="" descr=""/>
+          <p:cNvPr id="139" name="" descr=""/>
           <p:cNvPicPr/>
           <p:nvPr/>
         </p:nvPicPr>
@@ -9501,55 +12200,8 @@
         </p:blipFill>
         <p:spPr>
           <a:xfrm>
-            <a:off x="23088600" y="9744480"/>
-            <a:ext cx="8831160" cy="3971520"/>
-          </a:xfrm>
-          <a:prstGeom prst="rect">
-            <a:avLst/>
-          </a:prstGeom>
-          <a:ln w="0">
-            <a:noFill/>
-          </a:ln>
-        </p:spPr>
-      </p:pic>
-      <p:pic>
-        <p:nvPicPr>
-          <p:cNvPr id="125" name="" descr=""/>
-          <p:cNvPicPr/>
-          <p:nvPr/>
-        </p:nvPicPr>
-        <p:blipFill>
-          <a:blip r:embed="rId6"/>
-          <a:stretch/>
-        </p:blipFill>
-        <p:spPr>
-          <a:xfrm>
-            <a:off x="11671560" y="22585320"/>
-            <a:ext cx="9696240" cy="8640360"/>
-          </a:xfrm>
-          <a:prstGeom prst="rect">
-            <a:avLst/>
-          </a:prstGeom>
-          <a:ln w="0">
-            <a:noFill/>
-          </a:ln>
-        </p:spPr>
-      </p:pic>
-      <p:pic>
-        <p:nvPicPr>
-          <p:cNvPr id="126" name="" descr=""/>
-          <p:cNvPicPr/>
-          <p:nvPr/>
-        </p:nvPicPr>
-        <p:blipFill>
-          <a:blip r:embed="rId7"/>
-          <a:srcRect l="0" t="18239" r="7" b="0"/>
-          <a:stretch/>
-        </p:blipFill>
-        <p:spPr>
-          <a:xfrm>
-            <a:off x="11887200" y="13043160"/>
-            <a:ext cx="5257800" cy="2941920"/>
+            <a:off x="18262800" y="13114800"/>
+            <a:ext cx="2539440" cy="2971440"/>
           </a:xfrm>
           <a:prstGeom prst="rect">
             <a:avLst/>
@@ -9561,13 +12213,63 @@
       </p:pic>
       <p:sp>
         <p:nvSpPr>
-          <p:cNvPr id="127" name=""/>
+          <p:cNvPr id="140" name=""/>
           <p:cNvSpPr/>
           <p:nvPr/>
         </p:nvSpPr>
         <p:spPr>
           <a:xfrm>
-            <a:off x="15777360" y="17705520"/>
+            <a:off x="11525040" y="12801600"/>
+            <a:ext cx="9842400" cy="3428640"/>
+          </a:xfrm>
+          <a:prstGeom prst="roundRect">
+            <a:avLst>
+              <a:gd name="adj" fmla="val 16667"/>
+            </a:avLst>
+          </a:prstGeom>
+          <a:noFill/>
+          <a:ln w="38160">
+            <a:solidFill>
+              <a:srgbClr val="3465a4"/>
+            </a:solidFill>
+            <a:round/>
+          </a:ln>
+        </p:spPr>
+        <p:style>
+          <a:lnRef idx="0"/>
+          <a:fillRef idx="0"/>
+          <a:effectRef idx="0"/>
+          <a:fontRef idx="minor"/>
+        </p:style>
+        <p:txBody>
+          <a:bodyPr lIns="108720" rIns="108720" tIns="63720" bIns="63720" anchor="ctr">
+            <a:noAutofit/>
+          </a:bodyPr>
+          <a:p>
+            <a:pPr>
+              <a:lnSpc>
+                <a:spcPct val="100000"/>
+              </a:lnSpc>
+            </a:pPr>
+            <a:endParaRPr b="0" lang="en-US" sz="1800" spc="-1" strike="noStrike">
+              <a:solidFill>
+                <a:srgbClr val="000000"/>
+              </a:solidFill>
+              <a:latin typeface="Arial"/>
+              <a:ea typeface="Arial"/>
+            </a:endParaRPr>
+          </a:p>
+        </p:txBody>
+      </p:sp>
+      <p:sp>
+        <p:nvSpPr>
+          <p:cNvPr id="141" name=""/>
+          <p:cNvSpPr/>
+          <p:nvPr/>
+        </p:nvSpPr>
+        <p:spPr>
+          <a:xfrm>
+            <a:off x="15678720" y="17487720"/>
             <a:ext cx="1943280" cy="1943280"/>
           </a:xfrm>
           <a:prstGeom prst="ellipse">
@@ -9603,13 +12305,13 @@
       </p:sp>
       <p:sp>
         <p:nvSpPr>
-          <p:cNvPr id="128" name=""/>
+          <p:cNvPr id="142" name=""/>
           <p:cNvSpPr/>
           <p:nvPr/>
         </p:nvSpPr>
         <p:spPr>
           <a:xfrm rot="1183200">
-            <a:off x="16258680" y="18145080"/>
+            <a:off x="16160040" y="17927280"/>
             <a:ext cx="1963080" cy="1316880"/>
           </a:xfrm>
           <a:prstGeom prst="ellipse">
@@ -9646,15 +12348,15 @@
       </p:sp>
       <p:cxnSp>
         <p:nvCxnSpPr>
-          <p:cNvPr id="129" name=""/>
+          <p:cNvPr id="143" name=""/>
           <p:cNvCxnSpPr>
-            <a:endCxn id="127" idx="7"/>
+            <a:endCxn id="141" idx="7"/>
           </p:cNvCxnSpPr>
           <p:nvPr/>
         </p:nvCxnSpPr>
         <p:spPr>
           <a:xfrm flipV="1">
-            <a:off x="16805880" y="17989920"/>
+            <a:off x="16707240" y="17772120"/>
             <a:ext cx="630720" cy="630360"/>
           </a:xfrm>
           <a:prstGeom prst="straightConnector1">
@@ -9671,13 +12373,13 @@
       </p:cxnSp>
       <p:sp>
         <p:nvSpPr>
-          <p:cNvPr id="130" name=""/>
+          <p:cNvPr id="144" name=""/>
           <p:cNvSpPr/>
           <p:nvPr/>
         </p:nvSpPr>
         <p:spPr>
           <a:xfrm>
-            <a:off x="16727760" y="18564120"/>
+            <a:off x="16629120" y="18346320"/>
             <a:ext cx="114480" cy="114480"/>
           </a:xfrm>
           <a:prstGeom prst="ellipse">
@@ -9714,7 +12416,53 @@
       </p:sp>
       <p:pic>
         <p:nvPicPr>
-          <p:cNvPr id="131" name="" descr=""/>
+          <p:cNvPr id="145" name="" descr=""/>
+          <p:cNvPicPr/>
+          <p:nvPr/>
+        </p:nvPicPr>
+        <p:blipFill>
+          <a:blip r:embed="rId6"/>
+          <a:stretch/>
+        </p:blipFill>
+        <p:spPr>
+          <a:xfrm>
+            <a:off x="33444360" y="8242200"/>
+            <a:ext cx="4202640" cy="2514600"/>
+          </a:xfrm>
+          <a:prstGeom prst="rect">
+            <a:avLst/>
+          </a:prstGeom>
+          <a:ln w="0">
+            <a:noFill/>
+          </a:ln>
+        </p:spPr>
+      </p:pic>
+      <p:pic>
+        <p:nvPicPr>
+          <p:cNvPr id="146" name="" descr=""/>
+          <p:cNvPicPr/>
+          <p:nvPr/>
+        </p:nvPicPr>
+        <p:blipFill>
+          <a:blip r:embed="rId7"/>
+          <a:stretch/>
+        </p:blipFill>
+        <p:spPr>
+          <a:xfrm>
+            <a:off x="38932200" y="8251920"/>
+            <a:ext cx="4125960" cy="2468880"/>
+          </a:xfrm>
+          <a:prstGeom prst="rect">
+            <a:avLst/>
+          </a:prstGeom>
+          <a:ln w="0">
+            <a:noFill/>
+          </a:ln>
+        </p:spPr>
+      </p:pic>
+      <p:pic>
+        <p:nvPicPr>
+          <p:cNvPr id="147" name="" descr=""/>
           <p:cNvPicPr/>
           <p:nvPr/>
         </p:nvPicPr>
@@ -9724,8 +12472,8 @@
         </p:blipFill>
         <p:spPr>
           <a:xfrm>
-            <a:off x="18262800" y="13114800"/>
-            <a:ext cx="2539800" cy="2971800"/>
+            <a:off x="36082800" y="12006720"/>
+            <a:ext cx="4125960" cy="2468880"/>
           </a:xfrm>
           <a:prstGeom prst="rect">
             <a:avLst/>
@@ -9735,50 +12483,153 @@
           </a:ln>
         </p:spPr>
       </p:pic>
-      <p:sp>
-        <p:nvSpPr>
-          <p:cNvPr id="132" name=""/>
-          <p:cNvSpPr/>
+      <p:cxnSp>
+        <p:nvCxnSpPr>
+          <p:cNvPr id="148" name=""/>
+          <p:cNvCxnSpPr>
+            <a:stCxn id="145" idx="3"/>
+            <a:endCxn id="146" idx="1"/>
+          </p:cNvCxnSpPr>
           <p:nvPr/>
-        </p:nvSpPr>
-        <p:spPr>
-          <a:xfrm>
-            <a:off x="11417040" y="12801600"/>
-            <a:ext cx="9842760" cy="3429000"/>
-          </a:xfrm>
-          <a:prstGeom prst="roundRect">
-            <a:avLst>
-              <a:gd name="adj" fmla="val 16667"/>
-            </a:avLst>
-          </a:prstGeom>
-          <a:noFill/>
+        </p:nvCxnSpPr>
+        <p:spPr>
+          <a:xfrm flipV="1">
+            <a:off x="37647000" y="9486360"/>
+            <a:ext cx="1285560" cy="13320"/>
+          </a:xfrm>
+          <a:prstGeom prst="straightConnector1">
+            <a:avLst/>
+          </a:prstGeom>
           <a:ln w="38160">
             <a:solidFill>
-              <a:srgbClr val="3465a4"/>
+              <a:srgbClr val="000000"/>
             </a:solidFill>
             <a:round/>
-          </a:ln>
-        </p:spPr>
-        <p:style>
-          <a:lnRef idx="0"/>
-          <a:fillRef idx="0"/>
-          <a:effectRef idx="0"/>
-          <a:fontRef idx="minor"/>
-        </p:style>
-        <p:txBody>
-          <a:bodyPr lIns="108720" rIns="108720" tIns="63720" bIns="63720" anchor="ctr">
-            <a:noAutofit/>
-          </a:bodyPr>
-          <a:p>
-            <a:endParaRPr b="0" lang="en-US" sz="1800" spc="-1" strike="noStrike">
-              <a:solidFill>
-                <a:srgbClr val="000000"/>
-              </a:solidFill>
-              <a:latin typeface="Arial"/>
-            </a:endParaRPr>
-          </a:p>
-        </p:txBody>
-      </p:sp>
+            <a:tailEnd len="med" type="triangle" w="med"/>
+          </a:ln>
+        </p:spPr>
+      </p:cxnSp>
+      <p:cxnSp>
+        <p:nvCxnSpPr>
+          <p:cNvPr id="149" name=""/>
+          <p:cNvCxnSpPr>
+            <a:stCxn id="146" idx="2"/>
+            <a:endCxn id="147" idx="3"/>
+          </p:cNvCxnSpPr>
+          <p:nvPr/>
+        </p:nvCxnSpPr>
+        <p:spPr>
+          <a:xfrm rot="5400000">
+            <a:off x="39341520" y="11587680"/>
+            <a:ext cx="2520720" cy="786600"/>
+          </a:xfrm>
+          <a:prstGeom prst="curvedConnector2">
+            <a:avLst/>
+          </a:prstGeom>
+          <a:ln w="38160">
+            <a:solidFill>
+              <a:srgbClr val="000000"/>
+            </a:solidFill>
+            <a:round/>
+            <a:tailEnd len="med" type="triangle" w="med"/>
+          </a:ln>
+        </p:spPr>
+      </p:cxnSp>
+      <p:cxnSp>
+        <p:nvCxnSpPr>
+          <p:cNvPr id="150" name=""/>
+          <p:cNvCxnSpPr>
+            <a:stCxn id="147" idx="1"/>
+            <a:endCxn id="145" idx="2"/>
+          </p:cNvCxnSpPr>
+          <p:nvPr/>
+        </p:nvCxnSpPr>
+        <p:spPr>
+          <a:xfrm rot="10800000">
+            <a:off x="35545680" y="10756440"/>
+            <a:ext cx="537480" cy="2484720"/>
+          </a:xfrm>
+          <a:prstGeom prst="curvedConnector2">
+            <a:avLst/>
+          </a:prstGeom>
+          <a:ln w="38160">
+            <a:solidFill>
+              <a:srgbClr val="000000"/>
+            </a:solidFill>
+            <a:round/>
+            <a:tailEnd len="med" type="triangle" w="med"/>
+          </a:ln>
+        </p:spPr>
+      </p:cxnSp>
+      <p:pic>
+        <p:nvPicPr>
+          <p:cNvPr id="151" name="" descr=""/>
+          <p:cNvPicPr/>
+          <p:nvPr/>
+        </p:nvPicPr>
+        <p:blipFill>
+          <a:blip r:embed="rId9"/>
+          <a:stretch/>
+        </p:blipFill>
+        <p:spPr>
+          <a:xfrm>
+            <a:off x="23398920" y="9928800"/>
+            <a:ext cx="7991280" cy="3600000"/>
+          </a:xfrm>
+          <a:prstGeom prst="rect">
+            <a:avLst/>
+          </a:prstGeom>
+          <a:ln w="0">
+            <a:noFill/>
+          </a:ln>
+        </p:spPr>
+      </p:pic>
+      <p:pic>
+        <p:nvPicPr>
+          <p:cNvPr id="152" name="" descr=""/>
+          <p:cNvPicPr/>
+          <p:nvPr/>
+        </p:nvPicPr>
+        <p:blipFill>
+          <a:blip r:embed="rId10"/>
+          <a:stretch/>
+        </p:blipFill>
+        <p:spPr>
+          <a:xfrm>
+            <a:off x="22302720" y="21675600"/>
+            <a:ext cx="10224360" cy="4971600"/>
+          </a:xfrm>
+          <a:prstGeom prst="rect">
+            <a:avLst/>
+          </a:prstGeom>
+          <a:ln w="0">
+            <a:noFill/>
+          </a:ln>
+        </p:spPr>
+      </p:pic>
+      <p:pic>
+        <p:nvPicPr>
+          <p:cNvPr id="153" name="" descr=""/>
+          <p:cNvPicPr/>
+          <p:nvPr/>
+        </p:nvPicPr>
+        <p:blipFill>
+          <a:blip r:embed="rId11"/>
+          <a:stretch/>
+        </p:blipFill>
+        <p:spPr>
+          <a:xfrm>
+            <a:off x="275400" y="31180680"/>
+            <a:ext cx="11070000" cy="1903680"/>
+          </a:xfrm>
+          <a:prstGeom prst="rect">
+            <a:avLst/>
+          </a:prstGeom>
+          <a:ln w="0">
+            <a:noFill/>
+          </a:ln>
+        </p:spPr>
+      </p:pic>
     </p:spTree>
   </p:cSld>
   <mc:AlternateContent>
